--- a/figures/Fig3_specification_robustness_v2.pptx
+++ b/figures/Fig3_specification_robustness_v2.pptx
@@ -2223,9 +2223,9 @@
         <p:grpSpPr>
           <a:xfrm>
             <a:off x="182880" y="182880"/>
-            <a:ext cx="10241280" cy="6949440"/>
+            <a:ext cx="8229600" cy="6035040"/>
             <a:chOff x="182880" y="182880"/>
-            <a:chExt cx="10241280" cy="6949440"/>
+            <a:chExt cx="8229600" cy="6035040"/>
           </a:xfrm>
         </p:grpSpPr>
         <p:sp>
@@ -2237,7 +2237,7 @@
           <p:spPr>
             <a:xfrm>
               <a:off x="182880" y="182880"/>
-              <a:ext cx="10241280" cy="6949439"/>
+              <a:ext cx="8229600" cy="6035040"/>
             </a:xfrm>
             <a:prstGeom prst="rect">
               <a:avLst/>
@@ -2272,7 +2272,7 @@
           <p:spPr>
             <a:xfrm>
               <a:off x="182880" y="182880"/>
-              <a:ext cx="10241280" cy="6949439"/>
+              <a:ext cx="8229600" cy="6035039"/>
             </a:xfrm>
             <a:prstGeom prst="rect">
               <a:avLst/>
@@ -2306,8 +2306,8 @@
           </p:nvSpPr>
           <p:spPr>
             <a:xfrm>
-              <a:off x="252469" y="3472335"/>
-              <a:ext cx="10102101" cy="3590395"/>
+              <a:off x="252469" y="3118364"/>
+              <a:ext cx="8090421" cy="3029966"/>
             </a:xfrm>
             <a:prstGeom prst="rect">
               <a:avLst/>
@@ -2317,7 +2317,7 @@
                 <a:alpha val="100000"/>
               </a:srgbClr>
             </a:solidFill>
-            <a:ln w="11086" cap="rnd">
+            <a:ln w="12318" cap="rnd">
               <a:solidFill>
                 <a:srgbClr val="FFFFFF">
                   <a:alpha val="100000"/>
@@ -2342,7 +2342,7 @@
           <p:spPr>
             <a:xfrm>
               <a:off x="252469" y="252469"/>
-              <a:ext cx="4621923" cy="3219866"/>
+              <a:ext cx="3562499" cy="2865895"/>
             </a:xfrm>
             <a:prstGeom prst="rect">
               <a:avLst/>
@@ -2352,7 +2352,7 @@
                 <a:alpha val="100000"/>
               </a:srgbClr>
             </a:solidFill>
-            <a:ln w="11086" cap="rnd">
+            <a:ln w="12318" cap="rnd">
               <a:solidFill>
                 <a:srgbClr val="FFFFFF">
                   <a:alpha val="100000"/>
@@ -2376,8 +2376,8 @@
           </p:nvSpPr>
           <p:spPr>
             <a:xfrm>
-              <a:off x="4874392" y="252469"/>
-              <a:ext cx="5480178" cy="3219866"/>
+              <a:off x="3814968" y="252469"/>
+              <a:ext cx="4527922" cy="2865895"/>
             </a:xfrm>
             <a:prstGeom prst="rect">
               <a:avLst/>
@@ -2387,7 +2387,7 @@
                 <a:alpha val="100000"/>
               </a:srgbClr>
             </a:solidFill>
-            <a:ln w="11086" cap="rnd">
+            <a:ln w="12318" cap="rnd">
               <a:solidFill>
                 <a:srgbClr val="FFFFFF">
                   <a:alpha val="100000"/>
@@ -2411,8 +2411,8 @@
           </p:nvSpPr>
           <p:spPr>
             <a:xfrm>
-              <a:off x="1302233" y="656226"/>
-              <a:ext cx="2931108" cy="2470195"/>
+              <a:off x="1409973" y="806953"/>
+              <a:ext cx="1714756" cy="1935060"/>
             </a:xfrm>
             <a:prstGeom prst="rect">
               <a:avLst/>
@@ -2437,8 +2437,8 @@
           </p:nvSpPr>
           <p:spPr>
             <a:xfrm>
-              <a:off x="3465670" y="2479466"/>
-              <a:ext cx="697882" cy="588141"/>
+              <a:off x="2675626" y="2235212"/>
+              <a:ext cx="408275" cy="460728"/>
             </a:xfrm>
             <a:prstGeom prst="rect">
               <a:avLst/>
@@ -2472,8 +2472,8 @@
           </p:nvSpPr>
           <p:spPr>
             <a:xfrm>
-              <a:off x="2767787" y="2479466"/>
-              <a:ext cx="697882" cy="588141"/>
+              <a:off x="2267351" y="2235212"/>
+              <a:ext cx="408275" cy="460728"/>
             </a:xfrm>
             <a:prstGeom prst="rect">
               <a:avLst/>
@@ -2507,8 +2507,8 @@
           </p:nvSpPr>
           <p:spPr>
             <a:xfrm>
-              <a:off x="2767787" y="1891324"/>
-              <a:ext cx="697882" cy="588141"/>
+              <a:off x="2267351" y="1774484"/>
+              <a:ext cx="408275" cy="460728"/>
             </a:xfrm>
             <a:prstGeom prst="rect">
               <a:avLst/>
@@ -2542,8 +2542,8 @@
           </p:nvSpPr>
           <p:spPr>
             <a:xfrm>
-              <a:off x="3465670" y="1891324"/>
-              <a:ext cx="697882" cy="588141"/>
+              <a:off x="2675626" y="1774484"/>
+              <a:ext cx="408275" cy="460728"/>
             </a:xfrm>
             <a:prstGeom prst="rect">
               <a:avLst/>
@@ -2577,8 +2577,8 @@
           </p:nvSpPr>
           <p:spPr>
             <a:xfrm>
-              <a:off x="2069904" y="1891324"/>
-              <a:ext cx="697882" cy="588141"/>
+              <a:off x="1859076" y="1774484"/>
+              <a:ext cx="408275" cy="460728"/>
             </a:xfrm>
             <a:prstGeom prst="rect">
               <a:avLst/>
@@ -2612,8 +2612,8 @@
           </p:nvSpPr>
           <p:spPr>
             <a:xfrm>
-              <a:off x="2069904" y="2479466"/>
-              <a:ext cx="697882" cy="588141"/>
+              <a:off x="1859076" y="2235212"/>
+              <a:ext cx="408275" cy="460728"/>
             </a:xfrm>
             <a:prstGeom prst="rect">
               <a:avLst/>
@@ -2647,8 +2647,8 @@
           </p:nvSpPr>
           <p:spPr>
             <a:xfrm>
-              <a:off x="1372021" y="2479466"/>
-              <a:ext cx="697882" cy="588141"/>
+              <a:off x="1450801" y="2235212"/>
+              <a:ext cx="408275" cy="460728"/>
             </a:xfrm>
             <a:prstGeom prst="rect">
               <a:avLst/>
@@ -2682,8 +2682,8 @@
           </p:nvSpPr>
           <p:spPr>
             <a:xfrm>
-              <a:off x="1372021" y="1891324"/>
-              <a:ext cx="697882" cy="588141"/>
+              <a:off x="1450801" y="1774484"/>
+              <a:ext cx="408275" cy="460728"/>
             </a:xfrm>
             <a:prstGeom prst="rect">
               <a:avLst/>
@@ -2717,8 +2717,8 @@
           </p:nvSpPr>
           <p:spPr>
             <a:xfrm>
-              <a:off x="2767787" y="1303182"/>
-              <a:ext cx="697882" cy="588141"/>
+              <a:off x="2267351" y="1313755"/>
+              <a:ext cx="408275" cy="460728"/>
             </a:xfrm>
             <a:prstGeom prst="rect">
               <a:avLst/>
@@ -2752,8 +2752,8 @@
           </p:nvSpPr>
           <p:spPr>
             <a:xfrm>
-              <a:off x="2069904" y="1303182"/>
-              <a:ext cx="697882" cy="588141"/>
+              <a:off x="1859076" y="1313755"/>
+              <a:ext cx="408275" cy="460728"/>
             </a:xfrm>
             <a:prstGeom prst="rect">
               <a:avLst/>
@@ -2787,8 +2787,8 @@
           </p:nvSpPr>
           <p:spPr>
             <a:xfrm>
-              <a:off x="3465670" y="1303182"/>
-              <a:ext cx="697882" cy="588141"/>
+              <a:off x="2675626" y="1313755"/>
+              <a:ext cx="408275" cy="460728"/>
             </a:xfrm>
             <a:prstGeom prst="rect">
               <a:avLst/>
@@ -2822,8 +2822,8 @@
           </p:nvSpPr>
           <p:spPr>
             <a:xfrm>
-              <a:off x="1372021" y="1303182"/>
-              <a:ext cx="697882" cy="588141"/>
+              <a:off x="1450801" y="1313755"/>
+              <a:ext cx="408275" cy="460728"/>
             </a:xfrm>
             <a:prstGeom prst="rect">
               <a:avLst/>
@@ -2857,8 +2857,8 @@
           </p:nvSpPr>
           <p:spPr>
             <a:xfrm>
-              <a:off x="2069904" y="715041"/>
-              <a:ext cx="697882" cy="588141"/>
+              <a:off x="1859076" y="853026"/>
+              <a:ext cx="408275" cy="460728"/>
             </a:xfrm>
             <a:prstGeom prst="rect">
               <a:avLst/>
@@ -2892,8 +2892,8 @@
           </p:nvSpPr>
           <p:spPr>
             <a:xfrm>
-              <a:off x="3465670" y="715041"/>
-              <a:ext cx="697882" cy="588141"/>
+              <a:off x="2675626" y="853026"/>
+              <a:ext cx="408275" cy="460728"/>
             </a:xfrm>
             <a:prstGeom prst="rect">
               <a:avLst/>
@@ -2927,8 +2927,8 @@
           </p:nvSpPr>
           <p:spPr>
             <a:xfrm>
-              <a:off x="2767787" y="715041"/>
-              <a:ext cx="697882" cy="588141"/>
+              <a:off x="2267351" y="853026"/>
+              <a:ext cx="408275" cy="460728"/>
             </a:xfrm>
             <a:prstGeom prst="rect">
               <a:avLst/>
@@ -2962,8 +2962,8 @@
           </p:nvSpPr>
           <p:spPr>
             <a:xfrm>
-              <a:off x="1372021" y="715041"/>
-              <a:ext cx="697882" cy="588141"/>
+              <a:off x="1450801" y="853026"/>
+              <a:ext cx="408275" cy="460728"/>
             </a:xfrm>
             <a:prstGeom prst="rect">
               <a:avLst/>
@@ -2997,8 +2997,8 @@
           </p:nvSpPr>
           <p:spPr>
             <a:xfrm>
-              <a:off x="3668536" y="2739933"/>
-              <a:ext cx="292150" cy="67208"/>
+              <a:off x="2719836" y="2428772"/>
+              <a:ext cx="319857" cy="73609"/>
             </a:xfrm>
             <a:prstGeom prst="rect">
               <a:avLst/>
@@ -3018,7 +3018,7 @@
                 </a:spcAft>
               </a:pPr>
               <a:r>
-                <a:rPr sz="739" i="0" b="0">
+                <a:rPr sz="810" i="0" b="0">
                   <a:solidFill>
                     <a:srgbClr val="1A1A1A">
                       <a:alpha val="100000"/>
@@ -3040,8 +3040,8 @@
           </p:nvSpPr>
           <p:spPr>
             <a:xfrm>
-              <a:off x="2970653" y="2739933"/>
-              <a:ext cx="292150" cy="67208"/>
+              <a:off x="2311560" y="2428772"/>
+              <a:ext cx="319857" cy="73609"/>
             </a:xfrm>
             <a:prstGeom prst="rect">
               <a:avLst/>
@@ -3061,7 +3061,7 @@
                 </a:spcAft>
               </a:pPr>
               <a:r>
-                <a:rPr sz="739" i="0" b="0">
+                <a:rPr sz="810" i="0" b="0">
                   <a:solidFill>
                     <a:srgbClr val="1A1A1A">
                       <a:alpha val="100000"/>
@@ -3083,8 +3083,8 @@
           </p:nvSpPr>
           <p:spPr>
             <a:xfrm>
-              <a:off x="2970653" y="2151791"/>
-              <a:ext cx="292150" cy="67208"/>
+              <a:off x="2311560" y="1968043"/>
+              <a:ext cx="319857" cy="73609"/>
             </a:xfrm>
             <a:prstGeom prst="rect">
               <a:avLst/>
@@ -3104,7 +3104,7 @@
                 </a:spcAft>
               </a:pPr>
               <a:r>
-                <a:rPr sz="739" i="0" b="0">
+                <a:rPr sz="810" i="0" b="0">
                   <a:solidFill>
                     <a:srgbClr val="1A1A1A">
                       <a:alpha val="100000"/>
@@ -3126,8 +3126,8 @@
           </p:nvSpPr>
           <p:spPr>
             <a:xfrm>
-              <a:off x="3668536" y="2151791"/>
-              <a:ext cx="292150" cy="67208"/>
+              <a:off x="2719836" y="1968043"/>
+              <a:ext cx="319857" cy="73609"/>
             </a:xfrm>
             <a:prstGeom prst="rect">
               <a:avLst/>
@@ -3147,7 +3147,7 @@
                 </a:spcAft>
               </a:pPr>
               <a:r>
-                <a:rPr sz="739" i="0" b="0">
+                <a:rPr sz="810" i="0" b="0">
                   <a:solidFill>
                     <a:srgbClr val="1A1A1A">
                       <a:alpha val="100000"/>
@@ -3169,8 +3169,8 @@
           </p:nvSpPr>
           <p:spPr>
             <a:xfrm>
-              <a:off x="2272770" y="2151791"/>
-              <a:ext cx="292150" cy="67208"/>
+              <a:off x="1903285" y="1968043"/>
+              <a:ext cx="319857" cy="73609"/>
             </a:xfrm>
             <a:prstGeom prst="rect">
               <a:avLst/>
@@ -3190,7 +3190,7 @@
                 </a:spcAft>
               </a:pPr>
               <a:r>
-                <a:rPr sz="739" i="0" b="0">
+                <a:rPr sz="810" i="0" b="0">
                   <a:solidFill>
                     <a:srgbClr val="1A1A1A">
                       <a:alpha val="100000"/>
@@ -3212,8 +3212,8 @@
           </p:nvSpPr>
           <p:spPr>
             <a:xfrm>
-              <a:off x="2272770" y="2739933"/>
-              <a:ext cx="292150" cy="67208"/>
+              <a:off x="1903285" y="2428772"/>
+              <a:ext cx="319857" cy="73609"/>
             </a:xfrm>
             <a:prstGeom prst="rect">
               <a:avLst/>
@@ -3233,7 +3233,7 @@
                 </a:spcAft>
               </a:pPr>
               <a:r>
-                <a:rPr sz="739" i="0" b="0">
+                <a:rPr sz="810" i="0" b="0">
                   <a:solidFill>
                     <a:srgbClr val="1A1A1A">
                       <a:alpha val="100000"/>
@@ -3255,8 +3255,8 @@
           </p:nvSpPr>
           <p:spPr>
             <a:xfrm>
-              <a:off x="1593129" y="2739933"/>
-              <a:ext cx="255666" cy="67208"/>
+              <a:off x="1514989" y="2428772"/>
+              <a:ext cx="279897" cy="73609"/>
             </a:xfrm>
             <a:prstGeom prst="rect">
               <a:avLst/>
@@ -3276,7 +3276,7 @@
                 </a:spcAft>
               </a:pPr>
               <a:r>
-                <a:rPr sz="739" i="0" b="0">
+                <a:rPr sz="810" i="0" b="0">
                   <a:solidFill>
                     <a:srgbClr val="1A1A1A">
                       <a:alpha val="100000"/>
@@ -3298,8 +3298,8 @@
           </p:nvSpPr>
           <p:spPr>
             <a:xfrm>
-              <a:off x="1593129" y="2151791"/>
-              <a:ext cx="255666" cy="67208"/>
+              <a:off x="1514989" y="1968043"/>
+              <a:ext cx="279897" cy="73609"/>
             </a:xfrm>
             <a:prstGeom prst="rect">
               <a:avLst/>
@@ -3319,7 +3319,7 @@
                 </a:spcAft>
               </a:pPr>
               <a:r>
-                <a:rPr sz="739" i="0" b="0">
+                <a:rPr sz="810" i="0" b="0">
                   <a:solidFill>
                     <a:srgbClr val="1A1A1A">
                       <a:alpha val="100000"/>
@@ -3341,8 +3341,8 @@
           </p:nvSpPr>
           <p:spPr>
             <a:xfrm>
-              <a:off x="3025380" y="1563649"/>
-              <a:ext cx="182697" cy="67208"/>
+              <a:off x="2371499" y="1507315"/>
+              <a:ext cx="199979" cy="73609"/>
             </a:xfrm>
             <a:prstGeom prst="rect">
               <a:avLst/>
@@ -3362,7 +3362,7 @@
                 </a:spcAft>
               </a:pPr>
               <a:r>
-                <a:rPr sz="739" i="0" b="0">
+                <a:rPr sz="810" i="0" b="0">
                   <a:solidFill>
                     <a:srgbClr val="1A1A1A">
                       <a:alpha val="100000"/>
@@ -3384,8 +3384,8 @@
           </p:nvSpPr>
           <p:spPr>
             <a:xfrm>
-              <a:off x="2327497" y="1563649"/>
-              <a:ext cx="182697" cy="67208"/>
+              <a:off x="1963224" y="1507315"/>
+              <a:ext cx="199979" cy="73609"/>
             </a:xfrm>
             <a:prstGeom prst="rect">
               <a:avLst/>
@@ -3405,7 +3405,7 @@
                 </a:spcAft>
               </a:pPr>
               <a:r>
-                <a:rPr sz="739" i="0" b="0">
+                <a:rPr sz="810" i="0" b="0">
                   <a:solidFill>
                     <a:srgbClr val="1A1A1A">
                       <a:alpha val="100000"/>
@@ -3427,8 +3427,8 @@
           </p:nvSpPr>
           <p:spPr>
             <a:xfrm>
-              <a:off x="3723263" y="1563649"/>
-              <a:ext cx="182697" cy="67208"/>
+              <a:off x="2779774" y="1507315"/>
+              <a:ext cx="199979" cy="73609"/>
             </a:xfrm>
             <a:prstGeom prst="rect">
               <a:avLst/>
@@ -3448,7 +3448,7 @@
                 </a:spcAft>
               </a:pPr>
               <a:r>
-                <a:rPr sz="739" i="0" b="0">
+                <a:rPr sz="810" i="0" b="0">
                   <a:solidFill>
                     <a:srgbClr val="1A1A1A">
                       <a:alpha val="100000"/>
@@ -3470,8 +3470,8 @@
           </p:nvSpPr>
           <p:spPr>
             <a:xfrm>
-              <a:off x="1629614" y="1563649"/>
-              <a:ext cx="182697" cy="67208"/>
+              <a:off x="1554949" y="1507315"/>
+              <a:ext cx="199979" cy="73609"/>
             </a:xfrm>
             <a:prstGeom prst="rect">
               <a:avLst/>
@@ -3491,7 +3491,7 @@
                 </a:spcAft>
               </a:pPr>
               <a:r>
-                <a:rPr sz="739" i="0" b="0">
+                <a:rPr sz="810" i="0" b="0">
                   <a:solidFill>
                     <a:srgbClr val="1A1A1A">
                       <a:alpha val="100000"/>
@@ -3513,8 +3513,8 @@
           </p:nvSpPr>
           <p:spPr>
             <a:xfrm>
-              <a:off x="2327497" y="975507"/>
-              <a:ext cx="182697" cy="67208"/>
+              <a:off x="1963224" y="1046586"/>
+              <a:ext cx="199979" cy="73609"/>
             </a:xfrm>
             <a:prstGeom prst="rect">
               <a:avLst/>
@@ -3534,7 +3534,7 @@
                 </a:spcAft>
               </a:pPr>
               <a:r>
-                <a:rPr sz="739" i="0" b="0">
+                <a:rPr sz="810" i="0" b="0">
                   <a:solidFill>
                     <a:srgbClr val="1A1A1A">
                       <a:alpha val="100000"/>
@@ -3556,8 +3556,8 @@
           </p:nvSpPr>
           <p:spPr>
             <a:xfrm>
-              <a:off x="3723263" y="975507"/>
-              <a:ext cx="182697" cy="67208"/>
+              <a:off x="2779774" y="1046586"/>
+              <a:ext cx="199979" cy="73609"/>
             </a:xfrm>
             <a:prstGeom prst="rect">
               <a:avLst/>
@@ -3577,7 +3577,7 @@
                 </a:spcAft>
               </a:pPr>
               <a:r>
-                <a:rPr sz="739" i="0" b="0">
+                <a:rPr sz="810" i="0" b="0">
                   <a:solidFill>
                     <a:srgbClr val="1A1A1A">
                       <a:alpha val="100000"/>
@@ -3599,8 +3599,8 @@
           </p:nvSpPr>
           <p:spPr>
             <a:xfrm>
-              <a:off x="3025380" y="975507"/>
-              <a:ext cx="182697" cy="67208"/>
+              <a:off x="2371499" y="1046586"/>
+              <a:ext cx="199979" cy="73609"/>
             </a:xfrm>
             <a:prstGeom prst="rect">
               <a:avLst/>
@@ -3620,7 +3620,7 @@
                 </a:spcAft>
               </a:pPr>
               <a:r>
-                <a:rPr sz="739" i="0" b="0">
+                <a:rPr sz="810" i="0" b="0">
                   <a:solidFill>
                     <a:srgbClr val="1A1A1A">
                       <a:alpha val="100000"/>
@@ -3642,8 +3642,8 @@
           </p:nvSpPr>
           <p:spPr>
             <a:xfrm>
-              <a:off x="1629614" y="975507"/>
-              <a:ext cx="182697" cy="67208"/>
+              <a:off x="1554949" y="1046586"/>
+              <a:ext cx="199979" cy="73609"/>
             </a:xfrm>
             <a:prstGeom prst="rect">
               <a:avLst/>
@@ -3663,7 +3663,7 @@
                 </a:spcAft>
               </a:pPr>
               <a:r>
-                <a:rPr sz="739" i="0" b="0">
+                <a:rPr sz="810" i="0" b="0">
                   <a:solidFill>
                     <a:srgbClr val="1A1A1A">
                       <a:alpha val="100000"/>
@@ -3685,15 +3685,15 @@
           </p:nvSpPr>
           <p:spPr>
             <a:xfrm>
-              <a:off x="1302233" y="656226"/>
-              <a:ext cx="0" cy="2470195"/>
+              <a:off x="1409973" y="806953"/>
+              <a:ext cx="0" cy="1935060"/>
             </a:xfrm>
             <a:custGeom>
               <a:avLst/>
               <a:pathLst>
-                <a:path w="0" h="2470195">
+                <a:path w="0" h="1935060">
                   <a:moveTo>
-                    <a:pt x="0" y="2470195"/>
+                    <a:pt x="0" y="1935060"/>
                   </a:moveTo>
                   <a:lnTo>
                     <a:pt x="0" y="0"/>
@@ -3725,8 +3725,8 @@
           </p:nvSpPr>
           <p:spPr>
             <a:xfrm>
-              <a:off x="633770" y="2740847"/>
-              <a:ext cx="617220" cy="65379"/>
+              <a:off x="665774" y="2429184"/>
+              <a:ext cx="687263" cy="72786"/>
             </a:xfrm>
             <a:prstGeom prst="rect">
               <a:avLst/>
@@ -3746,7 +3746,7 @@
                 </a:spcAft>
               </a:pPr>
               <a:r>
-                <a:rPr sz="720" i="0" b="0">
+                <a:rPr sz="800" i="0" b="0">
                   <a:solidFill>
                     <a:srgbClr val="262626">
                       <a:alpha val="100000"/>
@@ -3768,8 +3768,8 @@
           </p:nvSpPr>
           <p:spPr>
             <a:xfrm>
-              <a:off x="353689" y="2152705"/>
-              <a:ext cx="897300" cy="65379"/>
+              <a:off x="353689" y="1968455"/>
+              <a:ext cx="999347" cy="72786"/>
             </a:xfrm>
             <a:prstGeom prst="rect">
               <a:avLst/>
@@ -3789,7 +3789,7 @@
                 </a:spcAft>
               </a:pPr>
               <a:r>
-                <a:rPr sz="720" i="0" b="0">
+                <a:rPr sz="800" i="0" b="0">
                   <a:solidFill>
                     <a:srgbClr val="262626">
                       <a:alpha val="100000"/>
@@ -3811,8 +3811,8 @@
           </p:nvSpPr>
           <p:spPr>
             <a:xfrm>
-              <a:off x="431139" y="1564563"/>
-              <a:ext cx="819851" cy="65379"/>
+              <a:off x="440100" y="1507726"/>
+              <a:ext cx="912936" cy="72786"/>
             </a:xfrm>
             <a:prstGeom prst="rect">
               <a:avLst/>
@@ -3832,7 +3832,7 @@
                 </a:spcAft>
               </a:pPr>
               <a:r>
-                <a:rPr sz="720" i="0" b="0">
+                <a:rPr sz="800" i="0" b="0">
                   <a:solidFill>
                     <a:srgbClr val="262626">
                       <a:alpha val="100000"/>
@@ -3854,8 +3854,8 @@
           </p:nvSpPr>
           <p:spPr>
             <a:xfrm>
-              <a:off x="654344" y="976422"/>
-              <a:ext cx="596646" cy="65379"/>
+              <a:off x="688542" y="1046997"/>
+              <a:ext cx="664494" cy="72786"/>
             </a:xfrm>
             <a:prstGeom prst="rect">
               <a:avLst/>
@@ -3875,7 +3875,7 @@
                 </a:spcAft>
               </a:pPr>
               <a:r>
-                <a:rPr sz="720" i="0" b="0">
+                <a:rPr sz="800" i="0" b="0">
                   <a:solidFill>
                     <a:srgbClr val="262626">
                       <a:alpha val="100000"/>
@@ -3897,18 +3897,18 @@
           </p:nvSpPr>
           <p:spPr>
             <a:xfrm>
-              <a:off x="1273764" y="2773537"/>
-              <a:ext cx="28468" cy="0"/>
+              <a:off x="1378342" y="2465577"/>
+              <a:ext cx="31631" cy="0"/>
             </a:xfrm>
             <a:custGeom>
               <a:avLst/>
               <a:pathLst>
-                <a:path w="28468" h="0">
+                <a:path w="31631" h="0">
                   <a:moveTo>
                     <a:pt x="0" y="0"/>
                   </a:moveTo>
                   <a:lnTo>
-                    <a:pt x="28468" y="0"/>
+                    <a:pt x="31631" y="0"/>
                   </a:lnTo>
                 </a:path>
               </a:pathLst>
@@ -3937,18 +3937,18 @@
           </p:nvSpPr>
           <p:spPr>
             <a:xfrm>
-              <a:off x="1273764" y="2185395"/>
-              <a:ext cx="28468" cy="0"/>
+              <a:off x="1378342" y="2004848"/>
+              <a:ext cx="31631" cy="0"/>
             </a:xfrm>
             <a:custGeom>
               <a:avLst/>
               <a:pathLst>
-                <a:path w="28468" h="0">
+                <a:path w="31631" h="0">
                   <a:moveTo>
                     <a:pt x="0" y="0"/>
                   </a:moveTo>
                   <a:lnTo>
-                    <a:pt x="28468" y="0"/>
+                    <a:pt x="31631" y="0"/>
                   </a:lnTo>
                 </a:path>
               </a:pathLst>
@@ -3977,18 +3977,18 @@
           </p:nvSpPr>
           <p:spPr>
             <a:xfrm>
-              <a:off x="1273764" y="1597253"/>
-              <a:ext cx="28468" cy="0"/>
+              <a:off x="1378342" y="1544119"/>
+              <a:ext cx="31631" cy="0"/>
             </a:xfrm>
             <a:custGeom>
               <a:avLst/>
               <a:pathLst>
-                <a:path w="28468" h="0">
+                <a:path w="31631" h="0">
                   <a:moveTo>
                     <a:pt x="0" y="0"/>
                   </a:moveTo>
                   <a:lnTo>
-                    <a:pt x="28468" y="0"/>
+                    <a:pt x="31631" y="0"/>
                   </a:lnTo>
                 </a:path>
               </a:pathLst>
@@ -4017,18 +4017,18 @@
           </p:nvSpPr>
           <p:spPr>
             <a:xfrm>
-              <a:off x="1273764" y="1009111"/>
-              <a:ext cx="28468" cy="0"/>
+              <a:off x="1378342" y="1083391"/>
+              <a:ext cx="31631" cy="0"/>
             </a:xfrm>
             <a:custGeom>
               <a:avLst/>
               <a:pathLst>
-                <a:path w="28468" h="0">
+                <a:path w="31631" h="0">
                   <a:moveTo>
                     <a:pt x="0" y="0"/>
                   </a:moveTo>
                   <a:lnTo>
-                    <a:pt x="28468" y="0"/>
+                    <a:pt x="31631" y="0"/>
                   </a:lnTo>
                 </a:path>
               </a:pathLst>
@@ -4057,18 +4057,18 @@
           </p:nvSpPr>
           <p:spPr>
             <a:xfrm>
-              <a:off x="1302233" y="3126422"/>
-              <a:ext cx="2931108" cy="0"/>
+              <a:off x="1409973" y="2742014"/>
+              <a:ext cx="1714756" cy="0"/>
             </a:xfrm>
             <a:custGeom>
               <a:avLst/>
               <a:pathLst>
-                <a:path w="2931108" h="0">
+                <a:path w="1714756" h="0">
                   <a:moveTo>
                     <a:pt x="0" y="0"/>
                   </a:moveTo>
                   <a:lnTo>
-                    <a:pt x="2931108" y="0"/>
+                    <a:pt x="1714756" y="0"/>
                   </a:lnTo>
                 </a:path>
               </a:pathLst>
@@ -4097,15 +4097,15 @@
           </p:nvSpPr>
           <p:spPr>
             <a:xfrm>
-              <a:off x="1720962" y="3126422"/>
-              <a:ext cx="0" cy="28468"/>
+              <a:off x="1654938" y="2742014"/>
+              <a:ext cx="0" cy="31631"/>
             </a:xfrm>
             <a:custGeom>
               <a:avLst/>
               <a:pathLst>
-                <a:path w="0" h="28468">
+                <a:path w="0" h="31631">
                   <a:moveTo>
-                    <a:pt x="0" y="28468"/>
+                    <a:pt x="0" y="31631"/>
                   </a:moveTo>
                   <a:lnTo>
                     <a:pt x="0" y="0"/>
@@ -4137,15 +4137,15 @@
           </p:nvSpPr>
           <p:spPr>
             <a:xfrm>
-              <a:off x="2418845" y="3126422"/>
-              <a:ext cx="0" cy="28468"/>
+              <a:off x="2063214" y="2742014"/>
+              <a:ext cx="0" cy="31631"/>
             </a:xfrm>
             <a:custGeom>
               <a:avLst/>
               <a:pathLst>
-                <a:path w="0" h="28468">
+                <a:path w="0" h="31631">
                   <a:moveTo>
-                    <a:pt x="0" y="28468"/>
+                    <a:pt x="0" y="31631"/>
                   </a:moveTo>
                   <a:lnTo>
                     <a:pt x="0" y="0"/>
@@ -4177,15 +4177,15 @@
           </p:nvSpPr>
           <p:spPr>
             <a:xfrm>
-              <a:off x="3116728" y="3126422"/>
-              <a:ext cx="0" cy="28468"/>
+              <a:off x="2471489" y="2742014"/>
+              <a:ext cx="0" cy="31631"/>
             </a:xfrm>
             <a:custGeom>
               <a:avLst/>
               <a:pathLst>
-                <a:path w="0" h="28468">
+                <a:path w="0" h="31631">
                   <a:moveTo>
-                    <a:pt x="0" y="28468"/>
+                    <a:pt x="0" y="31631"/>
                   </a:moveTo>
                   <a:lnTo>
                     <a:pt x="0" y="0"/>
@@ -4217,15 +4217,15 @@
           </p:nvSpPr>
           <p:spPr>
             <a:xfrm>
-              <a:off x="3814611" y="3126422"/>
-              <a:ext cx="0" cy="28468"/>
+              <a:off x="2879764" y="2742014"/>
+              <a:ext cx="0" cy="31631"/>
             </a:xfrm>
             <a:custGeom>
               <a:avLst/>
               <a:pathLst>
-                <a:path w="0" h="28468">
+                <a:path w="0" h="31631">
                   <a:moveTo>
-                    <a:pt x="0" y="28468"/>
+                    <a:pt x="0" y="31631"/>
                   </a:moveTo>
                   <a:lnTo>
                     <a:pt x="0" y="0"/>
@@ -4257,8 +4257,8 @@
           </p:nvSpPr>
           <p:spPr>
             <a:xfrm>
-              <a:off x="1695588" y="3177665"/>
-              <a:ext cx="50749" cy="65379"/>
+              <a:off x="1626683" y="2798950"/>
+              <a:ext cx="56509" cy="72786"/>
             </a:xfrm>
             <a:prstGeom prst="rect">
               <a:avLst/>
@@ -4278,7 +4278,7 @@
                 </a:spcAft>
               </a:pPr>
               <a:r>
-                <a:rPr sz="720" i="0" b="0">
+                <a:rPr sz="800" i="0" b="0">
                   <a:solidFill>
                     <a:srgbClr val="262626">
                       <a:alpha val="100000"/>
@@ -4300,8 +4300,8 @@
           </p:nvSpPr>
           <p:spPr>
             <a:xfrm>
-              <a:off x="2368096" y="3177665"/>
-              <a:ext cx="101498" cy="65379"/>
+              <a:off x="2006704" y="2798950"/>
+              <a:ext cx="113019" cy="72786"/>
             </a:xfrm>
             <a:prstGeom prst="rect">
               <a:avLst/>
@@ -4321,7 +4321,7 @@
                 </a:spcAft>
               </a:pPr>
               <a:r>
-                <a:rPr sz="720" i="0" b="0">
+                <a:rPr sz="800" i="0" b="0">
                   <a:solidFill>
                     <a:srgbClr val="262626">
                       <a:alpha val="100000"/>
@@ -4343,8 +4343,8 @@
           </p:nvSpPr>
           <p:spPr>
             <a:xfrm>
-              <a:off x="3065979" y="3177665"/>
-              <a:ext cx="101498" cy="65379"/>
+              <a:off x="2414979" y="2798950"/>
+              <a:ext cx="113019" cy="72786"/>
             </a:xfrm>
             <a:prstGeom prst="rect">
               <a:avLst/>
@@ -4364,7 +4364,7 @@
                 </a:spcAft>
               </a:pPr>
               <a:r>
-                <a:rPr sz="720" i="0" b="0">
+                <a:rPr sz="800" i="0" b="0">
                   <a:solidFill>
                     <a:srgbClr val="262626">
                       <a:alpha val="100000"/>
@@ -4386,8 +4386,8 @@
           </p:nvSpPr>
           <p:spPr>
             <a:xfrm>
-              <a:off x="3763862" y="3177665"/>
-              <a:ext cx="101498" cy="65379"/>
+              <a:off x="2823254" y="2798950"/>
+              <a:ext cx="113019" cy="72786"/>
             </a:xfrm>
             <a:prstGeom prst="rect">
               <a:avLst/>
@@ -4407,7 +4407,7 @@
                 </a:spcAft>
               </a:pPr>
               <a:r>
-                <a:rPr sz="720" i="0" b="0">
+                <a:rPr sz="800" i="0" b="0">
                   <a:solidFill>
                     <a:srgbClr val="262626">
                       <a:alpha val="100000"/>
@@ -4429,8 +4429,8 @@
           </p:nvSpPr>
           <p:spPr>
             <a:xfrm>
-              <a:off x="2024654" y="3290623"/>
-              <a:ext cx="1486265" cy="81838"/>
+              <a:off x="1441054" y="2924765"/>
+              <a:ext cx="1652595" cy="90982"/>
             </a:xfrm>
             <a:prstGeom prst="rect">
               <a:avLst/>
@@ -4450,7 +4450,7 @@
                 </a:spcAft>
               </a:pPr>
               <a:r>
-                <a:rPr sz="900" i="0" b="0">
+                <a:rPr sz="1000" i="0" b="0">
                   <a:solidFill>
                     <a:srgbClr val="0D0D0D">
                       <a:alpha val="100000"/>
@@ -4472,8 +4472,8 @@
           </p:nvSpPr>
           <p:spPr>
             <a:xfrm>
-              <a:off x="4347214" y="1474145"/>
-              <a:ext cx="425957" cy="834357"/>
+              <a:off x="3251255" y="1342009"/>
+              <a:ext cx="462492" cy="864949"/>
             </a:xfrm>
             <a:prstGeom prst="rect">
               <a:avLst/>
@@ -4498,8 +4498,8 @@
           </p:nvSpPr>
           <p:spPr>
             <a:xfrm>
-              <a:off x="4404150" y="1541780"/>
-              <a:ext cx="146669" cy="72786"/>
+              <a:off x="3314518" y="1417250"/>
+              <a:ext cx="165140" cy="81838"/>
             </a:xfrm>
             <a:prstGeom prst="rect">
               <a:avLst/>
@@ -4519,7 +4519,7 @@
                 </a:spcAft>
               </a:pPr>
               <a:r>
-                <a:rPr sz="800" i="0" b="1">
+                <a:rPr sz="900" i="0" b="1">
                   <a:solidFill>
                     <a:srgbClr val="000000">
                       <a:alpha val="100000"/>
@@ -4547,7 +4547,7 @@
           </p:blipFill>
           <p:spPr>
             <a:xfrm>
-              <a:off x="4404150" y="1682202"/>
+              <a:off x="3314518" y="1574331"/>
               <a:ext cx="113872" cy="569364"/>
             </a:xfrm>
             <a:prstGeom prst="rect">
@@ -4563,7 +4563,7 @@
           </p:nvSpPr>
           <p:spPr>
             <a:xfrm>
-              <a:off x="4495249" y="2194243"/>
+              <a:off x="3405616" y="2086372"/>
               <a:ext cx="22774" cy="0"/>
             </a:xfrm>
             <a:custGeom>
@@ -4603,7 +4603,7 @@
           </p:nvSpPr>
           <p:spPr>
             <a:xfrm>
-              <a:off x="4495249" y="2065320"/>
+              <a:off x="3405616" y="1957450"/>
               <a:ext cx="22774" cy="0"/>
             </a:xfrm>
             <a:custGeom>
@@ -4643,7 +4643,7 @@
           </p:nvSpPr>
           <p:spPr>
             <a:xfrm>
-              <a:off x="4495249" y="1936398"/>
+              <a:off x="3405616" y="1828527"/>
               <a:ext cx="22774" cy="0"/>
             </a:xfrm>
             <a:custGeom>
@@ -4683,7 +4683,7 @@
           </p:nvSpPr>
           <p:spPr>
             <a:xfrm>
-              <a:off x="4495249" y="1807475"/>
+              <a:off x="3405616" y="1699604"/>
               <a:ext cx="22774" cy="0"/>
             </a:xfrm>
             <a:custGeom>
@@ -4723,7 +4723,7 @@
           </p:nvSpPr>
           <p:spPr>
             <a:xfrm>
-              <a:off x="4404150" y="2194243"/>
+              <a:off x="3314518" y="2086372"/>
               <a:ext cx="22774" cy="0"/>
             </a:xfrm>
             <a:custGeom>
@@ -4763,7 +4763,7 @@
           </p:nvSpPr>
           <p:spPr>
             <a:xfrm>
-              <a:off x="4404150" y="2065320"/>
+              <a:off x="3314518" y="1957450"/>
               <a:ext cx="22774" cy="0"/>
             </a:xfrm>
             <a:custGeom>
@@ -4803,7 +4803,7 @@
           </p:nvSpPr>
           <p:spPr>
             <a:xfrm>
-              <a:off x="4404150" y="1936398"/>
+              <a:off x="3314518" y="1828527"/>
               <a:ext cx="22774" cy="0"/>
             </a:xfrm>
             <a:custGeom>
@@ -4843,7 +4843,7 @@
           </p:nvSpPr>
           <p:spPr>
             <a:xfrm>
-              <a:off x="4404150" y="1807475"/>
+              <a:off x="3314518" y="1699604"/>
               <a:ext cx="22774" cy="0"/>
             </a:xfrm>
             <a:custGeom>
@@ -4883,8 +4883,8 @@
           </p:nvSpPr>
           <p:spPr>
             <a:xfrm>
-              <a:off x="4574960" y="2157850"/>
-              <a:ext cx="141274" cy="72786"/>
+              <a:off x="3491653" y="2045453"/>
+              <a:ext cx="158831" cy="81838"/>
             </a:xfrm>
             <a:prstGeom prst="rect">
               <a:avLst/>
@@ -4904,7 +4904,7 @@
                 </a:spcAft>
               </a:pPr>
               <a:r>
-                <a:rPr sz="800" i="0" b="0">
+                <a:rPr sz="900" i="0" b="0">
                   <a:solidFill>
                     <a:srgbClr val="000000">
                       <a:alpha val="100000"/>
@@ -4926,8 +4926,8 @@
           </p:nvSpPr>
           <p:spPr>
             <a:xfrm>
-              <a:off x="4574960" y="2028927"/>
-              <a:ext cx="141274" cy="72786"/>
+              <a:off x="3491653" y="1916530"/>
+              <a:ext cx="158831" cy="81838"/>
             </a:xfrm>
             <a:prstGeom prst="rect">
               <a:avLst/>
@@ -4947,7 +4947,7 @@
                 </a:spcAft>
               </a:pPr>
               <a:r>
-                <a:rPr sz="800" i="0" b="0">
+                <a:rPr sz="900" i="0" b="0">
                   <a:solidFill>
                     <a:srgbClr val="000000">
                       <a:alpha val="100000"/>
@@ -4969,8 +4969,8 @@
           </p:nvSpPr>
           <p:spPr>
             <a:xfrm>
-              <a:off x="4574960" y="1900004"/>
-              <a:ext cx="141274" cy="72786"/>
+              <a:off x="3491653" y="1787607"/>
+              <a:ext cx="158831" cy="81838"/>
             </a:xfrm>
             <a:prstGeom prst="rect">
               <a:avLst/>
@@ -4990,7 +4990,7 @@
                 </a:spcAft>
               </a:pPr>
               <a:r>
-                <a:rPr sz="800" i="0" b="0">
+                <a:rPr sz="900" i="0" b="0">
                   <a:solidFill>
                     <a:srgbClr val="000000">
                       <a:alpha val="100000"/>
@@ -5012,8 +5012,8 @@
           </p:nvSpPr>
           <p:spPr>
             <a:xfrm>
-              <a:off x="4574960" y="1771082"/>
-              <a:ext cx="141274" cy="72786"/>
+              <a:off x="3491653" y="1658684"/>
+              <a:ext cx="158831" cy="81838"/>
             </a:xfrm>
             <a:prstGeom prst="rect">
               <a:avLst/>
@@ -5033,7 +5033,7 @@
                 </a:spcAft>
               </a:pPr>
               <a:r>
-                <a:rPr sz="800" i="0" b="0">
+                <a:rPr sz="900" i="0" b="0">
                   <a:solidFill>
                     <a:srgbClr val="000000">
                       <a:alpha val="100000"/>
@@ -5055,8 +5055,8 @@
           </p:nvSpPr>
           <p:spPr>
             <a:xfrm>
-              <a:off x="1302233" y="503004"/>
-              <a:ext cx="3313785" cy="74432"/>
+              <a:off x="1409973" y="509330"/>
+              <a:ext cx="2004456" cy="83576"/>
             </a:xfrm>
             <a:prstGeom prst="rect">
               <a:avLst/>
@@ -5076,7 +5076,7 @@
                 </a:spcAft>
               </a:pPr>
               <a:r>
-                <a:rPr sz="819" i="0" b="0">
+                <a:rPr sz="919" i="0" b="0">
                   <a:solidFill>
                     <a:srgbClr val="4D4D4D">
                       <a:alpha val="100000"/>
@@ -5085,7 +5085,7 @@
                   <a:latin typeface="Arial"/>
                   <a:cs typeface="Arial"/>
                 </a:rPr>
-                <a:t>Hazard ratio for accumulated warming; * P&lt;0.05, ** P&lt;0.01, *** P&lt;0.001</a:t>
+                <a:t>Hazard ratio for accumulated warming;</a:t>
               </a:r>
             </a:p>
           </p:txBody>
@@ -5098,8 +5098,51 @@
           </p:nvSpPr>
           <p:spPr>
             <a:xfrm>
-              <a:off x="1302233" y="328384"/>
-              <a:ext cx="2944093" cy="90982"/>
+              <a:off x="1409973" y="635517"/>
+              <a:ext cx="1716786" cy="83576"/>
+            </a:xfrm>
+            <a:prstGeom prst="rect">
+              <a:avLst/>
+            </a:prstGeom>
+            <a:noFill/>
+          </p:spPr>
+          <p:txBody>
+            <a:bodyPr lIns="0" rIns="0" tIns="0" bIns="0" anchorCtr="1" anchor="ctr" wrap="none"/>
+            <a:lstStyle/>
+            <a:p>
+              <a:pPr algn="l" marL="0" marR="0" indent="0">
+                <a:spcBef>
+                  <a:spcPts val="0"/>
+                </a:spcBef>
+                <a:spcAft>
+                  <a:spcPts val="0"/>
+                </a:spcAft>
+              </a:pPr>
+              <a:r>
+                <a:rPr sz="919" i="0" b="0">
+                  <a:solidFill>
+                    <a:srgbClr val="4D4D4D">
+                      <a:alpha val="100000"/>
+                    </a:srgbClr>
+                  </a:solidFill>
+                  <a:latin typeface="Arial"/>
+                  <a:cs typeface="Arial"/>
+                </a:rPr>
+                <a:t> * P&lt;0.05, ** P&lt;0.01, *** P&lt;0.001</a:t>
+              </a:r>
+            </a:p>
+          </p:txBody>
+        </p:sp>
+        <p:sp>
+          <p:nvSpPr>
+            <p:cNvPr id="77" name="tx77"/>
+            <p:cNvSpPr/>
+            <p:nvPr/>
+          </p:nvSpPr>
+          <p:spPr>
+            <a:xfrm>
+              <a:off x="1409973" y="328384"/>
+              <a:ext cx="2166487" cy="90982"/>
             </a:xfrm>
             <a:prstGeom prst="rect">
               <a:avLst/>
@@ -5128,21 +5171,21 @@
                   <a:latin typeface="Arial"/>
                   <a:cs typeface="Arial"/>
                 </a:rPr>
-                <a:t>Only annual mean temperature carries the signal</a:t>
+                <a:t>Signal is confined to annual mean T</a:t>
               </a:r>
             </a:p>
           </p:txBody>
         </p:sp>
         <p:sp>
           <p:nvSpPr>
-            <p:cNvPr id="77" name="tx77"/>
-            <p:cNvSpPr/>
-            <p:nvPr/>
-          </p:nvSpPr>
-          <p:spPr>
-            <a:xfrm>
-              <a:off x="333404" y="319815"/>
-              <a:ext cx="84764" cy="109179"/>
+            <p:cNvPr id="78" name="tx78"/>
+            <p:cNvSpPr/>
+            <p:nvPr/>
+          </p:nvSpPr>
+          <p:spPr>
+            <a:xfrm>
+              <a:off x="324586" y="309979"/>
+              <a:ext cx="91805" cy="118231"/>
             </a:xfrm>
             <a:prstGeom prst="rect">
               <a:avLst/>
@@ -5162,7 +5205,7 @@
                 </a:spcAft>
               </a:pPr>
               <a:r>
-                <a:rPr sz="1200" i="0" b="1">
+                <a:rPr sz="1300" i="0" b="1">
                   <a:solidFill>
                     <a:srgbClr val="000000">
                       <a:alpha val="100000"/>
@@ -5178,14 +5221,14 @@
         </p:sp>
         <p:sp>
           <p:nvSpPr>
-            <p:cNvPr id="78" name="rc78"/>
-            <p:cNvSpPr/>
-            <p:nvPr/>
-          </p:nvSpPr>
-          <p:spPr>
-            <a:xfrm>
-              <a:off x="5924156" y="656226"/>
-              <a:ext cx="2931108" cy="2470195"/>
+            <p:cNvPr id="79" name="rc79"/>
+            <p:cNvSpPr/>
+            <p:nvPr/>
+          </p:nvSpPr>
+          <p:spPr>
+            <a:xfrm>
+              <a:off x="4972472" y="806953"/>
+              <a:ext cx="1714756" cy="1935060"/>
             </a:xfrm>
             <a:prstGeom prst="rect">
               <a:avLst/>
@@ -5204,14 +5247,14 @@
         </p:sp>
         <p:sp>
           <p:nvSpPr>
-            <p:cNvPr id="79" name="rc79"/>
-            <p:cNvSpPr/>
-            <p:nvPr/>
-          </p:nvSpPr>
-          <p:spPr>
-            <a:xfrm>
-              <a:off x="8087593" y="2479466"/>
-              <a:ext cx="697882" cy="588141"/>
+            <p:cNvPr id="80" name="rc80"/>
+            <p:cNvSpPr/>
+            <p:nvPr/>
+          </p:nvSpPr>
+          <p:spPr>
+            <a:xfrm>
+              <a:off x="6238126" y="2235212"/>
+              <a:ext cx="408275" cy="460728"/>
             </a:xfrm>
             <a:prstGeom prst="rect">
               <a:avLst/>
@@ -5239,14 +5282,14 @@
         </p:sp>
         <p:sp>
           <p:nvSpPr>
-            <p:cNvPr id="80" name="rc80"/>
-            <p:cNvSpPr/>
-            <p:nvPr/>
-          </p:nvSpPr>
-          <p:spPr>
-            <a:xfrm>
-              <a:off x="7389710" y="2479466"/>
-              <a:ext cx="697882" cy="588141"/>
+            <p:cNvPr id="81" name="rc81"/>
+            <p:cNvSpPr/>
+            <p:nvPr/>
+          </p:nvSpPr>
+          <p:spPr>
+            <a:xfrm>
+              <a:off x="5829850" y="2235212"/>
+              <a:ext cx="408275" cy="460728"/>
             </a:xfrm>
             <a:prstGeom prst="rect">
               <a:avLst/>
@@ -5274,14 +5317,14 @@
         </p:sp>
         <p:sp>
           <p:nvSpPr>
-            <p:cNvPr id="81" name="rc81"/>
-            <p:cNvSpPr/>
-            <p:nvPr/>
-          </p:nvSpPr>
-          <p:spPr>
-            <a:xfrm>
-              <a:off x="7389710" y="1891324"/>
-              <a:ext cx="697882" cy="588141"/>
+            <p:cNvPr id="82" name="rc82"/>
+            <p:cNvSpPr/>
+            <p:nvPr/>
+          </p:nvSpPr>
+          <p:spPr>
+            <a:xfrm>
+              <a:off x="5829850" y="1774484"/>
+              <a:ext cx="408275" cy="460728"/>
             </a:xfrm>
             <a:prstGeom prst="rect">
               <a:avLst/>
@@ -5309,14 +5352,14 @@
         </p:sp>
         <p:sp>
           <p:nvSpPr>
-            <p:cNvPr id="82" name="rc82"/>
-            <p:cNvSpPr/>
-            <p:nvPr/>
-          </p:nvSpPr>
-          <p:spPr>
-            <a:xfrm>
-              <a:off x="8087593" y="1891324"/>
-              <a:ext cx="697882" cy="588141"/>
+            <p:cNvPr id="83" name="rc83"/>
+            <p:cNvSpPr/>
+            <p:nvPr/>
+          </p:nvSpPr>
+          <p:spPr>
+            <a:xfrm>
+              <a:off x="6238126" y="1774484"/>
+              <a:ext cx="408275" cy="460728"/>
             </a:xfrm>
             <a:prstGeom prst="rect">
               <a:avLst/>
@@ -5344,14 +5387,14 @@
         </p:sp>
         <p:sp>
           <p:nvSpPr>
-            <p:cNvPr id="83" name="rc83"/>
-            <p:cNvSpPr/>
-            <p:nvPr/>
-          </p:nvSpPr>
-          <p:spPr>
-            <a:xfrm>
-              <a:off x="6691827" y="1891324"/>
-              <a:ext cx="697882" cy="588141"/>
+            <p:cNvPr id="84" name="rc84"/>
+            <p:cNvSpPr/>
+            <p:nvPr/>
+          </p:nvSpPr>
+          <p:spPr>
+            <a:xfrm>
+              <a:off x="5421575" y="1774484"/>
+              <a:ext cx="408275" cy="460728"/>
             </a:xfrm>
             <a:prstGeom prst="rect">
               <a:avLst/>
@@ -5379,14 +5422,14 @@
         </p:sp>
         <p:sp>
           <p:nvSpPr>
-            <p:cNvPr id="84" name="rc84"/>
-            <p:cNvSpPr/>
-            <p:nvPr/>
-          </p:nvSpPr>
-          <p:spPr>
-            <a:xfrm>
-              <a:off x="6691827" y="2479466"/>
-              <a:ext cx="697882" cy="588141"/>
+            <p:cNvPr id="85" name="rc85"/>
+            <p:cNvSpPr/>
+            <p:nvPr/>
+          </p:nvSpPr>
+          <p:spPr>
+            <a:xfrm>
+              <a:off x="5421575" y="2235212"/>
+              <a:ext cx="408275" cy="460728"/>
             </a:xfrm>
             <a:prstGeom prst="rect">
               <a:avLst/>
@@ -5414,14 +5457,14 @@
         </p:sp>
         <p:sp>
           <p:nvSpPr>
-            <p:cNvPr id="85" name="rc85"/>
-            <p:cNvSpPr/>
-            <p:nvPr/>
-          </p:nvSpPr>
-          <p:spPr>
-            <a:xfrm>
-              <a:off x="5993944" y="2479466"/>
-              <a:ext cx="697882" cy="588141"/>
+            <p:cNvPr id="86" name="rc86"/>
+            <p:cNvSpPr/>
+            <p:nvPr/>
+          </p:nvSpPr>
+          <p:spPr>
+            <a:xfrm>
+              <a:off x="5013300" y="2235212"/>
+              <a:ext cx="408275" cy="460728"/>
             </a:xfrm>
             <a:prstGeom prst="rect">
               <a:avLst/>
@@ -5449,14 +5492,14 @@
         </p:sp>
         <p:sp>
           <p:nvSpPr>
-            <p:cNvPr id="86" name="rc86"/>
-            <p:cNvSpPr/>
-            <p:nvPr/>
-          </p:nvSpPr>
-          <p:spPr>
-            <a:xfrm>
-              <a:off x="5993944" y="1891324"/>
-              <a:ext cx="697882" cy="588141"/>
+            <p:cNvPr id="87" name="rc87"/>
+            <p:cNvSpPr/>
+            <p:nvPr/>
+          </p:nvSpPr>
+          <p:spPr>
+            <a:xfrm>
+              <a:off x="5013300" y="1774484"/>
+              <a:ext cx="408275" cy="460728"/>
             </a:xfrm>
             <a:prstGeom prst="rect">
               <a:avLst/>
@@ -5484,14 +5527,14 @@
         </p:sp>
         <p:sp>
           <p:nvSpPr>
-            <p:cNvPr id="87" name="rc87"/>
-            <p:cNvSpPr/>
-            <p:nvPr/>
-          </p:nvSpPr>
-          <p:spPr>
-            <a:xfrm>
-              <a:off x="7389710" y="1303182"/>
-              <a:ext cx="697882" cy="588141"/>
+            <p:cNvPr id="88" name="rc88"/>
+            <p:cNvSpPr/>
+            <p:nvPr/>
+          </p:nvSpPr>
+          <p:spPr>
+            <a:xfrm>
+              <a:off x="5829850" y="1313755"/>
+              <a:ext cx="408275" cy="460728"/>
             </a:xfrm>
             <a:prstGeom prst="rect">
               <a:avLst/>
@@ -5519,14 +5562,14 @@
         </p:sp>
         <p:sp>
           <p:nvSpPr>
-            <p:cNvPr id="88" name="rc88"/>
-            <p:cNvSpPr/>
-            <p:nvPr/>
-          </p:nvSpPr>
-          <p:spPr>
-            <a:xfrm>
-              <a:off x="6691827" y="1303182"/>
-              <a:ext cx="697882" cy="588141"/>
+            <p:cNvPr id="89" name="rc89"/>
+            <p:cNvSpPr/>
+            <p:nvPr/>
+          </p:nvSpPr>
+          <p:spPr>
+            <a:xfrm>
+              <a:off x="5421575" y="1313755"/>
+              <a:ext cx="408275" cy="460728"/>
             </a:xfrm>
             <a:prstGeom prst="rect">
               <a:avLst/>
@@ -5554,14 +5597,14 @@
         </p:sp>
         <p:sp>
           <p:nvSpPr>
-            <p:cNvPr id="89" name="rc89"/>
-            <p:cNvSpPr/>
-            <p:nvPr/>
-          </p:nvSpPr>
-          <p:spPr>
-            <a:xfrm>
-              <a:off x="8087593" y="1303182"/>
-              <a:ext cx="697882" cy="588141"/>
+            <p:cNvPr id="90" name="rc90"/>
+            <p:cNvSpPr/>
+            <p:nvPr/>
+          </p:nvSpPr>
+          <p:spPr>
+            <a:xfrm>
+              <a:off x="6238126" y="1313755"/>
+              <a:ext cx="408275" cy="460728"/>
             </a:xfrm>
             <a:prstGeom prst="rect">
               <a:avLst/>
@@ -5589,14 +5632,14 @@
         </p:sp>
         <p:sp>
           <p:nvSpPr>
-            <p:cNvPr id="90" name="rc90"/>
-            <p:cNvSpPr/>
-            <p:nvPr/>
-          </p:nvSpPr>
-          <p:spPr>
-            <a:xfrm>
-              <a:off x="5993944" y="1303182"/>
-              <a:ext cx="697882" cy="588141"/>
+            <p:cNvPr id="91" name="rc91"/>
+            <p:cNvSpPr/>
+            <p:nvPr/>
+          </p:nvSpPr>
+          <p:spPr>
+            <a:xfrm>
+              <a:off x="5013300" y="1313755"/>
+              <a:ext cx="408275" cy="460728"/>
             </a:xfrm>
             <a:prstGeom prst="rect">
               <a:avLst/>
@@ -5624,14 +5667,14 @@
         </p:sp>
         <p:sp>
           <p:nvSpPr>
-            <p:cNvPr id="91" name="rc91"/>
-            <p:cNvSpPr/>
-            <p:nvPr/>
-          </p:nvSpPr>
-          <p:spPr>
-            <a:xfrm>
-              <a:off x="6691827" y="715041"/>
-              <a:ext cx="697882" cy="588141"/>
+            <p:cNvPr id="92" name="rc92"/>
+            <p:cNvSpPr/>
+            <p:nvPr/>
+          </p:nvSpPr>
+          <p:spPr>
+            <a:xfrm>
+              <a:off x="5421575" y="853026"/>
+              <a:ext cx="408275" cy="460728"/>
             </a:xfrm>
             <a:prstGeom prst="rect">
               <a:avLst/>
@@ -5659,14 +5702,14 @@
         </p:sp>
         <p:sp>
           <p:nvSpPr>
-            <p:cNvPr id="92" name="rc92"/>
-            <p:cNvSpPr/>
-            <p:nvPr/>
-          </p:nvSpPr>
-          <p:spPr>
-            <a:xfrm>
-              <a:off x="8087593" y="715041"/>
-              <a:ext cx="697882" cy="588141"/>
+            <p:cNvPr id="93" name="rc93"/>
+            <p:cNvSpPr/>
+            <p:nvPr/>
+          </p:nvSpPr>
+          <p:spPr>
+            <a:xfrm>
+              <a:off x="6238126" y="853026"/>
+              <a:ext cx="408275" cy="460728"/>
             </a:xfrm>
             <a:prstGeom prst="rect">
               <a:avLst/>
@@ -5694,14 +5737,14 @@
         </p:sp>
         <p:sp>
           <p:nvSpPr>
-            <p:cNvPr id="93" name="rc93"/>
-            <p:cNvSpPr/>
-            <p:nvPr/>
-          </p:nvSpPr>
-          <p:spPr>
-            <a:xfrm>
-              <a:off x="7389710" y="715041"/>
-              <a:ext cx="697882" cy="588141"/>
+            <p:cNvPr id="94" name="rc94"/>
+            <p:cNvSpPr/>
+            <p:nvPr/>
+          </p:nvSpPr>
+          <p:spPr>
+            <a:xfrm>
+              <a:off x="5829850" y="853026"/>
+              <a:ext cx="408275" cy="460728"/>
             </a:xfrm>
             <a:prstGeom prst="rect">
               <a:avLst/>
@@ -5729,14 +5772,14 @@
         </p:sp>
         <p:sp>
           <p:nvSpPr>
-            <p:cNvPr id="94" name="rc94"/>
-            <p:cNvSpPr/>
-            <p:nvPr/>
-          </p:nvSpPr>
-          <p:spPr>
-            <a:xfrm>
-              <a:off x="5993944" y="715041"/>
-              <a:ext cx="697882" cy="588141"/>
+            <p:cNvPr id="95" name="rc95"/>
+            <p:cNvSpPr/>
+            <p:nvPr/>
+          </p:nvSpPr>
+          <p:spPr>
+            <a:xfrm>
+              <a:off x="5013300" y="853026"/>
+              <a:ext cx="408275" cy="460728"/>
             </a:xfrm>
             <a:prstGeom prst="rect">
               <a:avLst/>
@@ -5764,14 +5807,14 @@
         </p:sp>
         <p:sp>
           <p:nvSpPr>
-            <p:cNvPr id="95" name="tx95"/>
-            <p:cNvSpPr/>
-            <p:nvPr/>
-          </p:nvSpPr>
-          <p:spPr>
-            <a:xfrm>
-              <a:off x="8410428" y="2739933"/>
-              <a:ext cx="52212" cy="67208"/>
+            <p:cNvPr id="96" name="tx96"/>
+            <p:cNvSpPr/>
+            <p:nvPr/>
+          </p:nvSpPr>
+          <p:spPr>
+            <a:xfrm>
+              <a:off x="6413688" y="2428772"/>
+              <a:ext cx="57150" cy="73609"/>
             </a:xfrm>
             <a:prstGeom prst="rect">
               <a:avLst/>
@@ -5791,7 +5834,7 @@
                 </a:spcAft>
               </a:pPr>
               <a:r>
-                <a:rPr sz="739" i="0" b="0">
+                <a:rPr sz="810" i="0" b="0">
                   <a:solidFill>
                     <a:srgbClr val="1A1A1A">
                       <a:alpha val="100000"/>
@@ -5807,14 +5850,14 @@
         </p:sp>
         <p:sp>
           <p:nvSpPr>
-            <p:cNvPr id="96" name="tx96"/>
-            <p:cNvSpPr/>
-            <p:nvPr/>
-          </p:nvSpPr>
-          <p:spPr>
-            <a:xfrm>
-              <a:off x="7712545" y="2739933"/>
-              <a:ext cx="52212" cy="67208"/>
+            <p:cNvPr id="97" name="tx97"/>
+            <p:cNvSpPr/>
+            <p:nvPr/>
+          </p:nvSpPr>
+          <p:spPr>
+            <a:xfrm>
+              <a:off x="6005413" y="2428772"/>
+              <a:ext cx="57150" cy="73609"/>
             </a:xfrm>
             <a:prstGeom prst="rect">
               <a:avLst/>
@@ -5834,7 +5877,7 @@
                 </a:spcAft>
               </a:pPr>
               <a:r>
-                <a:rPr sz="739" i="0" b="0">
+                <a:rPr sz="810" i="0" b="0">
                   <a:solidFill>
                     <a:srgbClr val="1A1A1A">
                       <a:alpha val="100000"/>
@@ -5850,14 +5893,14 @@
         </p:sp>
         <p:sp>
           <p:nvSpPr>
-            <p:cNvPr id="97" name="tx97"/>
-            <p:cNvSpPr/>
-            <p:nvPr/>
-          </p:nvSpPr>
-          <p:spPr>
-            <a:xfrm>
-              <a:off x="7712545" y="2151791"/>
-              <a:ext cx="52212" cy="67208"/>
+            <p:cNvPr id="98" name="tx98"/>
+            <p:cNvSpPr/>
+            <p:nvPr/>
+          </p:nvSpPr>
+          <p:spPr>
+            <a:xfrm>
+              <a:off x="6005413" y="1968043"/>
+              <a:ext cx="57150" cy="73609"/>
             </a:xfrm>
             <a:prstGeom prst="rect">
               <a:avLst/>
@@ -5877,7 +5920,7 @@
                 </a:spcAft>
               </a:pPr>
               <a:r>
-                <a:rPr sz="739" i="0" b="0">
+                <a:rPr sz="810" i="0" b="0">
                   <a:solidFill>
                     <a:srgbClr val="1A1A1A">
                       <a:alpha val="100000"/>
@@ -5893,14 +5936,14 @@
         </p:sp>
         <p:sp>
           <p:nvSpPr>
-            <p:cNvPr id="98" name="tx98"/>
-            <p:cNvSpPr/>
-            <p:nvPr/>
-          </p:nvSpPr>
-          <p:spPr>
-            <a:xfrm>
-              <a:off x="8384322" y="2151791"/>
-              <a:ext cx="104424" cy="67208"/>
+            <p:cNvPr id="99" name="tx99"/>
+            <p:cNvSpPr/>
+            <p:nvPr/>
+          </p:nvSpPr>
+          <p:spPr>
+            <a:xfrm>
+              <a:off x="6385113" y="1968043"/>
+              <a:ext cx="114300" cy="73609"/>
             </a:xfrm>
             <a:prstGeom prst="rect">
               <a:avLst/>
@@ -5920,7 +5963,7 @@
                 </a:spcAft>
               </a:pPr>
               <a:r>
-                <a:rPr sz="739" i="0" b="0">
+                <a:rPr sz="810" i="0" b="0">
                   <a:solidFill>
                     <a:srgbClr val="1A1A1A">
                       <a:alpha val="100000"/>
@@ -5936,14 +5979,14 @@
         </p:sp>
         <p:sp>
           <p:nvSpPr>
-            <p:cNvPr id="99" name="tx99"/>
-            <p:cNvSpPr/>
-            <p:nvPr/>
-          </p:nvSpPr>
-          <p:spPr>
-            <a:xfrm>
-              <a:off x="6988556" y="2151791"/>
-              <a:ext cx="104424" cy="67208"/>
+            <p:cNvPr id="100" name="tx100"/>
+            <p:cNvSpPr/>
+            <p:nvPr/>
+          </p:nvSpPr>
+          <p:spPr>
+            <a:xfrm>
+              <a:off x="5568563" y="1968043"/>
+              <a:ext cx="114300" cy="73609"/>
             </a:xfrm>
             <a:prstGeom prst="rect">
               <a:avLst/>
@@ -5963,7 +6006,7 @@
                 </a:spcAft>
               </a:pPr>
               <a:r>
-                <a:rPr sz="739" i="0" b="0">
+                <a:rPr sz="810" i="0" b="0">
                   <a:solidFill>
                     <a:srgbClr val="1A1A1A">
                       <a:alpha val="100000"/>
@@ -5979,14 +6022,14 @@
         </p:sp>
         <p:sp>
           <p:nvSpPr>
-            <p:cNvPr id="100" name="tx100"/>
-            <p:cNvSpPr/>
-            <p:nvPr/>
-          </p:nvSpPr>
-          <p:spPr>
-            <a:xfrm>
-              <a:off x="6988556" y="2739933"/>
-              <a:ext cx="104424" cy="67208"/>
+            <p:cNvPr id="101" name="tx101"/>
+            <p:cNvSpPr/>
+            <p:nvPr/>
+          </p:nvSpPr>
+          <p:spPr>
+            <a:xfrm>
+              <a:off x="5568563" y="2428772"/>
+              <a:ext cx="114300" cy="73609"/>
             </a:xfrm>
             <a:prstGeom prst="rect">
               <a:avLst/>
@@ -6006,7 +6049,7 @@
                 </a:spcAft>
               </a:pPr>
               <a:r>
-                <a:rPr sz="739" i="0" b="0">
+                <a:rPr sz="810" i="0" b="0">
                   <a:solidFill>
                     <a:srgbClr val="1A1A1A">
                       <a:alpha val="100000"/>
@@ -6022,14 +6065,14 @@
         </p:sp>
         <p:sp>
           <p:nvSpPr>
-            <p:cNvPr id="101" name="tx101"/>
-            <p:cNvSpPr/>
-            <p:nvPr/>
-          </p:nvSpPr>
-          <p:spPr>
-            <a:xfrm>
-              <a:off x="6290673" y="2739933"/>
-              <a:ext cx="104424" cy="67208"/>
+            <p:cNvPr id="102" name="tx102"/>
+            <p:cNvSpPr/>
+            <p:nvPr/>
+          </p:nvSpPr>
+          <p:spPr>
+            <a:xfrm>
+              <a:off x="5160288" y="2428772"/>
+              <a:ext cx="114300" cy="73609"/>
             </a:xfrm>
             <a:prstGeom prst="rect">
               <a:avLst/>
@@ -6049,7 +6092,7 @@
                 </a:spcAft>
               </a:pPr>
               <a:r>
-                <a:rPr sz="739" i="0" b="0">
+                <a:rPr sz="810" i="0" b="0">
                   <a:solidFill>
                     <a:srgbClr val="1A1A1A">
                       <a:alpha val="100000"/>
@@ -6065,14 +6108,14 @@
         </p:sp>
         <p:sp>
           <p:nvSpPr>
-            <p:cNvPr id="102" name="tx102"/>
-            <p:cNvSpPr/>
-            <p:nvPr/>
-          </p:nvSpPr>
-          <p:spPr>
-            <a:xfrm>
-              <a:off x="6290673" y="2151791"/>
-              <a:ext cx="104424" cy="67208"/>
+            <p:cNvPr id="103" name="tx103"/>
+            <p:cNvSpPr/>
+            <p:nvPr/>
+          </p:nvSpPr>
+          <p:spPr>
+            <a:xfrm>
+              <a:off x="5160288" y="1968043"/>
+              <a:ext cx="114300" cy="73609"/>
             </a:xfrm>
             <a:prstGeom prst="rect">
               <a:avLst/>
@@ -6092,7 +6135,7 @@
                 </a:spcAft>
               </a:pPr>
               <a:r>
-                <a:rPr sz="739" i="0" b="0">
+                <a:rPr sz="810" i="0" b="0">
                   <a:solidFill>
                     <a:srgbClr val="1A1A1A">
                       <a:alpha val="100000"/>
@@ -6108,14 +6151,14 @@
         </p:sp>
         <p:sp>
           <p:nvSpPr>
-            <p:cNvPr id="103" name="tx103"/>
-            <p:cNvSpPr/>
-            <p:nvPr/>
-          </p:nvSpPr>
-          <p:spPr>
-            <a:xfrm>
-              <a:off x="7686439" y="1563649"/>
-              <a:ext cx="104424" cy="67208"/>
+            <p:cNvPr id="104" name="tx104"/>
+            <p:cNvSpPr/>
+            <p:nvPr/>
+          </p:nvSpPr>
+          <p:spPr>
+            <a:xfrm>
+              <a:off x="5976838" y="1507315"/>
+              <a:ext cx="114300" cy="73609"/>
             </a:xfrm>
             <a:prstGeom prst="rect">
               <a:avLst/>
@@ -6135,7 +6178,7 @@
                 </a:spcAft>
               </a:pPr>
               <a:r>
-                <a:rPr sz="739" i="0" b="0">
+                <a:rPr sz="810" i="0" b="0">
                   <a:solidFill>
                     <a:srgbClr val="1A1A1A">
                       <a:alpha val="100000"/>
@@ -6151,14 +6194,14 @@
         </p:sp>
         <p:sp>
           <p:nvSpPr>
-            <p:cNvPr id="104" name="tx104"/>
-            <p:cNvSpPr/>
-            <p:nvPr/>
-          </p:nvSpPr>
-          <p:spPr>
-            <a:xfrm>
-              <a:off x="6988556" y="1563649"/>
-              <a:ext cx="104424" cy="67208"/>
+            <p:cNvPr id="105" name="tx105"/>
+            <p:cNvSpPr/>
+            <p:nvPr/>
+          </p:nvSpPr>
+          <p:spPr>
+            <a:xfrm>
+              <a:off x="5568563" y="1507315"/>
+              <a:ext cx="114300" cy="73609"/>
             </a:xfrm>
             <a:prstGeom prst="rect">
               <a:avLst/>
@@ -6178,7 +6221,7 @@
                 </a:spcAft>
               </a:pPr>
               <a:r>
-                <a:rPr sz="739" i="0" b="0">
+                <a:rPr sz="810" i="0" b="0">
                   <a:solidFill>
                     <a:srgbClr val="1A1A1A">
                       <a:alpha val="100000"/>
@@ -6194,14 +6237,14 @@
         </p:sp>
         <p:sp>
           <p:nvSpPr>
-            <p:cNvPr id="105" name="tx105"/>
-            <p:cNvSpPr/>
-            <p:nvPr/>
-          </p:nvSpPr>
-          <p:spPr>
-            <a:xfrm>
-              <a:off x="8384322" y="1563649"/>
-              <a:ext cx="104424" cy="67208"/>
+            <p:cNvPr id="106" name="tx106"/>
+            <p:cNvSpPr/>
+            <p:nvPr/>
+          </p:nvSpPr>
+          <p:spPr>
+            <a:xfrm>
+              <a:off x="6385113" y="1507315"/>
+              <a:ext cx="114300" cy="73609"/>
             </a:xfrm>
             <a:prstGeom prst="rect">
               <a:avLst/>
@@ -6221,7 +6264,7 @@
                 </a:spcAft>
               </a:pPr>
               <a:r>
-                <a:rPr sz="739" i="0" b="0">
+                <a:rPr sz="810" i="0" b="0">
                   <a:solidFill>
                     <a:srgbClr val="1A1A1A">
                       <a:alpha val="100000"/>
@@ -6237,14 +6280,14 @@
         </p:sp>
         <p:sp>
           <p:nvSpPr>
-            <p:cNvPr id="106" name="tx106"/>
-            <p:cNvSpPr/>
-            <p:nvPr/>
-          </p:nvSpPr>
-          <p:spPr>
-            <a:xfrm>
-              <a:off x="6290673" y="1563649"/>
-              <a:ext cx="104424" cy="67208"/>
+            <p:cNvPr id="107" name="tx107"/>
+            <p:cNvSpPr/>
+            <p:nvPr/>
+          </p:nvSpPr>
+          <p:spPr>
+            <a:xfrm>
+              <a:off x="5160288" y="1507315"/>
+              <a:ext cx="114300" cy="73609"/>
             </a:xfrm>
             <a:prstGeom prst="rect">
               <a:avLst/>
@@ -6264,7 +6307,7 @@
                 </a:spcAft>
               </a:pPr>
               <a:r>
-                <a:rPr sz="739" i="0" b="0">
+                <a:rPr sz="810" i="0" b="0">
                   <a:solidFill>
                     <a:srgbClr val="1A1A1A">
                       <a:alpha val="100000"/>
@@ -6280,14 +6323,14 @@
         </p:sp>
         <p:sp>
           <p:nvSpPr>
-            <p:cNvPr id="107" name="tx107"/>
-            <p:cNvSpPr/>
-            <p:nvPr/>
-          </p:nvSpPr>
-          <p:spPr>
-            <a:xfrm>
-              <a:off x="6988556" y="975507"/>
-              <a:ext cx="104424" cy="67208"/>
+            <p:cNvPr id="108" name="tx108"/>
+            <p:cNvSpPr/>
+            <p:nvPr/>
+          </p:nvSpPr>
+          <p:spPr>
+            <a:xfrm>
+              <a:off x="5568563" y="1046586"/>
+              <a:ext cx="114300" cy="73609"/>
             </a:xfrm>
             <a:prstGeom prst="rect">
               <a:avLst/>
@@ -6307,7 +6350,7 @@
                 </a:spcAft>
               </a:pPr>
               <a:r>
-                <a:rPr sz="739" i="0" b="0">
+                <a:rPr sz="810" i="0" b="0">
                   <a:solidFill>
                     <a:srgbClr val="1A1A1A">
                       <a:alpha val="100000"/>
@@ -6323,14 +6366,14 @@
         </p:sp>
         <p:sp>
           <p:nvSpPr>
-            <p:cNvPr id="108" name="tx108"/>
-            <p:cNvSpPr/>
-            <p:nvPr/>
-          </p:nvSpPr>
-          <p:spPr>
-            <a:xfrm>
-              <a:off x="8384322" y="975507"/>
-              <a:ext cx="104424" cy="67208"/>
+            <p:cNvPr id="109" name="tx109"/>
+            <p:cNvSpPr/>
+            <p:nvPr/>
+          </p:nvSpPr>
+          <p:spPr>
+            <a:xfrm>
+              <a:off x="6385113" y="1046586"/>
+              <a:ext cx="114300" cy="73609"/>
             </a:xfrm>
             <a:prstGeom prst="rect">
               <a:avLst/>
@@ -6350,7 +6393,7 @@
                 </a:spcAft>
               </a:pPr>
               <a:r>
-                <a:rPr sz="739" i="0" b="0">
+                <a:rPr sz="810" i="0" b="0">
                   <a:solidFill>
                     <a:srgbClr val="1A1A1A">
                       <a:alpha val="100000"/>
@@ -6366,14 +6409,14 @@
         </p:sp>
         <p:sp>
           <p:nvSpPr>
-            <p:cNvPr id="109" name="tx109"/>
-            <p:cNvSpPr/>
-            <p:nvPr/>
-          </p:nvSpPr>
-          <p:spPr>
-            <a:xfrm>
-              <a:off x="7686439" y="975507"/>
-              <a:ext cx="104424" cy="67208"/>
+            <p:cNvPr id="110" name="tx110"/>
+            <p:cNvSpPr/>
+            <p:nvPr/>
+          </p:nvSpPr>
+          <p:spPr>
+            <a:xfrm>
+              <a:off x="5976838" y="1046586"/>
+              <a:ext cx="114300" cy="73609"/>
             </a:xfrm>
             <a:prstGeom prst="rect">
               <a:avLst/>
@@ -6393,7 +6436,7 @@
                 </a:spcAft>
               </a:pPr>
               <a:r>
-                <a:rPr sz="739" i="0" b="0">
+                <a:rPr sz="810" i="0" b="0">
                   <a:solidFill>
                     <a:srgbClr val="1A1A1A">
                       <a:alpha val="100000"/>
@@ -6409,14 +6452,14 @@
         </p:sp>
         <p:sp>
           <p:nvSpPr>
-            <p:cNvPr id="110" name="tx110"/>
-            <p:cNvSpPr/>
-            <p:nvPr/>
-          </p:nvSpPr>
-          <p:spPr>
-            <a:xfrm>
-              <a:off x="6290673" y="975507"/>
-              <a:ext cx="104424" cy="67208"/>
+            <p:cNvPr id="111" name="tx111"/>
+            <p:cNvSpPr/>
+            <p:nvPr/>
+          </p:nvSpPr>
+          <p:spPr>
+            <a:xfrm>
+              <a:off x="5160288" y="1046586"/>
+              <a:ext cx="114300" cy="73609"/>
             </a:xfrm>
             <a:prstGeom prst="rect">
               <a:avLst/>
@@ -6436,7 +6479,7 @@
                 </a:spcAft>
               </a:pPr>
               <a:r>
-                <a:rPr sz="739" i="0" b="0">
+                <a:rPr sz="810" i="0" b="0">
                   <a:solidFill>
                     <a:srgbClr val="1A1A1A">
                       <a:alpha val="100000"/>
@@ -6452,21 +6495,21 @@
         </p:sp>
         <p:sp>
           <p:nvSpPr>
-            <p:cNvPr id="111" name="pl111"/>
-            <p:cNvSpPr/>
-            <p:nvPr/>
-          </p:nvSpPr>
-          <p:spPr>
-            <a:xfrm>
-              <a:off x="5924156" y="656226"/>
-              <a:ext cx="0" cy="2470195"/>
+            <p:cNvPr id="112" name="pl112"/>
+            <p:cNvSpPr/>
+            <p:nvPr/>
+          </p:nvSpPr>
+          <p:spPr>
+            <a:xfrm>
+              <a:off x="4972472" y="806953"/>
+              <a:ext cx="0" cy="1935060"/>
             </a:xfrm>
             <a:custGeom>
               <a:avLst/>
               <a:pathLst>
-                <a:path w="0" h="2470195">
+                <a:path w="0" h="1935060">
                   <a:moveTo>
-                    <a:pt x="0" y="2470195"/>
+                    <a:pt x="0" y="1935060"/>
                   </a:moveTo>
                   <a:lnTo>
                     <a:pt x="0" y="0"/>
@@ -6492,14 +6535,14 @@
         </p:sp>
         <p:sp>
           <p:nvSpPr>
-            <p:cNvPr id="112" name="tx112"/>
-            <p:cNvSpPr/>
-            <p:nvPr/>
-          </p:nvSpPr>
-          <p:spPr>
-            <a:xfrm>
-              <a:off x="5255693" y="2740847"/>
-              <a:ext cx="617220" cy="65379"/>
+            <p:cNvPr id="113" name="tx113"/>
+            <p:cNvSpPr/>
+            <p:nvPr/>
+          </p:nvSpPr>
+          <p:spPr>
+            <a:xfrm>
+              <a:off x="4228273" y="2429184"/>
+              <a:ext cx="687263" cy="72786"/>
             </a:xfrm>
             <a:prstGeom prst="rect">
               <a:avLst/>
@@ -6519,7 +6562,7 @@
                 </a:spcAft>
               </a:pPr>
               <a:r>
-                <a:rPr sz="720" i="0" b="0">
+                <a:rPr sz="800" i="0" b="0">
                   <a:solidFill>
                     <a:srgbClr val="262626">
                       <a:alpha val="100000"/>
@@ -6535,14 +6578,14 @@
         </p:sp>
         <p:sp>
           <p:nvSpPr>
-            <p:cNvPr id="113" name="tx113"/>
-            <p:cNvSpPr/>
-            <p:nvPr/>
-          </p:nvSpPr>
-          <p:spPr>
-            <a:xfrm>
-              <a:off x="4975612" y="2152705"/>
-              <a:ext cx="897300" cy="65379"/>
+            <p:cNvPr id="114" name="tx114"/>
+            <p:cNvSpPr/>
+            <p:nvPr/>
+          </p:nvSpPr>
+          <p:spPr>
+            <a:xfrm>
+              <a:off x="3916188" y="1968455"/>
+              <a:ext cx="999347" cy="72786"/>
             </a:xfrm>
             <a:prstGeom prst="rect">
               <a:avLst/>
@@ -6562,7 +6605,7 @@
                 </a:spcAft>
               </a:pPr>
               <a:r>
-                <a:rPr sz="720" i="0" b="0">
+                <a:rPr sz="800" i="0" b="0">
                   <a:solidFill>
                     <a:srgbClr val="262626">
                       <a:alpha val="100000"/>
@@ -6578,14 +6621,14 @@
         </p:sp>
         <p:sp>
           <p:nvSpPr>
-            <p:cNvPr id="114" name="tx114"/>
-            <p:cNvSpPr/>
-            <p:nvPr/>
-          </p:nvSpPr>
-          <p:spPr>
-            <a:xfrm>
-              <a:off x="5053062" y="1564563"/>
-              <a:ext cx="819851" cy="65379"/>
+            <p:cNvPr id="115" name="tx115"/>
+            <p:cNvSpPr/>
+            <p:nvPr/>
+          </p:nvSpPr>
+          <p:spPr>
+            <a:xfrm>
+              <a:off x="4002599" y="1507726"/>
+              <a:ext cx="912936" cy="72786"/>
             </a:xfrm>
             <a:prstGeom prst="rect">
               <a:avLst/>
@@ -6605,7 +6648,7 @@
                 </a:spcAft>
               </a:pPr>
               <a:r>
-                <a:rPr sz="720" i="0" b="0">
+                <a:rPr sz="800" i="0" b="0">
                   <a:solidFill>
                     <a:srgbClr val="262626">
                       <a:alpha val="100000"/>
@@ -6621,14 +6664,14 @@
         </p:sp>
         <p:sp>
           <p:nvSpPr>
-            <p:cNvPr id="115" name="tx115"/>
-            <p:cNvSpPr/>
-            <p:nvPr/>
-          </p:nvSpPr>
-          <p:spPr>
-            <a:xfrm>
-              <a:off x="5276267" y="976422"/>
-              <a:ext cx="596646" cy="65379"/>
+            <p:cNvPr id="116" name="tx116"/>
+            <p:cNvSpPr/>
+            <p:nvPr/>
+          </p:nvSpPr>
+          <p:spPr>
+            <a:xfrm>
+              <a:off x="4251041" y="1046997"/>
+              <a:ext cx="664494" cy="72786"/>
             </a:xfrm>
             <a:prstGeom prst="rect">
               <a:avLst/>
@@ -6648,7 +6691,7 @@
                 </a:spcAft>
               </a:pPr>
               <a:r>
-                <a:rPr sz="720" i="0" b="0">
+                <a:rPr sz="800" i="0" b="0">
                   <a:solidFill>
                     <a:srgbClr val="262626">
                       <a:alpha val="100000"/>
@@ -6664,24 +6707,24 @@
         </p:sp>
         <p:sp>
           <p:nvSpPr>
-            <p:cNvPr id="116" name="pl116"/>
-            <p:cNvSpPr/>
-            <p:nvPr/>
-          </p:nvSpPr>
-          <p:spPr>
-            <a:xfrm>
-              <a:off x="5895687" y="2773537"/>
-              <a:ext cx="28468" cy="0"/>
+            <p:cNvPr id="117" name="pl117"/>
+            <p:cNvSpPr/>
+            <p:nvPr/>
+          </p:nvSpPr>
+          <p:spPr>
+            <a:xfrm>
+              <a:off x="4940841" y="2465577"/>
+              <a:ext cx="31631" cy="0"/>
             </a:xfrm>
             <a:custGeom>
               <a:avLst/>
               <a:pathLst>
-                <a:path w="28468" h="0">
+                <a:path w="31631" h="0">
                   <a:moveTo>
                     <a:pt x="0" y="0"/>
                   </a:moveTo>
                   <a:lnTo>
-                    <a:pt x="28468" y="0"/>
+                    <a:pt x="31631" y="0"/>
                   </a:lnTo>
                 </a:path>
               </a:pathLst>
@@ -6704,24 +6747,24 @@
         </p:sp>
         <p:sp>
           <p:nvSpPr>
-            <p:cNvPr id="117" name="pl117"/>
-            <p:cNvSpPr/>
-            <p:nvPr/>
-          </p:nvSpPr>
-          <p:spPr>
-            <a:xfrm>
-              <a:off x="5895687" y="2185395"/>
-              <a:ext cx="28468" cy="0"/>
+            <p:cNvPr id="118" name="pl118"/>
+            <p:cNvSpPr/>
+            <p:nvPr/>
+          </p:nvSpPr>
+          <p:spPr>
+            <a:xfrm>
+              <a:off x="4940841" y="2004848"/>
+              <a:ext cx="31631" cy="0"/>
             </a:xfrm>
             <a:custGeom>
               <a:avLst/>
               <a:pathLst>
-                <a:path w="28468" h="0">
+                <a:path w="31631" h="0">
                   <a:moveTo>
                     <a:pt x="0" y="0"/>
                   </a:moveTo>
                   <a:lnTo>
-                    <a:pt x="28468" y="0"/>
+                    <a:pt x="31631" y="0"/>
                   </a:lnTo>
                 </a:path>
               </a:pathLst>
@@ -6744,24 +6787,24 @@
         </p:sp>
         <p:sp>
           <p:nvSpPr>
-            <p:cNvPr id="118" name="pl118"/>
-            <p:cNvSpPr/>
-            <p:nvPr/>
-          </p:nvSpPr>
-          <p:spPr>
-            <a:xfrm>
-              <a:off x="5895687" y="1597253"/>
-              <a:ext cx="28468" cy="0"/>
+            <p:cNvPr id="119" name="pl119"/>
+            <p:cNvSpPr/>
+            <p:nvPr/>
+          </p:nvSpPr>
+          <p:spPr>
+            <a:xfrm>
+              <a:off x="4940841" y="1544119"/>
+              <a:ext cx="31631" cy="0"/>
             </a:xfrm>
             <a:custGeom>
               <a:avLst/>
               <a:pathLst>
-                <a:path w="28468" h="0">
+                <a:path w="31631" h="0">
                   <a:moveTo>
                     <a:pt x="0" y="0"/>
                   </a:moveTo>
                   <a:lnTo>
-                    <a:pt x="28468" y="0"/>
+                    <a:pt x="31631" y="0"/>
                   </a:lnTo>
                 </a:path>
               </a:pathLst>
@@ -6784,24 +6827,24 @@
         </p:sp>
         <p:sp>
           <p:nvSpPr>
-            <p:cNvPr id="119" name="pl119"/>
-            <p:cNvSpPr/>
-            <p:nvPr/>
-          </p:nvSpPr>
-          <p:spPr>
-            <a:xfrm>
-              <a:off x="5895687" y="1009111"/>
-              <a:ext cx="28468" cy="0"/>
+            <p:cNvPr id="120" name="pl120"/>
+            <p:cNvSpPr/>
+            <p:nvPr/>
+          </p:nvSpPr>
+          <p:spPr>
+            <a:xfrm>
+              <a:off x="4940841" y="1083391"/>
+              <a:ext cx="31631" cy="0"/>
             </a:xfrm>
             <a:custGeom>
               <a:avLst/>
               <a:pathLst>
-                <a:path w="28468" h="0">
+                <a:path w="31631" h="0">
                   <a:moveTo>
                     <a:pt x="0" y="0"/>
                   </a:moveTo>
                   <a:lnTo>
-                    <a:pt x="28468" y="0"/>
+                    <a:pt x="31631" y="0"/>
                   </a:lnTo>
                 </a:path>
               </a:pathLst>
@@ -6824,24 +6867,24 @@
         </p:sp>
         <p:sp>
           <p:nvSpPr>
-            <p:cNvPr id="120" name="pl120"/>
-            <p:cNvSpPr/>
-            <p:nvPr/>
-          </p:nvSpPr>
-          <p:spPr>
-            <a:xfrm>
-              <a:off x="5924156" y="3126422"/>
-              <a:ext cx="2931108" cy="0"/>
+            <p:cNvPr id="121" name="pl121"/>
+            <p:cNvSpPr/>
+            <p:nvPr/>
+          </p:nvSpPr>
+          <p:spPr>
+            <a:xfrm>
+              <a:off x="4972472" y="2742014"/>
+              <a:ext cx="1714756" cy="0"/>
             </a:xfrm>
             <a:custGeom>
               <a:avLst/>
               <a:pathLst>
-                <a:path w="2931108" h="0">
+                <a:path w="1714756" h="0">
                   <a:moveTo>
                     <a:pt x="0" y="0"/>
                   </a:moveTo>
                   <a:lnTo>
-                    <a:pt x="2931108" y="0"/>
+                    <a:pt x="1714756" y="0"/>
                   </a:lnTo>
                 </a:path>
               </a:pathLst>
@@ -6864,21 +6907,21 @@
         </p:sp>
         <p:sp>
           <p:nvSpPr>
-            <p:cNvPr id="121" name="pl121"/>
-            <p:cNvSpPr/>
-            <p:nvPr/>
-          </p:nvSpPr>
-          <p:spPr>
-            <a:xfrm>
-              <a:off x="6342885" y="3126422"/>
-              <a:ext cx="0" cy="28468"/>
+            <p:cNvPr id="122" name="pl122"/>
+            <p:cNvSpPr/>
+            <p:nvPr/>
+          </p:nvSpPr>
+          <p:spPr>
+            <a:xfrm>
+              <a:off x="5217438" y="2742014"/>
+              <a:ext cx="0" cy="31631"/>
             </a:xfrm>
             <a:custGeom>
               <a:avLst/>
               <a:pathLst>
-                <a:path w="0" h="28468">
+                <a:path w="0" h="31631">
                   <a:moveTo>
-                    <a:pt x="0" y="28468"/>
+                    <a:pt x="0" y="31631"/>
                   </a:moveTo>
                   <a:lnTo>
                     <a:pt x="0" y="0"/>
@@ -6904,21 +6947,21 @@
         </p:sp>
         <p:sp>
           <p:nvSpPr>
-            <p:cNvPr id="122" name="pl122"/>
-            <p:cNvSpPr/>
-            <p:nvPr/>
-          </p:nvSpPr>
-          <p:spPr>
-            <a:xfrm>
-              <a:off x="7040768" y="3126422"/>
-              <a:ext cx="0" cy="28468"/>
+            <p:cNvPr id="123" name="pl123"/>
+            <p:cNvSpPr/>
+            <p:nvPr/>
+          </p:nvSpPr>
+          <p:spPr>
+            <a:xfrm>
+              <a:off x="5625713" y="2742014"/>
+              <a:ext cx="0" cy="31631"/>
             </a:xfrm>
             <a:custGeom>
               <a:avLst/>
               <a:pathLst>
-                <a:path w="0" h="28468">
+                <a:path w="0" h="31631">
                   <a:moveTo>
-                    <a:pt x="0" y="28468"/>
+                    <a:pt x="0" y="31631"/>
                   </a:moveTo>
                   <a:lnTo>
                     <a:pt x="0" y="0"/>
@@ -6944,21 +6987,21 @@
         </p:sp>
         <p:sp>
           <p:nvSpPr>
-            <p:cNvPr id="123" name="pl123"/>
-            <p:cNvSpPr/>
-            <p:nvPr/>
-          </p:nvSpPr>
-          <p:spPr>
-            <a:xfrm>
-              <a:off x="7738651" y="3126422"/>
-              <a:ext cx="0" cy="28468"/>
+            <p:cNvPr id="124" name="pl124"/>
+            <p:cNvSpPr/>
+            <p:nvPr/>
+          </p:nvSpPr>
+          <p:spPr>
+            <a:xfrm>
+              <a:off x="6033988" y="2742014"/>
+              <a:ext cx="0" cy="31631"/>
             </a:xfrm>
             <a:custGeom>
               <a:avLst/>
               <a:pathLst>
-                <a:path w="0" h="28468">
+                <a:path w="0" h="31631">
                   <a:moveTo>
-                    <a:pt x="0" y="28468"/>
+                    <a:pt x="0" y="31631"/>
                   </a:moveTo>
                   <a:lnTo>
                     <a:pt x="0" y="0"/>
@@ -6984,21 +7027,21 @@
         </p:sp>
         <p:sp>
           <p:nvSpPr>
-            <p:cNvPr id="124" name="pl124"/>
-            <p:cNvSpPr/>
-            <p:nvPr/>
-          </p:nvSpPr>
-          <p:spPr>
-            <a:xfrm>
-              <a:off x="8436534" y="3126422"/>
-              <a:ext cx="0" cy="28468"/>
+            <p:cNvPr id="125" name="pl125"/>
+            <p:cNvSpPr/>
+            <p:nvPr/>
+          </p:nvSpPr>
+          <p:spPr>
+            <a:xfrm>
+              <a:off x="6442263" y="2742014"/>
+              <a:ext cx="0" cy="31631"/>
             </a:xfrm>
             <a:custGeom>
               <a:avLst/>
               <a:pathLst>
-                <a:path w="0" h="28468">
+                <a:path w="0" h="31631">
                   <a:moveTo>
-                    <a:pt x="0" y="28468"/>
+                    <a:pt x="0" y="31631"/>
                   </a:moveTo>
                   <a:lnTo>
                     <a:pt x="0" y="0"/>
@@ -7024,14 +7067,14 @@
         </p:sp>
         <p:sp>
           <p:nvSpPr>
-            <p:cNvPr id="125" name="tx125"/>
-            <p:cNvSpPr/>
-            <p:nvPr/>
-          </p:nvSpPr>
-          <p:spPr>
-            <a:xfrm>
-              <a:off x="6317511" y="3177665"/>
-              <a:ext cx="50749" cy="65379"/>
+            <p:cNvPr id="126" name="tx126"/>
+            <p:cNvSpPr/>
+            <p:nvPr/>
+          </p:nvSpPr>
+          <p:spPr>
+            <a:xfrm>
+              <a:off x="5189183" y="2798950"/>
+              <a:ext cx="56509" cy="72786"/>
             </a:xfrm>
             <a:prstGeom prst="rect">
               <a:avLst/>
@@ -7051,7 +7094,7 @@
                 </a:spcAft>
               </a:pPr>
               <a:r>
-                <a:rPr sz="720" i="0" b="0">
+                <a:rPr sz="800" i="0" b="0">
                   <a:solidFill>
                     <a:srgbClr val="262626">
                       <a:alpha val="100000"/>
@@ -7067,14 +7110,14 @@
         </p:sp>
         <p:sp>
           <p:nvSpPr>
-            <p:cNvPr id="126" name="tx126"/>
-            <p:cNvSpPr/>
-            <p:nvPr/>
-          </p:nvSpPr>
-          <p:spPr>
-            <a:xfrm>
-              <a:off x="6990019" y="3177665"/>
-              <a:ext cx="101498" cy="65379"/>
+            <p:cNvPr id="127" name="tx127"/>
+            <p:cNvSpPr/>
+            <p:nvPr/>
+          </p:nvSpPr>
+          <p:spPr>
+            <a:xfrm>
+              <a:off x="5569203" y="2798950"/>
+              <a:ext cx="113019" cy="72786"/>
             </a:xfrm>
             <a:prstGeom prst="rect">
               <a:avLst/>
@@ -7094,7 +7137,7 @@
                 </a:spcAft>
               </a:pPr>
               <a:r>
-                <a:rPr sz="720" i="0" b="0">
+                <a:rPr sz="800" i="0" b="0">
                   <a:solidFill>
                     <a:srgbClr val="262626">
                       <a:alpha val="100000"/>
@@ -7110,14 +7153,14 @@
         </p:sp>
         <p:sp>
           <p:nvSpPr>
-            <p:cNvPr id="127" name="tx127"/>
-            <p:cNvSpPr/>
-            <p:nvPr/>
-          </p:nvSpPr>
-          <p:spPr>
-            <a:xfrm>
-              <a:off x="7687902" y="3177665"/>
-              <a:ext cx="101498" cy="65379"/>
+            <p:cNvPr id="128" name="tx128"/>
+            <p:cNvSpPr/>
+            <p:nvPr/>
+          </p:nvSpPr>
+          <p:spPr>
+            <a:xfrm>
+              <a:off x="5977478" y="2798950"/>
+              <a:ext cx="113019" cy="72786"/>
             </a:xfrm>
             <a:prstGeom prst="rect">
               <a:avLst/>
@@ -7137,7 +7180,7 @@
                 </a:spcAft>
               </a:pPr>
               <a:r>
-                <a:rPr sz="720" i="0" b="0">
+                <a:rPr sz="800" i="0" b="0">
                   <a:solidFill>
                     <a:srgbClr val="262626">
                       <a:alpha val="100000"/>
@@ -7153,14 +7196,14 @@
         </p:sp>
         <p:sp>
           <p:nvSpPr>
-            <p:cNvPr id="128" name="tx128"/>
-            <p:cNvSpPr/>
-            <p:nvPr/>
-          </p:nvSpPr>
-          <p:spPr>
-            <a:xfrm>
-              <a:off x="8385785" y="3177665"/>
-              <a:ext cx="101498" cy="65379"/>
+            <p:cNvPr id="129" name="tx129"/>
+            <p:cNvSpPr/>
+            <p:nvPr/>
+          </p:nvSpPr>
+          <p:spPr>
+            <a:xfrm>
+              <a:off x="6385753" y="2798950"/>
+              <a:ext cx="113019" cy="72786"/>
             </a:xfrm>
             <a:prstGeom prst="rect">
               <a:avLst/>
@@ -7180,7 +7223,7 @@
                 </a:spcAft>
               </a:pPr>
               <a:r>
-                <a:rPr sz="720" i="0" b="0">
+                <a:rPr sz="800" i="0" b="0">
                   <a:solidFill>
                     <a:srgbClr val="262626">
                       <a:alpha val="100000"/>
@@ -7196,14 +7239,14 @@
         </p:sp>
         <p:sp>
           <p:nvSpPr>
-            <p:cNvPr id="129" name="tx129"/>
-            <p:cNvSpPr/>
-            <p:nvPr/>
-          </p:nvSpPr>
-          <p:spPr>
-            <a:xfrm>
-              <a:off x="6646577" y="3290623"/>
-              <a:ext cx="1486265" cy="81838"/>
+            <p:cNvPr id="130" name="tx130"/>
+            <p:cNvSpPr/>
+            <p:nvPr/>
+          </p:nvSpPr>
+          <p:spPr>
+            <a:xfrm>
+              <a:off x="5003553" y="2924765"/>
+              <a:ext cx="1652595" cy="90982"/>
             </a:xfrm>
             <a:prstGeom prst="rect">
               <a:avLst/>
@@ -7223,7 +7266,7 @@
                 </a:spcAft>
               </a:pPr>
               <a:r>
-                <a:rPr sz="900" i="0" b="0">
+                <a:rPr sz="1000" i="0" b="0">
                   <a:solidFill>
                     <a:srgbClr val="0D0D0D">
                       <a:alpha val="100000"/>
@@ -7239,14 +7282,14 @@
         </p:sp>
         <p:sp>
           <p:nvSpPr>
-            <p:cNvPr id="130" name="rc130"/>
-            <p:cNvSpPr/>
-            <p:nvPr/>
-          </p:nvSpPr>
-          <p:spPr>
-            <a:xfrm>
-              <a:off x="9330370" y="1474145"/>
-              <a:ext cx="561746" cy="834357"/>
+            <p:cNvPr id="131" name="rc131"/>
+            <p:cNvSpPr/>
+            <p:nvPr/>
+          </p:nvSpPr>
+          <p:spPr>
+            <a:xfrm>
+              <a:off x="7212532" y="1342009"/>
+              <a:ext cx="630359" cy="864949"/>
             </a:xfrm>
             <a:prstGeom prst="rect">
               <a:avLst/>
@@ -7265,14 +7308,14 @@
         </p:sp>
         <p:sp>
           <p:nvSpPr>
-            <p:cNvPr id="131" name="tx131"/>
-            <p:cNvSpPr/>
-            <p:nvPr/>
-          </p:nvSpPr>
-          <p:spPr>
-            <a:xfrm>
-              <a:off x="9387307" y="1541780"/>
-              <a:ext cx="447873" cy="72786"/>
+            <p:cNvPr id="132" name="tx132"/>
+            <p:cNvSpPr/>
+            <p:nvPr/>
+          </p:nvSpPr>
+          <p:spPr>
+            <a:xfrm>
+              <a:off x="7275795" y="1417250"/>
+              <a:ext cx="503834" cy="81838"/>
             </a:xfrm>
             <a:prstGeom prst="rect">
               <a:avLst/>
@@ -7292,7 +7335,7 @@
                 </a:spcAft>
               </a:pPr>
               <a:r>
-                <a:rPr sz="800" i="0" b="1">
+                <a:rPr sz="900" i="0" b="1">
                   <a:solidFill>
                     <a:srgbClr val="000000">
                       <a:alpha val="100000"/>
@@ -7308,7 +7351,7 @@
         </p:sp>
         <p:pic>
           <p:nvPicPr>
-            <p:cNvPr id="132" name="pic132"/>
+            <p:cNvPr id="133" name="pic133"/>
             <p:cNvPicPr/>
             <p:nvPr/>
           </p:nvPicPr>
@@ -7320,7 +7363,7 @@
           </p:blipFill>
           <p:spPr>
             <a:xfrm>
-              <a:off x="9387307" y="1682202"/>
+              <a:off x="7275795" y="1574331"/>
               <a:ext cx="113872" cy="569364"/>
             </a:xfrm>
             <a:prstGeom prst="rect">
@@ -7330,13 +7373,13 @@
         </p:pic>
         <p:sp>
           <p:nvSpPr>
-            <p:cNvPr id="133" name="pl133"/>
-            <p:cNvSpPr/>
-            <p:nvPr/>
-          </p:nvSpPr>
-          <p:spPr>
-            <a:xfrm>
-              <a:off x="9478405" y="2250617"/>
+            <p:cNvPr id="134" name="pl134"/>
+            <p:cNvSpPr/>
+            <p:nvPr/>
+          </p:nvSpPr>
+          <p:spPr>
+            <a:xfrm>
+              <a:off x="7366893" y="2142747"/>
               <a:ext cx="22774" cy="0"/>
             </a:xfrm>
             <a:custGeom>
@@ -7370,13 +7413,13 @@
         </p:sp>
         <p:sp>
           <p:nvSpPr>
-            <p:cNvPr id="134" name="pl134"/>
-            <p:cNvSpPr/>
-            <p:nvPr/>
-          </p:nvSpPr>
-          <p:spPr>
-            <a:xfrm>
-              <a:off x="9478405" y="2082115"/>
+            <p:cNvPr id="135" name="pl135"/>
+            <p:cNvSpPr/>
+            <p:nvPr/>
+          </p:nvSpPr>
+          <p:spPr>
+            <a:xfrm>
+              <a:off x="7366893" y="1974244"/>
               <a:ext cx="22774" cy="0"/>
             </a:xfrm>
             <a:custGeom>
@@ -7410,13 +7453,13 @@
         </p:sp>
         <p:sp>
           <p:nvSpPr>
-            <p:cNvPr id="135" name="pl135"/>
-            <p:cNvSpPr/>
-            <p:nvPr/>
-          </p:nvSpPr>
-          <p:spPr>
-            <a:xfrm>
-              <a:off x="9478405" y="1913613"/>
+            <p:cNvPr id="136" name="pl136"/>
+            <p:cNvSpPr/>
+            <p:nvPr/>
+          </p:nvSpPr>
+          <p:spPr>
+            <a:xfrm>
+              <a:off x="7366893" y="1805742"/>
               <a:ext cx="22774" cy="0"/>
             </a:xfrm>
             <a:custGeom>
@@ -7450,13 +7493,13 @@
         </p:sp>
         <p:sp>
           <p:nvSpPr>
-            <p:cNvPr id="136" name="pl136"/>
-            <p:cNvSpPr/>
-            <p:nvPr/>
-          </p:nvSpPr>
-          <p:spPr>
-            <a:xfrm>
-              <a:off x="9478405" y="1745111"/>
+            <p:cNvPr id="137" name="pl137"/>
+            <p:cNvSpPr/>
+            <p:nvPr/>
+          </p:nvSpPr>
+          <p:spPr>
+            <a:xfrm>
+              <a:off x="7366893" y="1637240"/>
               <a:ext cx="22774" cy="0"/>
             </a:xfrm>
             <a:custGeom>
@@ -7490,13 +7533,13 @@
         </p:sp>
         <p:sp>
           <p:nvSpPr>
-            <p:cNvPr id="137" name="pl137"/>
-            <p:cNvSpPr/>
-            <p:nvPr/>
-          </p:nvSpPr>
-          <p:spPr>
-            <a:xfrm>
-              <a:off x="9387307" y="2250617"/>
+            <p:cNvPr id="138" name="pl138"/>
+            <p:cNvSpPr/>
+            <p:nvPr/>
+          </p:nvSpPr>
+          <p:spPr>
+            <a:xfrm>
+              <a:off x="7275795" y="2142747"/>
               <a:ext cx="22774" cy="0"/>
             </a:xfrm>
             <a:custGeom>
@@ -7530,13 +7573,13 @@
         </p:sp>
         <p:sp>
           <p:nvSpPr>
-            <p:cNvPr id="138" name="pl138"/>
-            <p:cNvSpPr/>
-            <p:nvPr/>
-          </p:nvSpPr>
-          <p:spPr>
-            <a:xfrm>
-              <a:off x="9387307" y="2082115"/>
+            <p:cNvPr id="139" name="pl139"/>
+            <p:cNvSpPr/>
+            <p:nvPr/>
+          </p:nvSpPr>
+          <p:spPr>
+            <a:xfrm>
+              <a:off x="7275795" y="1974244"/>
               <a:ext cx="22774" cy="0"/>
             </a:xfrm>
             <a:custGeom>
@@ -7570,13 +7613,13 @@
         </p:sp>
         <p:sp>
           <p:nvSpPr>
-            <p:cNvPr id="139" name="pl139"/>
-            <p:cNvSpPr/>
-            <p:nvPr/>
-          </p:nvSpPr>
-          <p:spPr>
-            <a:xfrm>
-              <a:off x="9387307" y="1913613"/>
+            <p:cNvPr id="140" name="pl140"/>
+            <p:cNvSpPr/>
+            <p:nvPr/>
+          </p:nvSpPr>
+          <p:spPr>
+            <a:xfrm>
+              <a:off x="7275795" y="1805742"/>
               <a:ext cx="22774" cy="0"/>
             </a:xfrm>
             <a:custGeom>
@@ -7610,13 +7653,13 @@
         </p:sp>
         <p:sp>
           <p:nvSpPr>
-            <p:cNvPr id="140" name="pl140"/>
-            <p:cNvSpPr/>
-            <p:nvPr/>
-          </p:nvSpPr>
-          <p:spPr>
-            <a:xfrm>
-              <a:off x="9387307" y="1745111"/>
+            <p:cNvPr id="141" name="pl141"/>
+            <p:cNvSpPr/>
+            <p:nvPr/>
+          </p:nvSpPr>
+          <p:spPr>
+            <a:xfrm>
+              <a:off x="7275795" y="1637240"/>
               <a:ext cx="22774" cy="0"/>
             </a:xfrm>
             <a:custGeom>
@@ -7650,14 +7693,14 @@
         </p:sp>
         <p:sp>
           <p:nvSpPr>
-            <p:cNvPr id="141" name="tx141"/>
-            <p:cNvSpPr/>
-            <p:nvPr/>
-          </p:nvSpPr>
-          <p:spPr>
-            <a:xfrm>
-              <a:off x="9558116" y="2214224"/>
-              <a:ext cx="56509" cy="72786"/>
+            <p:cNvPr id="142" name="tx142"/>
+            <p:cNvSpPr/>
+            <p:nvPr/>
+          </p:nvSpPr>
+          <p:spPr>
+            <a:xfrm>
+              <a:off x="7452931" y="2101827"/>
+              <a:ext cx="63550" cy="81838"/>
             </a:xfrm>
             <a:prstGeom prst="rect">
               <a:avLst/>
@@ -7677,7 +7720,7 @@
                 </a:spcAft>
               </a:pPr>
               <a:r>
-                <a:rPr sz="800" i="0" b="0">
+                <a:rPr sz="900" i="0" b="0">
                   <a:solidFill>
                     <a:srgbClr val="000000">
                       <a:alpha val="100000"/>
@@ -7693,14 +7736,14 @@
         </p:sp>
         <p:sp>
           <p:nvSpPr>
-            <p:cNvPr id="142" name="tx142"/>
-            <p:cNvSpPr/>
-            <p:nvPr/>
-          </p:nvSpPr>
-          <p:spPr>
-            <a:xfrm>
-              <a:off x="9558116" y="2045722"/>
-              <a:ext cx="113019" cy="72786"/>
+            <p:cNvPr id="143" name="tx143"/>
+            <p:cNvSpPr/>
+            <p:nvPr/>
+          </p:nvSpPr>
+          <p:spPr>
+            <a:xfrm>
+              <a:off x="7452931" y="1933325"/>
+              <a:ext cx="127101" cy="81838"/>
             </a:xfrm>
             <a:prstGeom prst="rect">
               <a:avLst/>
@@ -7720,7 +7763,7 @@
                 </a:spcAft>
               </a:pPr>
               <a:r>
-                <a:rPr sz="800" i="0" b="0">
+                <a:rPr sz="900" i="0" b="0">
                   <a:solidFill>
                     <a:srgbClr val="000000">
                       <a:alpha val="100000"/>
@@ -7736,14 +7779,14 @@
         </p:sp>
         <p:sp>
           <p:nvSpPr>
-            <p:cNvPr id="143" name="tx143"/>
-            <p:cNvSpPr/>
-            <p:nvPr/>
-          </p:nvSpPr>
-          <p:spPr>
-            <a:xfrm>
-              <a:off x="9558116" y="1877220"/>
-              <a:ext cx="113019" cy="72786"/>
+            <p:cNvPr id="144" name="tx144"/>
+            <p:cNvSpPr/>
+            <p:nvPr/>
+          </p:nvSpPr>
+          <p:spPr>
+            <a:xfrm>
+              <a:off x="7452931" y="1764823"/>
+              <a:ext cx="127101" cy="81838"/>
             </a:xfrm>
             <a:prstGeom prst="rect">
               <a:avLst/>
@@ -7763,7 +7806,7 @@
                 </a:spcAft>
               </a:pPr>
               <a:r>
-                <a:rPr sz="800" i="0" b="0">
+                <a:rPr sz="900" i="0" b="0">
                   <a:solidFill>
                     <a:srgbClr val="000000">
                       <a:alpha val="100000"/>
@@ -7779,14 +7822,14 @@
         </p:sp>
         <p:sp>
           <p:nvSpPr>
-            <p:cNvPr id="144" name="tx144"/>
-            <p:cNvSpPr/>
-            <p:nvPr/>
-          </p:nvSpPr>
-          <p:spPr>
-            <a:xfrm>
-              <a:off x="9558116" y="1708718"/>
-              <a:ext cx="113019" cy="72786"/>
+            <p:cNvPr id="145" name="tx145"/>
+            <p:cNvSpPr/>
+            <p:nvPr/>
+          </p:nvSpPr>
+          <p:spPr>
+            <a:xfrm>
+              <a:off x="7452931" y="1596320"/>
+              <a:ext cx="127101" cy="81838"/>
             </a:xfrm>
             <a:prstGeom prst="rect">
               <a:avLst/>
@@ -7806,7 +7849,7 @@
                 </a:spcAft>
               </a:pPr>
               <a:r>
-                <a:rPr sz="800" i="0" b="0">
+                <a:rPr sz="900" i="0" b="0">
                   <a:solidFill>
                     <a:srgbClr val="000000">
                       <a:alpha val="100000"/>
@@ -7822,14 +7865,14 @@
         </p:sp>
         <p:sp>
           <p:nvSpPr>
-            <p:cNvPr id="145" name="tx145"/>
-            <p:cNvSpPr/>
-            <p:nvPr/>
-          </p:nvSpPr>
-          <p:spPr>
-            <a:xfrm>
-              <a:off x="5924156" y="503004"/>
-              <a:ext cx="2768071" cy="74432"/>
+            <p:cNvPr id="146" name="tx146"/>
+            <p:cNvSpPr/>
+            <p:nvPr/>
+          </p:nvSpPr>
+          <p:spPr>
+            <a:xfrm>
+              <a:off x="4972472" y="509330"/>
+              <a:ext cx="1719254" cy="83576"/>
             </a:xfrm>
             <a:prstGeom prst="rect">
               <a:avLst/>
@@ -7849,7 +7892,7 @@
                 </a:spcAft>
               </a:pPr>
               <a:r>
-                <a:rPr sz="819" i="0" b="0">
+                <a:rPr sz="919" i="0" b="0">
                   <a:solidFill>
                     <a:srgbClr val="4D4D4D">
                       <a:alpha val="100000"/>
@@ -7858,21 +7901,64 @@
                   <a:latin typeface="Arial"/>
                   <a:cs typeface="Arial"/>
                 </a:rPr>
-                <a:t>Delta AIC relative to the best cell; all fitted on the same rows</a:t>
+                <a:t>Delta AIC relative to the best cell;</a:t>
               </a:r>
             </a:p>
           </p:txBody>
         </p:sp>
         <p:sp>
           <p:nvSpPr>
-            <p:cNvPr id="146" name="tx146"/>
-            <p:cNvSpPr/>
-            <p:nvPr/>
-          </p:nvSpPr>
-          <p:spPr>
-            <a:xfrm>
-              <a:off x="5924156" y="328384"/>
-              <a:ext cx="2675625" cy="90982"/>
+            <p:cNvPr id="147" name="tx147"/>
+            <p:cNvSpPr/>
+            <p:nvPr/>
+          </p:nvSpPr>
+          <p:spPr>
+            <a:xfrm>
+              <a:off x="4972472" y="635517"/>
+              <a:ext cx="1388424" cy="83576"/>
+            </a:xfrm>
+            <a:prstGeom prst="rect">
+              <a:avLst/>
+            </a:prstGeom>
+            <a:noFill/>
+          </p:spPr>
+          <p:txBody>
+            <a:bodyPr lIns="0" rIns="0" tIns="0" bIns="0" anchorCtr="1" anchor="ctr" wrap="none"/>
+            <a:lstStyle/>
+            <a:p>
+              <a:pPr algn="l" marL="0" marR="0" indent="0">
+                <a:spcBef>
+                  <a:spcPts val="0"/>
+                </a:spcBef>
+                <a:spcAft>
+                  <a:spcPts val="0"/>
+                </a:spcAft>
+              </a:pPr>
+              <a:r>
+                <a:rPr sz="919" i="0" b="0">
+                  <a:solidFill>
+                    <a:srgbClr val="4D4D4D">
+                      <a:alpha val="100000"/>
+                    </a:srgbClr>
+                  </a:solidFill>
+                  <a:latin typeface="Arial"/>
+                  <a:cs typeface="Arial"/>
+                </a:rPr>
+                <a:t> all fitted on the same rows</a:t>
+              </a:r>
+            </a:p>
+          </p:txBody>
+        </p:sp>
+        <p:sp>
+          <p:nvSpPr>
+            <p:cNvPr id="148" name="tx148"/>
+            <p:cNvSpPr/>
+            <p:nvPr/>
+          </p:nvSpPr>
+          <p:spPr>
+            <a:xfrm>
+              <a:off x="4972472" y="328384"/>
+              <a:ext cx="2202423" cy="90982"/>
             </a:xfrm>
             <a:prstGeom prst="rect">
               <a:avLst/>
@@ -7901,21 +7987,21 @@
                   <a:latin typeface="Arial"/>
                   <a:cs typeface="Arial"/>
                 </a:rPr>
-                <a:t>Model support across climate specifications</a:t>
+                <a:t>Model support across specifications</a:t>
               </a:r>
             </a:p>
           </p:txBody>
         </p:sp>
         <p:sp>
           <p:nvSpPr>
-            <p:cNvPr id="147" name="tx147"/>
-            <p:cNvSpPr/>
-            <p:nvPr/>
-          </p:nvSpPr>
-          <p:spPr>
-            <a:xfrm>
-              <a:off x="4955458" y="319815"/>
-              <a:ext cx="93085" cy="109179"/>
+            <p:cNvPr id="149" name="tx149"/>
+            <p:cNvSpPr/>
+            <p:nvPr/>
+          </p:nvSpPr>
+          <p:spPr>
+            <a:xfrm>
+              <a:off x="3887386" y="309979"/>
+              <a:ext cx="100858" cy="118231"/>
             </a:xfrm>
             <a:prstGeom prst="rect">
               <a:avLst/>
@@ -7935,7 +8021,7 @@
                 </a:spcAft>
               </a:pPr>
               <a:r>
-                <a:rPr sz="1200" i="0" b="1">
+                <a:rPr sz="1300" i="0" b="1">
                   <a:solidFill>
                     <a:srgbClr val="000000">
                       <a:alpha val="100000"/>
@@ -7951,14 +8037,14 @@
         </p:sp>
         <p:sp>
           <p:nvSpPr>
-            <p:cNvPr id="148" name="rc148"/>
-            <p:cNvSpPr/>
-            <p:nvPr/>
-          </p:nvSpPr>
-          <p:spPr>
-            <a:xfrm>
-              <a:off x="1302233" y="3876093"/>
-              <a:ext cx="7553031" cy="2840724"/>
+            <p:cNvPr id="150" name="rc150"/>
+            <p:cNvSpPr/>
+            <p:nvPr/>
+          </p:nvSpPr>
+          <p:spPr>
+            <a:xfrm>
+              <a:off x="1409973" y="3546661"/>
+              <a:ext cx="5277255" cy="2225319"/>
             </a:xfrm>
             <a:prstGeom prst="rect">
               <a:avLst/>
@@ -7977,27 +8063,27 @@
         </p:sp>
         <p:sp>
           <p:nvSpPr>
-            <p:cNvPr id="149" name="pl149"/>
-            <p:cNvSpPr/>
-            <p:nvPr/>
-          </p:nvSpPr>
-          <p:spPr>
-            <a:xfrm>
-              <a:off x="1302233" y="6311000"/>
-              <a:ext cx="7553031" cy="0"/>
+            <p:cNvPr id="151" name="pl151"/>
+            <p:cNvSpPr/>
+            <p:nvPr/>
+          </p:nvSpPr>
+          <p:spPr>
+            <a:xfrm>
+              <a:off x="1409973" y="5454078"/>
+              <a:ext cx="5277255" cy="0"/>
             </a:xfrm>
             <a:custGeom>
               <a:avLst/>
               <a:pathLst>
-                <a:path w="7553031" h="0">
+                <a:path w="5277255" h="0">
                   <a:moveTo>
                     <a:pt x="0" y="0"/>
                   </a:moveTo>
                   <a:lnTo>
-                    <a:pt x="7553031" y="0"/>
+                    <a:pt x="5277255" y="0"/>
                   </a:lnTo>
                   <a:lnTo>
-                    <a:pt x="7553031" y="0"/>
+                    <a:pt x="5277255" y="0"/>
                   </a:lnTo>
                 </a:path>
               </a:pathLst>
@@ -8020,27 +8106,27 @@
         </p:sp>
         <p:sp>
           <p:nvSpPr>
-            <p:cNvPr id="150" name="pl150"/>
-            <p:cNvSpPr/>
-            <p:nvPr/>
-          </p:nvSpPr>
-          <p:spPr>
-            <a:xfrm>
-              <a:off x="1302233" y="5634637"/>
-              <a:ext cx="7553031" cy="0"/>
+            <p:cNvPr id="152" name="pl152"/>
+            <p:cNvSpPr/>
+            <p:nvPr/>
+          </p:nvSpPr>
+          <p:spPr>
+            <a:xfrm>
+              <a:off x="1409973" y="4924240"/>
+              <a:ext cx="5277255" cy="0"/>
             </a:xfrm>
             <a:custGeom>
               <a:avLst/>
               <a:pathLst>
-                <a:path w="7553031" h="0">
+                <a:path w="5277255" h="0">
                   <a:moveTo>
                     <a:pt x="0" y="0"/>
                   </a:moveTo>
                   <a:lnTo>
-                    <a:pt x="7553031" y="0"/>
+                    <a:pt x="5277255" y="0"/>
                   </a:lnTo>
                   <a:lnTo>
-                    <a:pt x="7553031" y="0"/>
+                    <a:pt x="5277255" y="0"/>
                   </a:lnTo>
                 </a:path>
               </a:pathLst>
@@ -8063,27 +8149,27 @@
         </p:sp>
         <p:sp>
           <p:nvSpPr>
-            <p:cNvPr id="151" name="pl151"/>
-            <p:cNvSpPr/>
-            <p:nvPr/>
-          </p:nvSpPr>
-          <p:spPr>
-            <a:xfrm>
-              <a:off x="1302233" y="4958274"/>
-              <a:ext cx="7553031" cy="0"/>
+            <p:cNvPr id="153" name="pl153"/>
+            <p:cNvSpPr/>
+            <p:nvPr/>
+          </p:nvSpPr>
+          <p:spPr>
+            <a:xfrm>
+              <a:off x="1409973" y="4394402"/>
+              <a:ext cx="5277255" cy="0"/>
             </a:xfrm>
             <a:custGeom>
               <a:avLst/>
               <a:pathLst>
-                <a:path w="7553031" h="0">
+                <a:path w="5277255" h="0">
                   <a:moveTo>
                     <a:pt x="0" y="0"/>
                   </a:moveTo>
                   <a:lnTo>
-                    <a:pt x="7553031" y="0"/>
+                    <a:pt x="5277255" y="0"/>
                   </a:lnTo>
                   <a:lnTo>
-                    <a:pt x="7553031" y="0"/>
+                    <a:pt x="5277255" y="0"/>
                   </a:lnTo>
                 </a:path>
               </a:pathLst>
@@ -8106,27 +8192,27 @@
         </p:sp>
         <p:sp>
           <p:nvSpPr>
-            <p:cNvPr id="152" name="pl152"/>
-            <p:cNvSpPr/>
-            <p:nvPr/>
-          </p:nvSpPr>
-          <p:spPr>
-            <a:xfrm>
-              <a:off x="1302233" y="4281911"/>
-              <a:ext cx="7553031" cy="0"/>
+            <p:cNvPr id="154" name="pl154"/>
+            <p:cNvSpPr/>
+            <p:nvPr/>
+          </p:nvSpPr>
+          <p:spPr>
+            <a:xfrm>
+              <a:off x="1409973" y="3864564"/>
+              <a:ext cx="5277255" cy="0"/>
             </a:xfrm>
             <a:custGeom>
               <a:avLst/>
               <a:pathLst>
-                <a:path w="7553031" h="0">
+                <a:path w="5277255" h="0">
                   <a:moveTo>
                     <a:pt x="0" y="0"/>
                   </a:moveTo>
                   <a:lnTo>
-                    <a:pt x="7553031" y="0"/>
+                    <a:pt x="5277255" y="0"/>
                   </a:lnTo>
                   <a:lnTo>
-                    <a:pt x="7553031" y="0"/>
+                    <a:pt x="5277255" y="0"/>
                   </a:lnTo>
                 </a:path>
               </a:pathLst>
@@ -8149,21 +8235,21 @@
         </p:sp>
         <p:sp>
           <p:nvSpPr>
-            <p:cNvPr id="153" name="pl153"/>
-            <p:cNvSpPr/>
-            <p:nvPr/>
-          </p:nvSpPr>
-          <p:spPr>
-            <a:xfrm>
-              <a:off x="1645552" y="3876093"/>
-              <a:ext cx="0" cy="2840724"/>
+            <p:cNvPr id="155" name="pl155"/>
+            <p:cNvSpPr/>
+            <p:nvPr/>
+          </p:nvSpPr>
+          <p:spPr>
+            <a:xfrm>
+              <a:off x="1649848" y="3546661"/>
+              <a:ext cx="0" cy="2225319"/>
             </a:xfrm>
             <a:custGeom>
               <a:avLst/>
               <a:pathLst>
-                <a:path w="0" h="2840724">
+                <a:path w="0" h="2225319">
                   <a:moveTo>
-                    <a:pt x="0" y="2840724"/>
+                    <a:pt x="0" y="2225319"/>
                   </a:moveTo>
                   <a:lnTo>
                     <a:pt x="0" y="0"/>
@@ -8192,24 +8278,24 @@
         </p:sp>
         <p:sp>
           <p:nvSpPr>
-            <p:cNvPr id="154" name="pl154"/>
-            <p:cNvSpPr/>
-            <p:nvPr/>
-          </p:nvSpPr>
-          <p:spPr>
-            <a:xfrm>
-              <a:off x="3978591" y="6429363"/>
-              <a:ext cx="3208140" cy="0"/>
+            <p:cNvPr id="156" name="pl156"/>
+            <p:cNvSpPr/>
+            <p:nvPr/>
+          </p:nvSpPr>
+          <p:spPr>
+            <a:xfrm>
+              <a:off x="3279928" y="5546800"/>
+              <a:ext cx="2241507" cy="0"/>
             </a:xfrm>
             <a:custGeom>
               <a:avLst/>
               <a:pathLst>
-                <a:path w="3208140" h="0">
+                <a:path w="2241507" h="0">
                   <a:moveTo>
                     <a:pt x="0" y="0"/>
                   </a:moveTo>
                   <a:lnTo>
-                    <a:pt x="3208140" y="0"/>
+                    <a:pt x="2241507" y="0"/>
                   </a:lnTo>
                 </a:path>
               </a:pathLst>
@@ -8232,24 +8318,24 @@
         </p:sp>
         <p:sp>
           <p:nvSpPr>
-            <p:cNvPr id="155" name="pl155"/>
-            <p:cNvSpPr/>
-            <p:nvPr/>
-          </p:nvSpPr>
-          <p:spPr>
-            <a:xfrm>
-              <a:off x="4356619" y="6113727"/>
-              <a:ext cx="3345603" cy="0"/>
+            <p:cNvPr id="157" name="pl157"/>
+            <p:cNvSpPr/>
+            <p:nvPr/>
+          </p:nvSpPr>
+          <p:spPr>
+            <a:xfrm>
+              <a:off x="3544053" y="5299542"/>
+              <a:ext cx="2337551" cy="0"/>
             </a:xfrm>
             <a:custGeom>
               <a:avLst/>
               <a:pathLst>
-                <a:path w="3345603" h="0">
+                <a:path w="2337551" h="0">
                   <a:moveTo>
                     <a:pt x="0" y="0"/>
                   </a:moveTo>
                   <a:lnTo>
-                    <a:pt x="3345603" y="0"/>
+                    <a:pt x="2337551" y="0"/>
                   </a:lnTo>
                 </a:path>
               </a:pathLst>
@@ -8272,24 +8358,24 @@
         </p:sp>
         <p:sp>
           <p:nvSpPr>
-            <p:cNvPr id="156" name="pl156"/>
-            <p:cNvSpPr/>
-            <p:nvPr/>
-          </p:nvSpPr>
-          <p:spPr>
-            <a:xfrm>
-              <a:off x="4208324" y="6271545"/>
-              <a:ext cx="3269480" cy="0"/>
+            <p:cNvPr id="158" name="pl158"/>
+            <p:cNvSpPr/>
+            <p:nvPr/>
+          </p:nvSpPr>
+          <p:spPr>
+            <a:xfrm>
+              <a:off x="3440441" y="5423171"/>
+              <a:ext cx="2284365" cy="0"/>
             </a:xfrm>
             <a:custGeom>
               <a:avLst/>
               <a:pathLst>
-                <a:path w="3269480" h="0">
+                <a:path w="2284365" h="0">
                   <a:moveTo>
                     <a:pt x="0" y="0"/>
                   </a:moveTo>
                   <a:lnTo>
-                    <a:pt x="3269480" y="0"/>
+                    <a:pt x="2284365" y="0"/>
                   </a:lnTo>
                 </a:path>
               </a:pathLst>
@@ -8312,24 +8398,24 @@
         </p:sp>
         <p:sp>
           <p:nvSpPr>
-            <p:cNvPr id="157" name="pl157"/>
-            <p:cNvSpPr/>
-            <p:nvPr/>
-          </p:nvSpPr>
-          <p:spPr>
-            <a:xfrm>
-              <a:off x="4278319" y="5753000"/>
-              <a:ext cx="3192532" cy="0"/>
+            <p:cNvPr id="159" name="pl159"/>
+            <p:cNvSpPr/>
+            <p:nvPr/>
+          </p:nvSpPr>
+          <p:spPr>
+            <a:xfrm>
+              <a:off x="3489346" y="5016962"/>
+              <a:ext cx="2230601" cy="0"/>
             </a:xfrm>
             <a:custGeom>
               <a:avLst/>
               <a:pathLst>
-                <a:path w="3192532" h="0">
+                <a:path w="2230601" h="0">
                   <a:moveTo>
                     <a:pt x="0" y="0"/>
                   </a:moveTo>
                   <a:lnTo>
-                    <a:pt x="3192532" y="0"/>
+                    <a:pt x="2230601" y="0"/>
                   </a:lnTo>
                 </a:path>
               </a:pathLst>
@@ -8352,24 +8438,24 @@
         </p:sp>
         <p:sp>
           <p:nvSpPr>
-            <p:cNvPr id="158" name="pl158"/>
-            <p:cNvSpPr/>
-            <p:nvPr/>
-          </p:nvSpPr>
-          <p:spPr>
-            <a:xfrm>
-              <a:off x="4619680" y="5437364"/>
-              <a:ext cx="3316068" cy="0"/>
+            <p:cNvPr id="160" name="pl160"/>
+            <p:cNvSpPr/>
+            <p:nvPr/>
+          </p:nvSpPr>
+          <p:spPr>
+            <a:xfrm>
+              <a:off x="3727853" y="4769704"/>
+              <a:ext cx="2316915" cy="0"/>
             </a:xfrm>
             <a:custGeom>
               <a:avLst/>
               <a:pathLst>
-                <a:path w="3316068" h="0">
+                <a:path w="2316915" h="0">
                   <a:moveTo>
                     <a:pt x="0" y="0"/>
                   </a:moveTo>
                   <a:lnTo>
-                    <a:pt x="3316068" y="0"/>
+                    <a:pt x="2316915" y="0"/>
                   </a:lnTo>
                 </a:path>
               </a:pathLst>
@@ -8392,24 +8478,24 @@
         </p:sp>
         <p:sp>
           <p:nvSpPr>
-            <p:cNvPr id="159" name="pl159"/>
-            <p:cNvSpPr/>
-            <p:nvPr/>
-          </p:nvSpPr>
-          <p:spPr>
-            <a:xfrm>
-              <a:off x="4498718" y="5595182"/>
-              <a:ext cx="3249485" cy="0"/>
+            <p:cNvPr id="161" name="pl161"/>
+            <p:cNvSpPr/>
+            <p:nvPr/>
+          </p:nvSpPr>
+          <p:spPr>
+            <a:xfrm>
+              <a:off x="3643338" y="4893333"/>
+              <a:ext cx="2270395" cy="0"/>
             </a:xfrm>
             <a:custGeom>
               <a:avLst/>
               <a:pathLst>
-                <a:path w="3249485" h="0">
+                <a:path w="2270395" h="0">
                   <a:moveTo>
                     <a:pt x="0" y="0"/>
                   </a:moveTo>
                   <a:lnTo>
-                    <a:pt x="3249485" y="0"/>
+                    <a:pt x="2270395" y="0"/>
                   </a:lnTo>
                 </a:path>
               </a:pathLst>
@@ -8432,24 +8518,24 @@
         </p:sp>
         <p:sp>
           <p:nvSpPr>
-            <p:cNvPr id="160" name="pl160"/>
-            <p:cNvSpPr/>
-            <p:nvPr/>
-          </p:nvSpPr>
-          <p:spPr>
-            <a:xfrm>
-              <a:off x="4441267" y="5076637"/>
-              <a:ext cx="3431967" cy="0"/>
+            <p:cNvPr id="162" name="pl162"/>
+            <p:cNvSpPr/>
+            <p:nvPr/>
+          </p:nvSpPr>
+          <p:spPr>
+            <a:xfrm>
+              <a:off x="3603197" y="4487124"/>
+              <a:ext cx="2397893" cy="0"/>
             </a:xfrm>
             <a:custGeom>
               <a:avLst/>
               <a:pathLst>
-                <a:path w="3431967" h="0">
+                <a:path w="2397893" h="0">
                   <a:moveTo>
                     <a:pt x="0" y="0"/>
                   </a:moveTo>
                   <a:lnTo>
-                    <a:pt x="3431967" y="0"/>
+                    <a:pt x="2397893" y="0"/>
                   </a:lnTo>
                 </a:path>
               </a:pathLst>
@@ -8472,24 +8558,24 @@
         </p:sp>
         <p:sp>
           <p:nvSpPr>
-            <p:cNvPr id="161" name="pl161"/>
-            <p:cNvSpPr/>
-            <p:nvPr/>
-          </p:nvSpPr>
-          <p:spPr>
-            <a:xfrm>
-              <a:off x="4882363" y="4761001"/>
-              <a:ext cx="3629581" cy="0"/>
+            <p:cNvPr id="163" name="pl163"/>
+            <p:cNvSpPr/>
+            <p:nvPr/>
+          </p:nvSpPr>
+          <p:spPr>
+            <a:xfrm>
+              <a:off x="3911387" y="4239866"/>
+              <a:ext cx="2535965" cy="0"/>
             </a:xfrm>
             <a:custGeom>
               <a:avLst/>
               <a:pathLst>
-                <a:path w="3629581" h="0">
+                <a:path w="2535965" h="0">
                   <a:moveTo>
                     <a:pt x="0" y="0"/>
                   </a:moveTo>
                   <a:lnTo>
-                    <a:pt x="3629581" y="0"/>
+                    <a:pt x="2535965" y="0"/>
                   </a:lnTo>
                 </a:path>
               </a:pathLst>
@@ -8512,24 +8598,24 @@
         </p:sp>
         <p:sp>
           <p:nvSpPr>
-            <p:cNvPr id="162" name="pl162"/>
-            <p:cNvSpPr/>
-            <p:nvPr/>
-          </p:nvSpPr>
-          <p:spPr>
-            <a:xfrm>
-              <a:off x="4723605" y="4918819"/>
-              <a:ext cx="3522412" cy="0"/>
+            <p:cNvPr id="164" name="pl164"/>
+            <p:cNvSpPr/>
+            <p:nvPr/>
+          </p:nvSpPr>
+          <p:spPr>
+            <a:xfrm>
+              <a:off x="3800464" y="4363495"/>
+              <a:ext cx="2461087" cy="0"/>
             </a:xfrm>
             <a:custGeom>
               <a:avLst/>
               <a:pathLst>
-                <a:path w="3522412" h="0">
+                <a:path w="2461087" h="0">
                   <a:moveTo>
                     <a:pt x="0" y="0"/>
                   </a:moveTo>
                   <a:lnTo>
-                    <a:pt x="3522412" y="0"/>
+                    <a:pt x="2461087" y="0"/>
                   </a:lnTo>
                 </a:path>
               </a:pathLst>
@@ -8552,24 +8638,24 @@
         </p:sp>
         <p:sp>
           <p:nvSpPr>
-            <p:cNvPr id="163" name="pl163"/>
-            <p:cNvSpPr/>
-            <p:nvPr/>
-          </p:nvSpPr>
-          <p:spPr>
-            <a:xfrm>
-              <a:off x="2698717" y="4400274"/>
-              <a:ext cx="2824084" cy="0"/>
+            <p:cNvPr id="165" name="pl165"/>
+            <p:cNvSpPr/>
+            <p:nvPr/>
+          </p:nvSpPr>
+          <p:spPr>
+            <a:xfrm>
+              <a:off x="2385688" y="3957286"/>
+              <a:ext cx="1973169" cy="0"/>
             </a:xfrm>
             <a:custGeom>
               <a:avLst/>
               <a:pathLst>
-                <a:path w="2824084" h="0">
+                <a:path w="1973169" h="0">
                   <a:moveTo>
                     <a:pt x="0" y="0"/>
                   </a:moveTo>
                   <a:lnTo>
-                    <a:pt x="2824084" y="0"/>
+                    <a:pt x="1973169" y="0"/>
                   </a:lnTo>
                 </a:path>
               </a:pathLst>
@@ -8592,24 +8678,24 @@
         </p:sp>
         <p:sp>
           <p:nvSpPr>
-            <p:cNvPr id="164" name="pl164"/>
-            <p:cNvSpPr/>
-            <p:nvPr/>
-          </p:nvSpPr>
-          <p:spPr>
-            <a:xfrm>
-              <a:off x="3187209" y="4084638"/>
-              <a:ext cx="2987119" cy="0"/>
+            <p:cNvPr id="166" name="pl166"/>
+            <p:cNvSpPr/>
+            <p:nvPr/>
+          </p:nvSpPr>
+          <p:spPr>
+            <a:xfrm>
+              <a:off x="2726994" y="3710028"/>
+              <a:ext cx="2087081" cy="0"/>
             </a:xfrm>
             <a:custGeom>
               <a:avLst/>
               <a:pathLst>
-                <a:path w="2987119" h="0">
+                <a:path w="2087081" h="0">
                   <a:moveTo>
                     <a:pt x="0" y="0"/>
                   </a:moveTo>
                   <a:lnTo>
-                    <a:pt x="2987119" y="0"/>
+                    <a:pt x="2087081" y="0"/>
                   </a:lnTo>
                 </a:path>
               </a:pathLst>
@@ -8632,24 +8718,24 @@
         </p:sp>
         <p:sp>
           <p:nvSpPr>
-            <p:cNvPr id="165" name="pl165"/>
-            <p:cNvSpPr/>
-            <p:nvPr/>
-          </p:nvSpPr>
-          <p:spPr>
-            <a:xfrm>
-              <a:off x="2897659" y="4242456"/>
-              <a:ext cx="2868982" cy="0"/>
+            <p:cNvPr id="167" name="pl167"/>
+            <p:cNvSpPr/>
+            <p:nvPr/>
+          </p:nvSpPr>
+          <p:spPr>
+            <a:xfrm>
+              <a:off x="2524687" y="3833657"/>
+              <a:ext cx="2004539" cy="0"/>
             </a:xfrm>
             <a:custGeom>
               <a:avLst/>
               <a:pathLst>
-                <a:path w="2868982" h="0">
+                <a:path w="2004539" h="0">
                   <a:moveTo>
                     <a:pt x="0" y="0"/>
                   </a:moveTo>
                   <a:lnTo>
-                    <a:pt x="2868982" y="0"/>
+                    <a:pt x="2004539" y="0"/>
                   </a:lnTo>
                 </a:path>
               </a:pathLst>
@@ -8672,24 +8758,24 @@
         </p:sp>
         <p:sp>
           <p:nvSpPr>
-            <p:cNvPr id="166" name="pl166"/>
-            <p:cNvSpPr/>
-            <p:nvPr/>
-          </p:nvSpPr>
-          <p:spPr>
-            <a:xfrm>
-              <a:off x="3702918" y="6508272"/>
-              <a:ext cx="2930486" cy="0"/>
+            <p:cNvPr id="168" name="pl168"/>
+            <p:cNvSpPr/>
+            <p:nvPr/>
+          </p:nvSpPr>
+          <p:spPr>
+            <a:xfrm>
+              <a:off x="3087317" y="5608614"/>
+              <a:ext cx="2047512" cy="0"/>
             </a:xfrm>
             <a:custGeom>
               <a:avLst/>
               <a:pathLst>
-                <a:path w="2930486" h="0">
+                <a:path w="2047512" h="0">
                   <a:moveTo>
                     <a:pt x="0" y="0"/>
                   </a:moveTo>
                   <a:lnTo>
-                    <a:pt x="2930486" y="0"/>
+                    <a:pt x="2047512" y="0"/>
                   </a:lnTo>
                 </a:path>
               </a:pathLst>
@@ -8712,24 +8798,24 @@
         </p:sp>
         <p:sp>
           <p:nvSpPr>
-            <p:cNvPr id="167" name="pl167"/>
-            <p:cNvSpPr/>
-            <p:nvPr/>
-          </p:nvSpPr>
-          <p:spPr>
-            <a:xfrm>
-              <a:off x="3761278" y="6192636"/>
-              <a:ext cx="2917676" cy="0"/>
+            <p:cNvPr id="169" name="pl169"/>
+            <p:cNvSpPr/>
+            <p:nvPr/>
+          </p:nvSpPr>
+          <p:spPr>
+            <a:xfrm>
+              <a:off x="3128093" y="5361356"/>
+              <a:ext cx="2038562" cy="0"/>
             </a:xfrm>
             <a:custGeom>
               <a:avLst/>
               <a:pathLst>
-                <a:path w="2917676" h="0">
+                <a:path w="2038562" h="0">
                   <a:moveTo>
                     <a:pt x="0" y="0"/>
                   </a:moveTo>
                   <a:lnTo>
-                    <a:pt x="2917676" y="0"/>
+                    <a:pt x="2038562" y="0"/>
                   </a:lnTo>
                 </a:path>
               </a:pathLst>
@@ -8752,24 +8838,24 @@
         </p:sp>
         <p:sp>
           <p:nvSpPr>
-            <p:cNvPr id="168" name="pl168"/>
-            <p:cNvSpPr/>
-            <p:nvPr/>
-          </p:nvSpPr>
-          <p:spPr>
-            <a:xfrm>
-              <a:off x="3733486" y="6350454"/>
-              <a:ext cx="2902092" cy="0"/>
+            <p:cNvPr id="170" name="pl170"/>
+            <p:cNvSpPr/>
+            <p:nvPr/>
+          </p:nvSpPr>
+          <p:spPr>
+            <a:xfrm>
+              <a:off x="3108675" y="5484985"/>
+              <a:ext cx="2027673" cy="0"/>
             </a:xfrm>
             <a:custGeom>
               <a:avLst/>
               <a:pathLst>
-                <a:path w="2902092" h="0">
+                <a:path w="2027673" h="0">
                   <a:moveTo>
                     <a:pt x="0" y="0"/>
                   </a:moveTo>
                   <a:lnTo>
-                    <a:pt x="2902092" y="0"/>
+                    <a:pt x="2027673" y="0"/>
                   </a:lnTo>
                 </a:path>
               </a:pathLst>
@@ -8792,24 +8878,24 @@
         </p:sp>
         <p:sp>
           <p:nvSpPr>
-            <p:cNvPr id="169" name="pl169"/>
-            <p:cNvSpPr/>
-            <p:nvPr/>
-          </p:nvSpPr>
-          <p:spPr>
-            <a:xfrm>
-              <a:off x="3613125" y="5831909"/>
-              <a:ext cx="2927953" cy="0"/>
+            <p:cNvPr id="171" name="pl171"/>
+            <p:cNvSpPr/>
+            <p:nvPr/>
+          </p:nvSpPr>
+          <p:spPr>
+            <a:xfrm>
+              <a:off x="3024579" y="5078776"/>
+              <a:ext cx="2045742" cy="0"/>
             </a:xfrm>
             <a:custGeom>
               <a:avLst/>
               <a:pathLst>
-                <a:path w="2927953" h="0">
+                <a:path w="2045742" h="0">
                   <a:moveTo>
                     <a:pt x="0" y="0"/>
                   </a:moveTo>
                   <a:lnTo>
-                    <a:pt x="2927953" y="0"/>
+                    <a:pt x="2045742" y="0"/>
                   </a:lnTo>
                 </a:path>
               </a:pathLst>
@@ -8832,24 +8918,24 @@
         </p:sp>
         <p:sp>
           <p:nvSpPr>
-            <p:cNvPr id="170" name="pl170"/>
-            <p:cNvSpPr/>
-            <p:nvPr/>
-          </p:nvSpPr>
-          <p:spPr>
-            <a:xfrm>
-              <a:off x="3656926" y="5516273"/>
-              <a:ext cx="2908220" cy="0"/>
+            <p:cNvPr id="172" name="pl172"/>
+            <p:cNvSpPr/>
+            <p:nvPr/>
+          </p:nvSpPr>
+          <p:spPr>
+            <a:xfrm>
+              <a:off x="3055183" y="4831518"/>
+              <a:ext cx="2031954" cy="0"/>
             </a:xfrm>
             <a:custGeom>
               <a:avLst/>
               <a:pathLst>
-                <a:path w="2908220" h="0">
+                <a:path w="2031954" h="0">
                   <a:moveTo>
                     <a:pt x="0" y="0"/>
                   </a:moveTo>
                   <a:lnTo>
-                    <a:pt x="2908220" y="0"/>
+                    <a:pt x="2031954" y="0"/>
                   </a:lnTo>
                 </a:path>
               </a:pathLst>
@@ -8872,24 +8958,24 @@
         </p:sp>
         <p:sp>
           <p:nvSpPr>
-            <p:cNvPr id="171" name="pl171"/>
-            <p:cNvSpPr/>
-            <p:nvPr/>
-          </p:nvSpPr>
-          <p:spPr>
-            <a:xfrm>
-              <a:off x="3632682" y="5674091"/>
-              <a:ext cx="2895170" cy="0"/>
+            <p:cNvPr id="173" name="pl173"/>
+            <p:cNvSpPr/>
+            <p:nvPr/>
+          </p:nvSpPr>
+          <p:spPr>
+            <a:xfrm>
+              <a:off x="3038244" y="4955147"/>
+              <a:ext cx="2022836" cy="0"/>
             </a:xfrm>
             <a:custGeom>
               <a:avLst/>
               <a:pathLst>
-                <a:path w="2895170" h="0">
+                <a:path w="2022836" h="0">
                   <a:moveTo>
                     <a:pt x="0" y="0"/>
                   </a:moveTo>
                   <a:lnTo>
-                    <a:pt x="2895170" y="0"/>
+                    <a:pt x="2022836" y="0"/>
                   </a:lnTo>
                 </a:path>
               </a:pathLst>
@@ -8912,24 +8998,24 @@
         </p:sp>
         <p:sp>
           <p:nvSpPr>
-            <p:cNvPr id="172" name="pl172"/>
-            <p:cNvSpPr/>
-            <p:nvPr/>
-          </p:nvSpPr>
-          <p:spPr>
-            <a:xfrm>
-              <a:off x="3777471" y="5155546"/>
-              <a:ext cx="3002994" cy="0"/>
+            <p:cNvPr id="174" name="pl174"/>
+            <p:cNvSpPr/>
+            <p:nvPr/>
+          </p:nvSpPr>
+          <p:spPr>
+            <a:xfrm>
+              <a:off x="3139407" y="4548938"/>
+              <a:ext cx="2098173" cy="0"/>
             </a:xfrm>
             <a:custGeom>
               <a:avLst/>
               <a:pathLst>
-                <a:path w="3002994" h="0">
+                <a:path w="2098173" h="0">
                   <a:moveTo>
                     <a:pt x="0" y="0"/>
                   </a:moveTo>
                   <a:lnTo>
-                    <a:pt x="3002994" y="0"/>
+                    <a:pt x="2098173" y="0"/>
                   </a:lnTo>
                 </a:path>
               </a:pathLst>
@@ -8952,24 +9038,24 @@
         </p:sp>
         <p:sp>
           <p:nvSpPr>
-            <p:cNvPr id="173" name="pl173"/>
-            <p:cNvSpPr/>
-            <p:nvPr/>
-          </p:nvSpPr>
-          <p:spPr>
-            <a:xfrm>
-              <a:off x="3849191" y="4839910"/>
-              <a:ext cx="3002502" cy="0"/>
+            <p:cNvPr id="175" name="pl175"/>
+            <p:cNvSpPr/>
+            <p:nvPr/>
+          </p:nvSpPr>
+          <p:spPr>
+            <a:xfrm>
+              <a:off x="3189517" y="4301680"/>
+              <a:ext cx="2097829" cy="0"/>
             </a:xfrm>
             <a:custGeom>
               <a:avLst/>
               <a:pathLst>
-                <a:path w="3002502" h="0">
+                <a:path w="2097829" h="0">
                   <a:moveTo>
                     <a:pt x="0" y="0"/>
                   </a:moveTo>
                   <a:lnTo>
-                    <a:pt x="3002502" y="0"/>
+                    <a:pt x="2097829" y="0"/>
                   </a:lnTo>
                 </a:path>
               </a:pathLst>
@@ -8992,24 +9078,24 @@
         </p:sp>
         <p:sp>
           <p:nvSpPr>
-            <p:cNvPr id="174" name="pl174"/>
-            <p:cNvSpPr/>
-            <p:nvPr/>
-          </p:nvSpPr>
-          <p:spPr>
-            <a:xfrm>
-              <a:off x="3809392" y="4997728"/>
-              <a:ext cx="2983053" cy="0"/>
+            <p:cNvPr id="176" name="pl176"/>
+            <p:cNvSpPr/>
+            <p:nvPr/>
+          </p:nvSpPr>
+          <p:spPr>
+            <a:xfrm>
+              <a:off x="3161710" y="4425309"/>
+              <a:ext cx="2084240" cy="0"/>
             </a:xfrm>
             <a:custGeom>
               <a:avLst/>
               <a:pathLst>
-                <a:path w="2983053" h="0">
+                <a:path w="2084240" h="0">
                   <a:moveTo>
                     <a:pt x="0" y="0"/>
                   </a:moveTo>
                   <a:lnTo>
-                    <a:pt x="2983053" y="0"/>
+                    <a:pt x="2084240" y="0"/>
                   </a:lnTo>
                 </a:path>
               </a:pathLst>
@@ -9032,24 +9118,24 @@
         </p:sp>
         <p:sp>
           <p:nvSpPr>
-            <p:cNvPr id="175" name="pl175"/>
-            <p:cNvSpPr/>
-            <p:nvPr/>
-          </p:nvSpPr>
-          <p:spPr>
-            <a:xfrm>
-              <a:off x="3458495" y="4479183"/>
-              <a:ext cx="2797417" cy="0"/>
+            <p:cNvPr id="177" name="pl177"/>
+            <p:cNvSpPr/>
+            <p:nvPr/>
+          </p:nvSpPr>
+          <p:spPr>
+            <a:xfrm>
+              <a:off x="2916540" y="4019100"/>
+              <a:ext cx="1954537" cy="0"/>
             </a:xfrm>
             <a:custGeom>
               <a:avLst/>
               <a:pathLst>
-                <a:path w="2797417" h="0">
+                <a:path w="1954537" h="0">
                   <a:moveTo>
                     <a:pt x="0" y="0"/>
                   </a:moveTo>
                   <a:lnTo>
-                    <a:pt x="2797417" y="0"/>
+                    <a:pt x="1954537" y="0"/>
                   </a:lnTo>
                 </a:path>
               </a:pathLst>
@@ -9072,24 +9158,24 @@
         </p:sp>
         <p:sp>
           <p:nvSpPr>
-            <p:cNvPr id="176" name="pl176"/>
-            <p:cNvSpPr/>
-            <p:nvPr/>
-          </p:nvSpPr>
-          <p:spPr>
-            <a:xfrm>
-              <a:off x="3519881" y="4163547"/>
-              <a:ext cx="2778411" cy="0"/>
+            <p:cNvPr id="178" name="pl178"/>
+            <p:cNvSpPr/>
+            <p:nvPr/>
+          </p:nvSpPr>
+          <p:spPr>
+            <a:xfrm>
+              <a:off x="2959430" y="3771842"/>
+              <a:ext cx="1941258" cy="0"/>
             </a:xfrm>
             <a:custGeom>
               <a:avLst/>
               <a:pathLst>
-                <a:path w="2778411" h="0">
+                <a:path w="1941258" h="0">
                   <a:moveTo>
                     <a:pt x="0" y="0"/>
                   </a:moveTo>
                   <a:lnTo>
-                    <a:pt x="2778411" y="0"/>
+                    <a:pt x="1941258" y="0"/>
                   </a:lnTo>
                 </a:path>
               </a:pathLst>
@@ -9112,24 +9198,24 @@
         </p:sp>
         <p:sp>
           <p:nvSpPr>
-            <p:cNvPr id="177" name="pl177"/>
-            <p:cNvSpPr/>
-            <p:nvPr/>
-          </p:nvSpPr>
-          <p:spPr>
-            <a:xfrm>
-              <a:off x="3475331" y="4321365"/>
-              <a:ext cx="2753535" cy="0"/>
+            <p:cNvPr id="179" name="pl179"/>
+            <p:cNvSpPr/>
+            <p:nvPr/>
+          </p:nvSpPr>
+          <p:spPr>
+            <a:xfrm>
+              <a:off x="2928303" y="3895471"/>
+              <a:ext cx="1923877" cy="0"/>
             </a:xfrm>
             <a:custGeom>
               <a:avLst/>
               <a:pathLst>
-                <a:path w="2753535" h="0">
+                <a:path w="1923877" h="0">
                   <a:moveTo>
                     <a:pt x="0" y="0"/>
                   </a:moveTo>
                   <a:lnTo>
-                    <a:pt x="2753535" y="0"/>
+                    <a:pt x="1923877" y="0"/>
                   </a:lnTo>
                 </a:path>
               </a:pathLst>
@@ -9152,27 +9238,27 @@
         </p:sp>
         <p:sp>
           <p:nvSpPr>
-            <p:cNvPr id="178" name="pg178"/>
-            <p:cNvSpPr/>
-            <p:nvPr/>
-          </p:nvSpPr>
-          <p:spPr>
-            <a:xfrm>
-              <a:off x="5448852" y="6385706"/>
-              <a:ext cx="75615" cy="65485"/>
+            <p:cNvPr id="180" name="pg180"/>
+            <p:cNvSpPr/>
+            <p:nvPr/>
+          </p:nvSpPr>
+          <p:spPr>
+            <a:xfrm>
+              <a:off x="4295248" y="5502507"/>
+              <a:ext cx="76717" cy="66439"/>
             </a:xfrm>
             <a:custGeom>
               <a:avLst/>
               <a:pathLst>
-                <a:path w="75615" h="65485">
+                <a:path w="76717" h="66439">
                   <a:moveTo>
-                    <a:pt x="37807" y="0"/>
+                    <a:pt x="38358" y="0"/>
                   </a:moveTo>
                   <a:lnTo>
-                    <a:pt x="75615" y="65485"/>
+                    <a:pt x="76717" y="66439"/>
                   </a:lnTo>
                   <a:lnTo>
-                    <a:pt x="0" y="65485"/>
+                    <a:pt x="0" y="66439"/>
                   </a:lnTo>
                   <a:close/>
                 </a:path>
@@ -9192,27 +9278,27 @@
         </p:sp>
         <p:sp>
           <p:nvSpPr>
-            <p:cNvPr id="179" name="pg179"/>
-            <p:cNvSpPr/>
-            <p:nvPr/>
-          </p:nvSpPr>
-          <p:spPr>
-            <a:xfrm>
-              <a:off x="5890558" y="6070070"/>
-              <a:ext cx="75615" cy="65485"/>
+            <p:cNvPr id="181" name="pg181"/>
+            <p:cNvSpPr/>
+            <p:nvPr/>
+          </p:nvSpPr>
+          <p:spPr>
+            <a:xfrm>
+              <a:off x="4603864" y="5255249"/>
+              <a:ext cx="76717" cy="66439"/>
             </a:xfrm>
             <a:custGeom>
               <a:avLst/>
               <a:pathLst>
-                <a:path w="75615" h="65485">
+                <a:path w="76717" h="66439">
                   <a:moveTo>
-                    <a:pt x="37807" y="0"/>
+                    <a:pt x="38358" y="0"/>
                   </a:moveTo>
                   <a:lnTo>
-                    <a:pt x="75615" y="65485"/>
+                    <a:pt x="76717" y="66439"/>
                   </a:lnTo>
                   <a:lnTo>
-                    <a:pt x="0" y="65485"/>
+                    <a:pt x="0" y="66439"/>
                   </a:lnTo>
                   <a:close/>
                 </a:path>
@@ -9232,27 +9318,27 @@
         </p:sp>
         <p:sp>
           <p:nvSpPr>
-            <p:cNvPr id="180" name="pg180"/>
-            <p:cNvSpPr/>
-            <p:nvPr/>
-          </p:nvSpPr>
-          <p:spPr>
-            <a:xfrm>
-              <a:off x="5707444" y="6227888"/>
-              <a:ext cx="75615" cy="65485"/>
+            <p:cNvPr id="182" name="pg182"/>
+            <p:cNvSpPr/>
+            <p:nvPr/>
+          </p:nvSpPr>
+          <p:spPr>
+            <a:xfrm>
+              <a:off x="4475924" y="5378878"/>
+              <a:ext cx="76717" cy="66439"/>
             </a:xfrm>
             <a:custGeom>
               <a:avLst/>
               <a:pathLst>
-                <a:path w="75615" h="65485">
+                <a:path w="76717" h="66439">
                   <a:moveTo>
-                    <a:pt x="37807" y="0"/>
+                    <a:pt x="38358" y="0"/>
                   </a:moveTo>
                   <a:lnTo>
-                    <a:pt x="75615" y="65485"/>
+                    <a:pt x="76717" y="66439"/>
                   </a:lnTo>
                   <a:lnTo>
-                    <a:pt x="0" y="65485"/>
+                    <a:pt x="0" y="66439"/>
                   </a:lnTo>
                   <a:close/>
                 </a:path>
@@ -9272,27 +9358,27 @@
         </p:sp>
         <p:sp>
           <p:nvSpPr>
-            <p:cNvPr id="181" name="pg181"/>
-            <p:cNvSpPr/>
-            <p:nvPr/>
-          </p:nvSpPr>
-          <p:spPr>
-            <a:xfrm>
-              <a:off x="5743745" y="5709343"/>
-              <a:ext cx="75615" cy="65485"/>
+            <p:cNvPr id="183" name="pg183"/>
+            <p:cNvSpPr/>
+            <p:nvPr/>
+          </p:nvSpPr>
+          <p:spPr>
+            <a:xfrm>
+              <a:off x="4501287" y="4972669"/>
+              <a:ext cx="76717" cy="66439"/>
             </a:xfrm>
             <a:custGeom>
               <a:avLst/>
               <a:pathLst>
-                <a:path w="75615" h="65485">
+                <a:path w="76717" h="66439">
                   <a:moveTo>
-                    <a:pt x="37807" y="0"/>
+                    <a:pt x="38358" y="0"/>
                   </a:moveTo>
                   <a:lnTo>
-                    <a:pt x="75615" y="65485"/>
+                    <a:pt x="76717" y="66439"/>
                   </a:lnTo>
                   <a:lnTo>
-                    <a:pt x="0" y="65485"/>
+                    <a:pt x="0" y="66439"/>
                   </a:lnTo>
                   <a:close/>
                 </a:path>
@@ -9312,27 +9398,27 @@
         </p:sp>
         <p:sp>
           <p:nvSpPr>
-            <p:cNvPr id="182" name="pg182"/>
-            <p:cNvSpPr/>
-            <p:nvPr/>
-          </p:nvSpPr>
-          <p:spPr>
-            <a:xfrm>
-              <a:off x="6142390" y="5393707"/>
-              <a:ext cx="75615" cy="65485"/>
+            <p:cNvPr id="184" name="pg184"/>
+            <p:cNvSpPr/>
+            <p:nvPr/>
+          </p:nvSpPr>
+          <p:spPr>
+            <a:xfrm>
+              <a:off x="4779818" y="4725411"/>
+              <a:ext cx="76717" cy="66439"/>
             </a:xfrm>
             <a:custGeom>
               <a:avLst/>
               <a:pathLst>
-                <a:path w="75615" h="65485">
+                <a:path w="76717" h="66439">
                   <a:moveTo>
-                    <a:pt x="37807" y="0"/>
+                    <a:pt x="38358" y="0"/>
                   </a:moveTo>
                   <a:lnTo>
-                    <a:pt x="75615" y="65485"/>
+                    <a:pt x="76717" y="66439"/>
                   </a:lnTo>
                   <a:lnTo>
-                    <a:pt x="0" y="65485"/>
+                    <a:pt x="0" y="66439"/>
                   </a:lnTo>
                   <a:close/>
                 </a:path>
@@ -9352,27 +9438,27 @@
         </p:sp>
         <p:sp>
           <p:nvSpPr>
-            <p:cNvPr id="183" name="pg183"/>
-            <p:cNvSpPr/>
-            <p:nvPr/>
-          </p:nvSpPr>
-          <p:spPr>
-            <a:xfrm>
-              <a:off x="5990987" y="5551525"/>
-              <a:ext cx="75615" cy="65485"/>
+            <p:cNvPr id="185" name="pg185"/>
+            <p:cNvSpPr/>
+            <p:nvPr/>
+          </p:nvSpPr>
+          <p:spPr>
+            <a:xfrm>
+              <a:off x="4674033" y="4849040"/>
+              <a:ext cx="76717" cy="66439"/>
             </a:xfrm>
             <a:custGeom>
               <a:avLst/>
               <a:pathLst>
-                <a:path w="75615" h="65485">
+                <a:path w="76717" h="66439">
                   <a:moveTo>
-                    <a:pt x="37807" y="0"/>
+                    <a:pt x="38358" y="0"/>
                   </a:moveTo>
                   <a:lnTo>
-                    <a:pt x="75615" y="65485"/>
+                    <a:pt x="76717" y="66439"/>
                   </a:lnTo>
                   <a:lnTo>
-                    <a:pt x="0" y="65485"/>
+                    <a:pt x="0" y="66439"/>
                   </a:lnTo>
                   <a:close/>
                 </a:path>
@@ -9392,27 +9478,27 @@
         </p:sp>
         <p:sp>
           <p:nvSpPr>
-            <p:cNvPr id="184" name="pg184"/>
-            <p:cNvSpPr/>
-            <p:nvPr/>
-          </p:nvSpPr>
-          <p:spPr>
-            <a:xfrm>
-              <a:off x="6014060" y="5032980"/>
-              <a:ext cx="75615" cy="65485"/>
+            <p:cNvPr id="186" name="pg186"/>
+            <p:cNvSpPr/>
+            <p:nvPr/>
+          </p:nvSpPr>
+          <p:spPr>
+            <a:xfrm>
+              <a:off x="4690155" y="4442831"/>
+              <a:ext cx="76717" cy="66439"/>
             </a:xfrm>
             <a:custGeom>
               <a:avLst/>
               <a:pathLst>
-                <a:path w="75615" h="65485">
+                <a:path w="76717" h="66439">
                   <a:moveTo>
-                    <a:pt x="37807" y="0"/>
+                    <a:pt x="38358" y="0"/>
                   </a:moveTo>
                   <a:lnTo>
-                    <a:pt x="75615" y="65485"/>
+                    <a:pt x="76717" y="66439"/>
                   </a:lnTo>
                   <a:lnTo>
-                    <a:pt x="0" y="65485"/>
+                    <a:pt x="0" y="66439"/>
                   </a:lnTo>
                   <a:close/>
                 </a:path>
@@ -9432,27 +9518,27 @@
         </p:sp>
         <p:sp>
           <p:nvSpPr>
-            <p:cNvPr id="185" name="pg185"/>
-            <p:cNvSpPr/>
-            <p:nvPr/>
-          </p:nvSpPr>
-          <p:spPr>
-            <a:xfrm>
-              <a:off x="6545831" y="4717344"/>
-              <a:ext cx="75615" cy="65485"/>
+            <p:cNvPr id="187" name="pg187"/>
+            <p:cNvSpPr/>
+            <p:nvPr/>
+          </p:nvSpPr>
+          <p:spPr>
+            <a:xfrm>
+              <a:off x="5061700" y="4195573"/>
+              <a:ext cx="76717" cy="66439"/>
             </a:xfrm>
             <a:custGeom>
               <a:avLst/>
               <a:pathLst>
-                <a:path w="75615" h="65485">
+                <a:path w="76717" h="66439">
                   <a:moveTo>
-                    <a:pt x="37807" y="0"/>
+                    <a:pt x="38358" y="0"/>
                   </a:moveTo>
                   <a:lnTo>
-                    <a:pt x="75615" y="65485"/>
+                    <a:pt x="76717" y="66439"/>
                   </a:lnTo>
                   <a:lnTo>
-                    <a:pt x="0" y="65485"/>
+                    <a:pt x="0" y="66439"/>
                   </a:lnTo>
                   <a:close/>
                 </a:path>
@@ -9472,27 +9558,27 @@
         </p:sp>
         <p:sp>
           <p:nvSpPr>
-            <p:cNvPr id="186" name="pg186"/>
-            <p:cNvSpPr/>
-            <p:nvPr/>
-          </p:nvSpPr>
-          <p:spPr>
-            <a:xfrm>
-              <a:off x="6338524" y="4875162"/>
-              <a:ext cx="75615" cy="65485"/>
+            <p:cNvPr id="188" name="pg188"/>
+            <p:cNvSpPr/>
+            <p:nvPr/>
+          </p:nvSpPr>
+          <p:spPr>
+            <a:xfrm>
+              <a:off x="4916855" y="4319202"/>
+              <a:ext cx="76717" cy="66439"/>
             </a:xfrm>
             <a:custGeom>
               <a:avLst/>
               <a:pathLst>
-                <a:path w="75615" h="65485">
+                <a:path w="76717" h="66439">
                   <a:moveTo>
-                    <a:pt x="37807" y="0"/>
+                    <a:pt x="38358" y="0"/>
                   </a:moveTo>
                   <a:lnTo>
-                    <a:pt x="75615" y="65485"/>
+                    <a:pt x="76717" y="66439"/>
                   </a:lnTo>
                   <a:lnTo>
-                    <a:pt x="0" y="65485"/>
+                    <a:pt x="0" y="66439"/>
                   </a:lnTo>
                   <a:close/>
                 </a:path>
@@ -9512,27 +9598,27 @@
         </p:sp>
         <p:sp>
           <p:nvSpPr>
-            <p:cNvPr id="187" name="pg187"/>
-            <p:cNvSpPr/>
-            <p:nvPr/>
-          </p:nvSpPr>
-          <p:spPr>
-            <a:xfrm>
-              <a:off x="3989424" y="4356617"/>
-              <a:ext cx="75615" cy="65485"/>
+            <p:cNvPr id="189" name="pg189"/>
+            <p:cNvSpPr/>
+            <p:nvPr/>
+          </p:nvSpPr>
+          <p:spPr>
+            <a:xfrm>
+              <a:off x="3275554" y="3912993"/>
+              <a:ext cx="76717" cy="66439"/>
             </a:xfrm>
             <a:custGeom>
               <a:avLst/>
               <a:pathLst>
-                <a:path w="75615" h="65485">
+                <a:path w="76717" h="66439">
                   <a:moveTo>
-                    <a:pt x="37807" y="0"/>
+                    <a:pt x="38358" y="0"/>
                   </a:moveTo>
                   <a:lnTo>
-                    <a:pt x="75615" y="65485"/>
+                    <a:pt x="76717" y="66439"/>
                   </a:lnTo>
                   <a:lnTo>
-                    <a:pt x="0" y="65485"/>
+                    <a:pt x="0" y="66439"/>
                   </a:lnTo>
                   <a:close/>
                 </a:path>
@@ -9552,27 +9638,27 @@
         </p:sp>
         <p:sp>
           <p:nvSpPr>
-            <p:cNvPr id="188" name="pg188"/>
-            <p:cNvSpPr/>
-            <p:nvPr/>
-          </p:nvSpPr>
-          <p:spPr>
-            <a:xfrm>
-              <a:off x="4553750" y="4040981"/>
-              <a:ext cx="75615" cy="65485"/>
+            <p:cNvPr id="190" name="pg190"/>
+            <p:cNvSpPr/>
+            <p:nvPr/>
+          </p:nvSpPr>
+          <p:spPr>
+            <a:xfrm>
+              <a:off x="3669845" y="3665735"/>
+              <a:ext cx="76717" cy="66439"/>
             </a:xfrm>
             <a:custGeom>
               <a:avLst/>
               <a:pathLst>
-                <a:path w="75615" h="65485">
+                <a:path w="76717" h="66439">
                   <a:moveTo>
-                    <a:pt x="37807" y="0"/>
+                    <a:pt x="38358" y="0"/>
                   </a:moveTo>
                   <a:lnTo>
-                    <a:pt x="75615" y="65485"/>
+                    <a:pt x="76717" y="66439"/>
                   </a:lnTo>
                   <a:lnTo>
-                    <a:pt x="0" y="65485"/>
+                    <a:pt x="0" y="66439"/>
                   </a:lnTo>
                   <a:close/>
                 </a:path>
@@ -9592,27 +9678,27 @@
         </p:sp>
         <p:sp>
           <p:nvSpPr>
-            <p:cNvPr id="189" name="pg189"/>
-            <p:cNvSpPr/>
-            <p:nvPr/>
-          </p:nvSpPr>
-          <p:spPr>
-            <a:xfrm>
-              <a:off x="4209704" y="4198799"/>
-              <a:ext cx="75615" cy="65485"/>
+            <p:cNvPr id="191" name="pg191"/>
+            <p:cNvSpPr/>
+            <p:nvPr/>
+          </p:nvSpPr>
+          <p:spPr>
+            <a:xfrm>
+              <a:off x="3429462" y="3789364"/>
+              <a:ext cx="76717" cy="66439"/>
             </a:xfrm>
             <a:custGeom>
               <a:avLst/>
               <a:pathLst>
-                <a:path w="75615" h="65485">
+                <a:path w="76717" h="66439">
                   <a:moveTo>
-                    <a:pt x="37807" y="0"/>
+                    <a:pt x="38358" y="0"/>
                   </a:moveTo>
                   <a:lnTo>
-                    <a:pt x="75615" y="65485"/>
+                    <a:pt x="76717" y="66439"/>
                   </a:lnTo>
                   <a:lnTo>
-                    <a:pt x="0" y="65485"/>
+                    <a:pt x="0" y="66439"/>
                   </a:lnTo>
                   <a:close/>
                 </a:path>
@@ -9632,14 +9718,14 @@
         </p:sp>
         <p:sp>
           <p:nvSpPr>
-            <p:cNvPr id="190" name="pt190"/>
-            <p:cNvSpPr/>
-            <p:nvPr/>
-          </p:nvSpPr>
-          <p:spPr>
-            <a:xfrm>
-              <a:off x="5057471" y="6480199"/>
-              <a:ext cx="56145" cy="56145"/>
+            <p:cNvPr id="192" name="pt192"/>
+            <p:cNvSpPr/>
+            <p:nvPr/>
+          </p:nvSpPr>
+          <p:spPr>
+            <a:xfrm>
+              <a:off x="4024867" y="5580132"/>
+              <a:ext cx="56964" cy="56964"/>
             </a:xfrm>
             <a:prstGeom prst="ellipse">
               <a:avLst/>
@@ -9658,14 +9744,14 @@
         </p:sp>
         <p:sp>
           <p:nvSpPr>
-            <p:cNvPr id="191" name="pt191"/>
-            <p:cNvSpPr/>
-            <p:nvPr/>
-          </p:nvSpPr>
-          <p:spPr>
-            <a:xfrm>
-              <a:off x="5110476" y="6164563"/>
-              <a:ext cx="56145" cy="56145"/>
+            <p:cNvPr id="193" name="pt193"/>
+            <p:cNvSpPr/>
+            <p:nvPr/>
+          </p:nvSpPr>
+          <p:spPr>
+            <a:xfrm>
+              <a:off x="4061901" y="5332874"/>
+              <a:ext cx="56964" cy="56964"/>
             </a:xfrm>
             <a:prstGeom prst="ellipse">
               <a:avLst/>
@@ -9684,14 +9770,14 @@
         </p:sp>
         <p:sp>
           <p:nvSpPr>
-            <p:cNvPr id="192" name="pt192"/>
-            <p:cNvSpPr/>
-            <p:nvPr/>
-          </p:nvSpPr>
-          <p:spPr>
-            <a:xfrm>
-              <a:off x="5075543" y="6322381"/>
-              <a:ext cx="56145" cy="56145"/>
+            <p:cNvPr id="194" name="pt194"/>
+            <p:cNvSpPr/>
+            <p:nvPr/>
+          </p:nvSpPr>
+          <p:spPr>
+            <a:xfrm>
+              <a:off x="4037494" y="5456503"/>
+              <a:ext cx="56964" cy="56964"/>
             </a:xfrm>
             <a:prstGeom prst="ellipse">
               <a:avLst/>
@@ -9710,14 +9796,14 @@
         </p:sp>
         <p:sp>
           <p:nvSpPr>
-            <p:cNvPr id="193" name="pt193"/>
-            <p:cNvSpPr/>
-            <p:nvPr/>
-          </p:nvSpPr>
-          <p:spPr>
-            <a:xfrm>
-              <a:off x="4965971" y="5803836"/>
-              <a:ext cx="56145" cy="56145"/>
+            <p:cNvPr id="195" name="pt195"/>
+            <p:cNvSpPr/>
+            <p:nvPr/>
+          </p:nvSpPr>
+          <p:spPr>
+            <a:xfrm>
+              <a:off x="3960937" y="5050294"/>
+              <a:ext cx="56964" cy="56964"/>
             </a:xfrm>
             <a:prstGeom prst="ellipse">
               <a:avLst/>
@@ -9736,14 +9822,14 @@
         </p:sp>
         <p:sp>
           <p:nvSpPr>
-            <p:cNvPr id="194" name="pt194"/>
-            <p:cNvSpPr/>
-            <p:nvPr/>
-          </p:nvSpPr>
-          <p:spPr>
-            <a:xfrm>
-              <a:off x="5001240" y="5488200"/>
-              <a:ext cx="56145" cy="56145"/>
+            <p:cNvPr id="196" name="pt196"/>
+            <p:cNvSpPr/>
+            <p:nvPr/>
+          </p:nvSpPr>
+          <p:spPr>
+            <a:xfrm>
+              <a:off x="3985579" y="4803036"/>
+              <a:ext cx="56964" cy="56964"/>
             </a:xfrm>
             <a:prstGeom prst="ellipse">
               <a:avLst/>
@@ -9762,14 +9848,14 @@
         </p:sp>
         <p:sp>
           <p:nvSpPr>
-            <p:cNvPr id="195" name="pt195"/>
-            <p:cNvSpPr/>
-            <p:nvPr/>
-          </p:nvSpPr>
-          <p:spPr>
-            <a:xfrm>
-              <a:off x="4971012" y="5646018"/>
-              <a:ext cx="56145" cy="56145"/>
+            <p:cNvPr id="197" name="pt197"/>
+            <p:cNvSpPr/>
+            <p:nvPr/>
+          </p:nvSpPr>
+          <p:spPr>
+            <a:xfrm>
+              <a:off x="3964459" y="4926665"/>
+              <a:ext cx="56964" cy="56964"/>
             </a:xfrm>
             <a:prstGeom prst="ellipse">
               <a:avLst/>
@@ -9788,14 +9874,14 @@
         </p:sp>
         <p:sp>
           <p:nvSpPr>
-            <p:cNvPr id="196" name="pt196"/>
-            <p:cNvSpPr/>
-            <p:nvPr/>
-          </p:nvSpPr>
-          <p:spPr>
-            <a:xfrm>
-              <a:off x="5164862" y="5127473"/>
-              <a:ext cx="56145" cy="56145"/>
+            <p:cNvPr id="198" name="pt198"/>
+            <p:cNvSpPr/>
+            <p:nvPr/>
+          </p:nvSpPr>
+          <p:spPr>
+            <a:xfrm>
+              <a:off x="4099901" y="4520456"/>
+              <a:ext cx="56964" cy="56964"/>
             </a:xfrm>
             <a:prstGeom prst="ellipse">
               <a:avLst/>
@@ -9814,14 +9900,14 @@
         </p:sp>
         <p:sp>
           <p:nvSpPr>
-            <p:cNvPr id="197" name="pt197"/>
-            <p:cNvSpPr/>
-            <p:nvPr/>
-          </p:nvSpPr>
-          <p:spPr>
-            <a:xfrm>
-              <a:off x="5236832" y="4811837"/>
-              <a:ext cx="56145" cy="56145"/>
+            <p:cNvPr id="199" name="pt199"/>
+            <p:cNvSpPr/>
+            <p:nvPr/>
+          </p:nvSpPr>
+          <p:spPr>
+            <a:xfrm>
+              <a:off x="4150185" y="4273198"/>
+              <a:ext cx="56964" cy="56964"/>
             </a:xfrm>
             <a:prstGeom prst="ellipse">
               <a:avLst/>
@@ -9840,14 +9926,14 @@
         </p:sp>
         <p:sp>
           <p:nvSpPr>
-            <p:cNvPr id="198" name="pt198"/>
-            <p:cNvSpPr/>
-            <p:nvPr/>
-          </p:nvSpPr>
-          <p:spPr>
-            <a:xfrm>
-              <a:off x="5188097" y="4969655"/>
-              <a:ext cx="56145" cy="56145"/>
+            <p:cNvPr id="200" name="pt200"/>
+            <p:cNvSpPr/>
+            <p:nvPr/>
+          </p:nvSpPr>
+          <p:spPr>
+            <a:xfrm>
+              <a:off x="4116135" y="4396827"/>
+              <a:ext cx="56964" cy="56964"/>
             </a:xfrm>
             <a:prstGeom prst="ellipse">
               <a:avLst/>
@@ -9866,14 +9952,14 @@
         </p:sp>
         <p:sp>
           <p:nvSpPr>
-            <p:cNvPr id="199" name="pt199"/>
-            <p:cNvSpPr/>
-            <p:nvPr/>
-          </p:nvSpPr>
-          <p:spPr>
-            <a:xfrm>
-              <a:off x="4752017" y="4451110"/>
-              <a:ext cx="56145" cy="56145"/>
+            <p:cNvPr id="201" name="pt201"/>
+            <p:cNvSpPr/>
+            <p:nvPr/>
+          </p:nvSpPr>
+          <p:spPr>
+            <a:xfrm>
+              <a:off x="3811448" y="3990618"/>
+              <a:ext cx="56964" cy="56964"/>
             </a:xfrm>
             <a:prstGeom prst="ellipse">
               <a:avLst/>
@@ -9892,14 +9978,14 @@
         </p:sp>
         <p:sp>
           <p:nvSpPr>
-            <p:cNvPr id="200" name="pt200"/>
-            <p:cNvSpPr/>
-            <p:nvPr/>
-          </p:nvSpPr>
-          <p:spPr>
-            <a:xfrm>
-              <a:off x="4805259" y="4135474"/>
-              <a:ext cx="56145" cy="56145"/>
+            <p:cNvPr id="202" name="pt202"/>
+            <p:cNvSpPr/>
+            <p:nvPr/>
+          </p:nvSpPr>
+          <p:spPr>
+            <a:xfrm>
+              <a:off x="3848648" y="3743360"/>
+              <a:ext cx="56964" cy="56964"/>
             </a:xfrm>
             <a:prstGeom prst="ellipse">
               <a:avLst/>
@@ -9918,14 +10004,14 @@
         </p:sp>
         <p:sp>
           <p:nvSpPr>
-            <p:cNvPr id="201" name="pt201"/>
-            <p:cNvSpPr/>
-            <p:nvPr/>
-          </p:nvSpPr>
-          <p:spPr>
-            <a:xfrm>
-              <a:off x="4749289" y="4293292"/>
-              <a:ext cx="56145" cy="56145"/>
+            <p:cNvPr id="203" name="pt203"/>
+            <p:cNvSpPr/>
+            <p:nvPr/>
+          </p:nvSpPr>
+          <p:spPr>
+            <a:xfrm>
+              <a:off x="3809542" y="3866989"/>
+              <a:ext cx="56964" cy="56964"/>
             </a:xfrm>
             <a:prstGeom prst="ellipse">
               <a:avLst/>
@@ -9944,21 +10030,21 @@
         </p:sp>
         <p:sp>
           <p:nvSpPr>
-            <p:cNvPr id="202" name="pl202"/>
-            <p:cNvSpPr/>
-            <p:nvPr/>
-          </p:nvSpPr>
-          <p:spPr>
-            <a:xfrm>
-              <a:off x="1302233" y="3876093"/>
-              <a:ext cx="0" cy="2840724"/>
+            <p:cNvPr id="204" name="pl204"/>
+            <p:cNvSpPr/>
+            <p:nvPr/>
+          </p:nvSpPr>
+          <p:spPr>
+            <a:xfrm>
+              <a:off x="1409973" y="3546661"/>
+              <a:ext cx="0" cy="2225319"/>
             </a:xfrm>
             <a:custGeom>
               <a:avLst/>
               <a:pathLst>
-                <a:path w="0" h="2840724">
+                <a:path w="0" h="2225319">
                   <a:moveTo>
-                    <a:pt x="0" y="2840724"/>
+                    <a:pt x="0" y="2225319"/>
                   </a:moveTo>
                   <a:lnTo>
                     <a:pt x="0" y="0"/>
@@ -9984,14 +10070,14 @@
         </p:sp>
         <p:sp>
           <p:nvSpPr>
-            <p:cNvPr id="203" name="tx203"/>
-            <p:cNvSpPr/>
-            <p:nvPr/>
-          </p:nvSpPr>
-          <p:spPr>
-            <a:xfrm>
-              <a:off x="1034551" y="6278310"/>
-              <a:ext cx="216438" cy="65379"/>
+            <p:cNvPr id="205" name="tx205"/>
+            <p:cNvSpPr/>
+            <p:nvPr/>
+          </p:nvSpPr>
+          <p:spPr>
+            <a:xfrm>
+              <a:off x="1112001" y="5417685"/>
+              <a:ext cx="241035" cy="72786"/>
             </a:xfrm>
             <a:prstGeom prst="rect">
               <a:avLst/>
@@ -10011,7 +10097,7 @@
                 </a:spcAft>
               </a:pPr>
               <a:r>
-                <a:rPr sz="720" i="0" b="0">
+                <a:rPr sz="800" i="0" b="0">
                   <a:solidFill>
                     <a:srgbClr val="262626">
                       <a:alpha val="100000"/>
@@ -10027,14 +10113,14 @@
         </p:sp>
         <p:sp>
           <p:nvSpPr>
-            <p:cNvPr id="204" name="tx204"/>
-            <p:cNvSpPr/>
-            <p:nvPr/>
-          </p:nvSpPr>
-          <p:spPr>
-            <a:xfrm>
-              <a:off x="830183" y="5601947"/>
-              <a:ext cx="420806" cy="65379"/>
+            <p:cNvPr id="206" name="tx206"/>
+            <p:cNvSpPr/>
+            <p:nvPr/>
+          </p:nvSpPr>
+          <p:spPr>
+            <a:xfrm>
+              <a:off x="884315" y="4887847"/>
+              <a:ext cx="468721" cy="72786"/>
             </a:xfrm>
             <a:prstGeom prst="rect">
               <a:avLst/>
@@ -10054,7 +10140,7 @@
                 </a:spcAft>
               </a:pPr>
               <a:r>
-                <a:rPr sz="720" i="0" b="0">
+                <a:rPr sz="800" i="0" b="0">
                   <a:solidFill>
                     <a:srgbClr val="262626">
                       <a:alpha val="100000"/>
@@ -10070,14 +10156,14 @@
         </p:sp>
         <p:sp>
           <p:nvSpPr>
-            <p:cNvPr id="205" name="tx205"/>
-            <p:cNvSpPr/>
-            <p:nvPr/>
-          </p:nvSpPr>
-          <p:spPr>
-            <a:xfrm>
-              <a:off x="748801" y="4925584"/>
-              <a:ext cx="502188" cy="65379"/>
+            <p:cNvPr id="207" name="tx207"/>
+            <p:cNvSpPr/>
+            <p:nvPr/>
+          </p:nvSpPr>
+          <p:spPr>
+            <a:xfrm>
+              <a:off x="793790" y="4358009"/>
+              <a:ext cx="559247" cy="72786"/>
             </a:xfrm>
             <a:prstGeom prst="rect">
               <a:avLst/>
@@ -10097,7 +10183,7 @@
                 </a:spcAft>
               </a:pPr>
               <a:r>
-                <a:rPr sz="720" i="0" b="0">
+                <a:rPr sz="800" i="0" b="0">
                   <a:solidFill>
                     <a:srgbClr val="262626">
                       <a:alpha val="100000"/>
@@ -10113,14 +10199,14 @@
         </p:sp>
         <p:sp>
           <p:nvSpPr>
-            <p:cNvPr id="206" name="tx206"/>
-            <p:cNvSpPr/>
-            <p:nvPr/>
-          </p:nvSpPr>
-          <p:spPr>
-            <a:xfrm>
-              <a:off x="911199" y="4249221"/>
-              <a:ext cx="339791" cy="65379"/>
+            <p:cNvPr id="208" name="tx208"/>
+            <p:cNvSpPr/>
+            <p:nvPr/>
+          </p:nvSpPr>
+          <p:spPr>
+            <a:xfrm>
+              <a:off x="974658" y="3828171"/>
+              <a:ext cx="378378" cy="72786"/>
             </a:xfrm>
             <a:prstGeom prst="rect">
               <a:avLst/>
@@ -10140,7 +10226,7 @@
                 </a:spcAft>
               </a:pPr>
               <a:r>
-                <a:rPr sz="720" i="0" b="0">
+                <a:rPr sz="800" i="0" b="0">
                   <a:solidFill>
                     <a:srgbClr val="262626">
                       <a:alpha val="100000"/>
@@ -10156,24 +10242,24 @@
         </p:sp>
         <p:sp>
           <p:nvSpPr>
-            <p:cNvPr id="207" name="pl207"/>
-            <p:cNvSpPr/>
-            <p:nvPr/>
-          </p:nvSpPr>
-          <p:spPr>
-            <a:xfrm>
-              <a:off x="1273764" y="6311000"/>
-              <a:ext cx="28468" cy="0"/>
+            <p:cNvPr id="209" name="pl209"/>
+            <p:cNvSpPr/>
+            <p:nvPr/>
+          </p:nvSpPr>
+          <p:spPr>
+            <a:xfrm>
+              <a:off x="1378342" y="5454078"/>
+              <a:ext cx="31631" cy="0"/>
             </a:xfrm>
             <a:custGeom>
               <a:avLst/>
               <a:pathLst>
-                <a:path w="28468" h="0">
+                <a:path w="31631" h="0">
                   <a:moveTo>
                     <a:pt x="0" y="0"/>
                   </a:moveTo>
                   <a:lnTo>
-                    <a:pt x="28468" y="0"/>
+                    <a:pt x="31631" y="0"/>
                   </a:lnTo>
                 </a:path>
               </a:pathLst>
@@ -10196,24 +10282,24 @@
         </p:sp>
         <p:sp>
           <p:nvSpPr>
-            <p:cNvPr id="208" name="pl208"/>
-            <p:cNvSpPr/>
-            <p:nvPr/>
-          </p:nvSpPr>
-          <p:spPr>
-            <a:xfrm>
-              <a:off x="1273764" y="5634637"/>
-              <a:ext cx="28468" cy="0"/>
+            <p:cNvPr id="210" name="pl210"/>
+            <p:cNvSpPr/>
+            <p:nvPr/>
+          </p:nvSpPr>
+          <p:spPr>
+            <a:xfrm>
+              <a:off x="1378342" y="4924240"/>
+              <a:ext cx="31631" cy="0"/>
             </a:xfrm>
             <a:custGeom>
               <a:avLst/>
               <a:pathLst>
-                <a:path w="28468" h="0">
+                <a:path w="31631" h="0">
                   <a:moveTo>
                     <a:pt x="0" y="0"/>
                   </a:moveTo>
                   <a:lnTo>
-                    <a:pt x="28468" y="0"/>
+                    <a:pt x="31631" y="0"/>
                   </a:lnTo>
                 </a:path>
               </a:pathLst>
@@ -10236,24 +10322,24 @@
         </p:sp>
         <p:sp>
           <p:nvSpPr>
-            <p:cNvPr id="209" name="pl209"/>
-            <p:cNvSpPr/>
-            <p:nvPr/>
-          </p:nvSpPr>
-          <p:spPr>
-            <a:xfrm>
-              <a:off x="1273764" y="4958274"/>
-              <a:ext cx="28468" cy="0"/>
+            <p:cNvPr id="211" name="pl211"/>
+            <p:cNvSpPr/>
+            <p:nvPr/>
+          </p:nvSpPr>
+          <p:spPr>
+            <a:xfrm>
+              <a:off x="1378342" y="4394402"/>
+              <a:ext cx="31631" cy="0"/>
             </a:xfrm>
             <a:custGeom>
               <a:avLst/>
               <a:pathLst>
-                <a:path w="28468" h="0">
+                <a:path w="31631" h="0">
                   <a:moveTo>
                     <a:pt x="0" y="0"/>
                   </a:moveTo>
                   <a:lnTo>
-                    <a:pt x="28468" y="0"/>
+                    <a:pt x="31631" y="0"/>
                   </a:lnTo>
                 </a:path>
               </a:pathLst>
@@ -10276,24 +10362,24 @@
         </p:sp>
         <p:sp>
           <p:nvSpPr>
-            <p:cNvPr id="210" name="pl210"/>
-            <p:cNvSpPr/>
-            <p:nvPr/>
-          </p:nvSpPr>
-          <p:spPr>
-            <a:xfrm>
-              <a:off x="1273764" y="4281911"/>
-              <a:ext cx="28468" cy="0"/>
+            <p:cNvPr id="212" name="pl212"/>
+            <p:cNvSpPr/>
+            <p:nvPr/>
+          </p:nvSpPr>
+          <p:spPr>
+            <a:xfrm>
+              <a:off x="1378342" y="3864564"/>
+              <a:ext cx="31631" cy="0"/>
             </a:xfrm>
             <a:custGeom>
               <a:avLst/>
               <a:pathLst>
-                <a:path w="28468" h="0">
+                <a:path w="31631" h="0">
                   <a:moveTo>
                     <a:pt x="0" y="0"/>
                   </a:moveTo>
                   <a:lnTo>
-                    <a:pt x="28468" y="0"/>
+                    <a:pt x="31631" y="0"/>
                   </a:lnTo>
                 </a:path>
               </a:pathLst>
@@ -10316,24 +10402,24 @@
         </p:sp>
         <p:sp>
           <p:nvSpPr>
-            <p:cNvPr id="211" name="pl211"/>
-            <p:cNvSpPr/>
-            <p:nvPr/>
-          </p:nvSpPr>
-          <p:spPr>
-            <a:xfrm>
-              <a:off x="1302233" y="6716817"/>
-              <a:ext cx="7553031" cy="0"/>
+            <p:cNvPr id="213" name="pl213"/>
+            <p:cNvSpPr/>
+            <p:nvPr/>
+          </p:nvSpPr>
+          <p:spPr>
+            <a:xfrm>
+              <a:off x="1409973" y="5771981"/>
+              <a:ext cx="5277255" cy="0"/>
             </a:xfrm>
             <a:custGeom>
               <a:avLst/>
               <a:pathLst>
-                <a:path w="7553031" h="0">
+                <a:path w="5277255" h="0">
                   <a:moveTo>
                     <a:pt x="0" y="0"/>
                   </a:moveTo>
                   <a:lnTo>
-                    <a:pt x="7553031" y="0"/>
+                    <a:pt x="5277255" y="0"/>
                   </a:lnTo>
                 </a:path>
               </a:pathLst>
@@ -10356,21 +10442,21 @@
         </p:sp>
         <p:sp>
           <p:nvSpPr>
-            <p:cNvPr id="212" name="pl212"/>
-            <p:cNvSpPr/>
-            <p:nvPr/>
-          </p:nvSpPr>
-          <p:spPr>
-            <a:xfrm>
-              <a:off x="1645552" y="6716817"/>
-              <a:ext cx="0" cy="28468"/>
+            <p:cNvPr id="214" name="pl214"/>
+            <p:cNvSpPr/>
+            <p:nvPr/>
+          </p:nvSpPr>
+          <p:spPr>
+            <a:xfrm>
+              <a:off x="1649848" y="5771981"/>
+              <a:ext cx="0" cy="31631"/>
             </a:xfrm>
             <a:custGeom>
               <a:avLst/>
               <a:pathLst>
-                <a:path w="0" h="28468">
+                <a:path w="0" h="31631">
                   <a:moveTo>
-                    <a:pt x="0" y="28468"/>
+                    <a:pt x="0" y="31631"/>
                   </a:moveTo>
                   <a:lnTo>
                     <a:pt x="0" y="0"/>
@@ -10396,21 +10482,21 @@
         </p:sp>
         <p:sp>
           <p:nvSpPr>
-            <p:cNvPr id="213" name="pl213"/>
-            <p:cNvSpPr/>
-            <p:nvPr/>
-          </p:nvSpPr>
-          <p:spPr>
-            <a:xfrm>
-              <a:off x="3547953" y="6716817"/>
-              <a:ext cx="0" cy="28468"/>
+            <p:cNvPr id="215" name="pl215"/>
+            <p:cNvSpPr/>
+            <p:nvPr/>
+          </p:nvSpPr>
+          <p:spPr>
+            <a:xfrm>
+              <a:off x="2979044" y="5771981"/>
+              <a:ext cx="0" cy="31631"/>
             </a:xfrm>
             <a:custGeom>
               <a:avLst/>
               <a:pathLst>
-                <a:path w="0" h="28468">
+                <a:path w="0" h="31631">
                   <a:moveTo>
-                    <a:pt x="0" y="28468"/>
+                    <a:pt x="0" y="31631"/>
                   </a:moveTo>
                   <a:lnTo>
                     <a:pt x="0" y="0"/>
@@ -10436,21 +10522,21 @@
         </p:sp>
         <p:sp>
           <p:nvSpPr>
-            <p:cNvPr id="214" name="pl214"/>
-            <p:cNvSpPr/>
-            <p:nvPr/>
-          </p:nvSpPr>
-          <p:spPr>
-            <a:xfrm>
-              <a:off x="5450353" y="6716817"/>
-              <a:ext cx="0" cy="28468"/>
+            <p:cNvPr id="216" name="pl216"/>
+            <p:cNvSpPr/>
+            <p:nvPr/>
+          </p:nvSpPr>
+          <p:spPr>
+            <a:xfrm>
+              <a:off x="4308239" y="5771981"/>
+              <a:ext cx="0" cy="31631"/>
             </a:xfrm>
             <a:custGeom>
               <a:avLst/>
               <a:pathLst>
-                <a:path w="0" h="28468">
+                <a:path w="0" h="31631">
                   <a:moveTo>
-                    <a:pt x="0" y="28468"/>
+                    <a:pt x="0" y="31631"/>
                   </a:moveTo>
                   <a:lnTo>
                     <a:pt x="0" y="0"/>
@@ -10476,21 +10562,21 @@
         </p:sp>
         <p:sp>
           <p:nvSpPr>
-            <p:cNvPr id="215" name="pl215"/>
-            <p:cNvSpPr/>
-            <p:nvPr/>
-          </p:nvSpPr>
-          <p:spPr>
-            <a:xfrm>
-              <a:off x="7352754" y="6716817"/>
-              <a:ext cx="0" cy="28468"/>
+            <p:cNvPr id="217" name="pl217"/>
+            <p:cNvSpPr/>
+            <p:nvPr/>
+          </p:nvSpPr>
+          <p:spPr>
+            <a:xfrm>
+              <a:off x="5637434" y="5771981"/>
+              <a:ext cx="0" cy="31631"/>
             </a:xfrm>
             <a:custGeom>
               <a:avLst/>
               <a:pathLst>
-                <a:path w="0" h="28468">
+                <a:path w="0" h="31631">
                   <a:moveTo>
-                    <a:pt x="0" y="28468"/>
+                    <a:pt x="0" y="31631"/>
                   </a:moveTo>
                   <a:lnTo>
                     <a:pt x="0" y="0"/>
@@ -10516,14 +10602,14 @@
         </p:sp>
         <p:sp>
           <p:nvSpPr>
-            <p:cNvPr id="216" name="tx216"/>
-            <p:cNvSpPr/>
-            <p:nvPr/>
-          </p:nvSpPr>
-          <p:spPr>
-            <a:xfrm>
-              <a:off x="1582138" y="6768060"/>
-              <a:ext cx="126827" cy="65379"/>
+            <p:cNvPr id="218" name="tx218"/>
+            <p:cNvSpPr/>
+            <p:nvPr/>
+          </p:nvSpPr>
+          <p:spPr>
+            <a:xfrm>
+              <a:off x="1579211" y="5828917"/>
+              <a:ext cx="141274" cy="72786"/>
             </a:xfrm>
             <a:prstGeom prst="rect">
               <a:avLst/>
@@ -10543,7 +10629,7 @@
                 </a:spcAft>
               </a:pPr>
               <a:r>
-                <a:rPr sz="720" i="0" b="0">
+                <a:rPr sz="800" i="0" b="0">
                   <a:solidFill>
                     <a:srgbClr val="262626">
                       <a:alpha val="100000"/>
@@ -10559,14 +10645,14 @@
         </p:sp>
         <p:sp>
           <p:nvSpPr>
-            <p:cNvPr id="217" name="tx217"/>
-            <p:cNvSpPr/>
-            <p:nvPr/>
-          </p:nvSpPr>
-          <p:spPr>
-            <a:xfrm>
-              <a:off x="3484539" y="6768060"/>
-              <a:ext cx="126827" cy="65379"/>
+            <p:cNvPr id="219" name="tx219"/>
+            <p:cNvSpPr/>
+            <p:nvPr/>
+          </p:nvSpPr>
+          <p:spPr>
+            <a:xfrm>
+              <a:off x="2908406" y="5828917"/>
+              <a:ext cx="141274" cy="72786"/>
             </a:xfrm>
             <a:prstGeom prst="rect">
               <a:avLst/>
@@ -10586,7 +10672,7 @@
                 </a:spcAft>
               </a:pPr>
               <a:r>
-                <a:rPr sz="720" i="0" b="0">
+                <a:rPr sz="800" i="0" b="0">
                   <a:solidFill>
                     <a:srgbClr val="262626">
                       <a:alpha val="100000"/>
@@ -10602,14 +10688,14 @@
         </p:sp>
         <p:sp>
           <p:nvSpPr>
-            <p:cNvPr id="218" name="tx218"/>
-            <p:cNvSpPr/>
-            <p:nvPr/>
-          </p:nvSpPr>
-          <p:spPr>
-            <a:xfrm>
-              <a:off x="5386939" y="6768060"/>
-              <a:ext cx="126827" cy="65379"/>
+            <p:cNvPr id="220" name="tx220"/>
+            <p:cNvSpPr/>
+            <p:nvPr/>
+          </p:nvSpPr>
+          <p:spPr>
+            <a:xfrm>
+              <a:off x="4237601" y="5828917"/>
+              <a:ext cx="141274" cy="72786"/>
             </a:xfrm>
             <a:prstGeom prst="rect">
               <a:avLst/>
@@ -10629,7 +10715,7 @@
                 </a:spcAft>
               </a:pPr>
               <a:r>
-                <a:rPr sz="720" i="0" b="0">
+                <a:rPr sz="800" i="0" b="0">
                   <a:solidFill>
                     <a:srgbClr val="262626">
                       <a:alpha val="100000"/>
@@ -10645,14 +10731,14 @@
         </p:sp>
         <p:sp>
           <p:nvSpPr>
-            <p:cNvPr id="219" name="tx219"/>
-            <p:cNvSpPr/>
-            <p:nvPr/>
-          </p:nvSpPr>
-          <p:spPr>
-            <a:xfrm>
-              <a:off x="7289340" y="6768060"/>
-              <a:ext cx="126827" cy="65379"/>
+            <p:cNvPr id="221" name="tx221"/>
+            <p:cNvSpPr/>
+            <p:nvPr/>
+          </p:nvSpPr>
+          <p:spPr>
+            <a:xfrm>
+              <a:off x="5566797" y="5828917"/>
+              <a:ext cx="141274" cy="72786"/>
             </a:xfrm>
             <a:prstGeom prst="rect">
               <a:avLst/>
@@ -10672,7 +10758,7 @@
                 </a:spcAft>
               </a:pPr>
               <a:r>
-                <a:rPr sz="720" i="0" b="0">
+                <a:rPr sz="800" i="0" b="0">
                   <a:solidFill>
                     <a:srgbClr val="262626">
                       <a:alpha val="100000"/>
@@ -10688,14 +10774,14 @@
         </p:sp>
         <p:sp>
           <p:nvSpPr>
-            <p:cNvPr id="220" name="tx220"/>
-            <p:cNvSpPr/>
-            <p:nvPr/>
-          </p:nvSpPr>
-          <p:spPr>
-            <a:xfrm>
-              <a:off x="4284912" y="6881019"/>
-              <a:ext cx="1587672" cy="81838"/>
+            <p:cNvPr id="222" name="tx222"/>
+            <p:cNvSpPr/>
+            <p:nvPr/>
+          </p:nvSpPr>
+          <p:spPr>
+            <a:xfrm>
+              <a:off x="3165885" y="5954732"/>
+              <a:ext cx="1765432" cy="90982"/>
             </a:xfrm>
             <a:prstGeom prst="rect">
               <a:avLst/>
@@ -10715,7 +10801,7 @@
                 </a:spcAft>
               </a:pPr>
               <a:r>
-                <a:rPr sz="900" i="0" b="0">
+                <a:rPr sz="1000" i="0" b="0">
                   <a:solidFill>
                     <a:srgbClr val="0D0D0D">
                       <a:alpha val="100000"/>
@@ -10731,14 +10817,14 @@
         </p:sp>
         <p:sp>
           <p:nvSpPr>
-            <p:cNvPr id="221" name="rc221"/>
-            <p:cNvSpPr/>
-            <p:nvPr/>
-          </p:nvSpPr>
-          <p:spPr>
-            <a:xfrm>
-              <a:off x="8969137" y="4765403"/>
-              <a:ext cx="1216638" cy="606611"/>
+            <p:cNvPr id="223" name="rc223"/>
+            <p:cNvSpPr/>
+            <p:nvPr/>
+          </p:nvSpPr>
+          <p:spPr>
+            <a:xfrm>
+              <a:off x="6813754" y="4015791"/>
+              <a:ext cx="1351655" cy="637203"/>
             </a:xfrm>
             <a:prstGeom prst="rect">
               <a:avLst/>
@@ -10757,14 +10843,14 @@
         </p:sp>
         <p:sp>
           <p:nvSpPr>
-            <p:cNvPr id="222" name="tx222"/>
-            <p:cNvSpPr/>
-            <p:nvPr/>
-          </p:nvSpPr>
-          <p:spPr>
-            <a:xfrm>
-              <a:off x="9026073" y="4833038"/>
-              <a:ext cx="835670" cy="72786"/>
+            <p:cNvPr id="224" name="tx224"/>
+            <p:cNvSpPr/>
+            <p:nvPr/>
+          </p:nvSpPr>
+          <p:spPr>
+            <a:xfrm>
+              <a:off x="6877017" y="4091033"/>
+              <a:ext cx="939820" cy="81838"/>
             </a:xfrm>
             <a:prstGeom prst="rect">
               <a:avLst/>
@@ -10784,7 +10870,7 @@
                 </a:spcAft>
               </a:pPr>
               <a:r>
-                <a:rPr sz="800" i="0" b="1">
+                <a:rPr sz="900" i="0" b="1">
                   <a:solidFill>
                     <a:srgbClr val="000000">
                       <a:alpha val="100000"/>
@@ -10800,13 +10886,13 @@
         </p:sp>
         <p:sp>
           <p:nvSpPr>
-            <p:cNvPr id="223" name="rc223"/>
-            <p:cNvSpPr/>
-            <p:nvPr/>
-          </p:nvSpPr>
-          <p:spPr>
-            <a:xfrm>
-              <a:off x="9026073" y="4973460"/>
+            <p:cNvPr id="225" name="rc225"/>
+            <p:cNvSpPr/>
+            <p:nvPr/>
+          </p:nvSpPr>
+          <p:spPr>
+            <a:xfrm>
+              <a:off x="6877017" y="4248113"/>
               <a:ext cx="113872" cy="113872"/>
             </a:xfrm>
             <a:prstGeom prst="rect">
@@ -10826,13 +10912,13 @@
         </p:sp>
         <p:sp>
           <p:nvSpPr>
-            <p:cNvPr id="224" name="pl224"/>
-            <p:cNvSpPr/>
-            <p:nvPr/>
-          </p:nvSpPr>
-          <p:spPr>
-            <a:xfrm>
-              <a:off x="9037461" y="5030396"/>
+            <p:cNvPr id="226" name="pl226"/>
+            <p:cNvSpPr/>
+            <p:nvPr/>
+          </p:nvSpPr>
+          <p:spPr>
+            <a:xfrm>
+              <a:off x="6888404" y="4305050"/>
               <a:ext cx="91098" cy="0"/>
             </a:xfrm>
             <a:custGeom>
@@ -10866,14 +10952,14 @@
         </p:sp>
         <p:sp>
           <p:nvSpPr>
-            <p:cNvPr id="225" name="pt225"/>
-            <p:cNvSpPr/>
-            <p:nvPr/>
-          </p:nvSpPr>
-          <p:spPr>
-            <a:xfrm>
-              <a:off x="9054937" y="5002323"/>
-              <a:ext cx="56145" cy="56145"/>
+            <p:cNvPr id="227" name="pt227"/>
+            <p:cNvSpPr/>
+            <p:nvPr/>
+          </p:nvSpPr>
+          <p:spPr>
+            <a:xfrm>
+              <a:off x="6905471" y="4276567"/>
+              <a:ext cx="56964" cy="56964"/>
             </a:xfrm>
             <a:prstGeom prst="ellipse">
               <a:avLst/>
@@ -10883,7 +10969,7 @@
                 <a:alpha val="100000"/>
               </a:srgbClr>
             </a:solidFill>
-            <a:ln w="7363" cap="rnd">
+            <a:ln w="8181" cap="rnd">
               <a:solidFill>
                 <a:srgbClr val="0072B2">
                   <a:alpha val="100000"/>
@@ -10901,13 +10987,13 @@
         </p:sp>
         <p:sp>
           <p:nvSpPr>
-            <p:cNvPr id="226" name="rc226"/>
-            <p:cNvSpPr/>
-            <p:nvPr/>
-          </p:nvSpPr>
-          <p:spPr>
-            <a:xfrm>
-              <a:off x="9026073" y="5087332"/>
+            <p:cNvPr id="228" name="rc228"/>
+            <p:cNvSpPr/>
+            <p:nvPr/>
+          </p:nvSpPr>
+          <p:spPr>
+            <a:xfrm>
+              <a:off x="6877017" y="4361986"/>
               <a:ext cx="113872" cy="113872"/>
             </a:xfrm>
             <a:prstGeom prst="rect">
@@ -10927,13 +11013,13 @@
         </p:sp>
         <p:sp>
           <p:nvSpPr>
-            <p:cNvPr id="227" name="pl227"/>
-            <p:cNvSpPr/>
-            <p:nvPr/>
-          </p:nvSpPr>
-          <p:spPr>
-            <a:xfrm>
-              <a:off x="9037461" y="5144269"/>
+            <p:cNvPr id="229" name="pl229"/>
+            <p:cNvSpPr/>
+            <p:nvPr/>
+          </p:nvSpPr>
+          <p:spPr>
+            <a:xfrm>
+              <a:off x="6888404" y="4418922"/>
               <a:ext cx="91098" cy="0"/>
             </a:xfrm>
             <a:custGeom>
@@ -10967,14 +11053,14 @@
         </p:sp>
         <p:sp>
           <p:nvSpPr>
-            <p:cNvPr id="228" name="pt228"/>
-            <p:cNvSpPr/>
-            <p:nvPr/>
-          </p:nvSpPr>
-          <p:spPr>
-            <a:xfrm>
-              <a:off x="9054937" y="5116196"/>
-              <a:ext cx="56145" cy="56145"/>
+            <p:cNvPr id="230" name="pt230"/>
+            <p:cNvSpPr/>
+            <p:nvPr/>
+          </p:nvSpPr>
+          <p:spPr>
+            <a:xfrm>
+              <a:off x="6905471" y="4390440"/>
+              <a:ext cx="56964" cy="56964"/>
             </a:xfrm>
             <a:prstGeom prst="ellipse">
               <a:avLst/>
@@ -10984,7 +11070,7 @@
                 <a:alpha val="100000"/>
               </a:srgbClr>
             </a:solidFill>
-            <a:ln w="7363" cap="rnd">
+            <a:ln w="8181" cap="rnd">
               <a:solidFill>
                 <a:srgbClr val="E69F00">
                   <a:alpha val="100000"/>
@@ -11002,13 +11088,13 @@
         </p:sp>
         <p:sp>
           <p:nvSpPr>
-            <p:cNvPr id="229" name="rc229"/>
-            <p:cNvSpPr/>
-            <p:nvPr/>
-          </p:nvSpPr>
-          <p:spPr>
-            <a:xfrm>
-              <a:off x="9026073" y="5201205"/>
+            <p:cNvPr id="231" name="rc231"/>
+            <p:cNvSpPr/>
+            <p:nvPr/>
+          </p:nvSpPr>
+          <p:spPr>
+            <a:xfrm>
+              <a:off x="6877017" y="4475859"/>
               <a:ext cx="113872" cy="113872"/>
             </a:xfrm>
             <a:prstGeom prst="rect">
@@ -11028,13 +11114,13 @@
         </p:sp>
         <p:sp>
           <p:nvSpPr>
-            <p:cNvPr id="230" name="pl230"/>
-            <p:cNvSpPr/>
-            <p:nvPr/>
-          </p:nvSpPr>
-          <p:spPr>
-            <a:xfrm>
-              <a:off x="9037461" y="5258142"/>
+            <p:cNvPr id="232" name="pl232"/>
+            <p:cNvSpPr/>
+            <p:nvPr/>
+          </p:nvSpPr>
+          <p:spPr>
+            <a:xfrm>
+              <a:off x="6888404" y="4532795"/>
               <a:ext cx="91098" cy="0"/>
             </a:xfrm>
             <a:custGeom>
@@ -11068,14 +11154,14 @@
         </p:sp>
         <p:sp>
           <p:nvSpPr>
-            <p:cNvPr id="231" name="pt231"/>
-            <p:cNvSpPr/>
-            <p:nvPr/>
-          </p:nvSpPr>
-          <p:spPr>
-            <a:xfrm>
-              <a:off x="9054937" y="5230069"/>
-              <a:ext cx="56145" cy="56145"/>
+            <p:cNvPr id="233" name="pt233"/>
+            <p:cNvSpPr/>
+            <p:nvPr/>
+          </p:nvSpPr>
+          <p:spPr>
+            <a:xfrm>
+              <a:off x="6905471" y="4504313"/>
+              <a:ext cx="56964" cy="56964"/>
             </a:xfrm>
             <a:prstGeom prst="ellipse">
               <a:avLst/>
@@ -11085,7 +11171,7 @@
                 <a:alpha val="100000"/>
               </a:srgbClr>
             </a:solidFill>
-            <a:ln w="7363" cap="rnd">
+            <a:ln w="8181" cap="rnd">
               <a:solidFill>
                 <a:srgbClr val="999999">
                   <a:alpha val="100000"/>
@@ -11103,14 +11189,14 @@
         </p:sp>
         <p:sp>
           <p:nvSpPr>
-            <p:cNvPr id="232" name="tx232"/>
-            <p:cNvSpPr/>
-            <p:nvPr/>
-          </p:nvSpPr>
-          <p:spPr>
-            <a:xfrm>
-              <a:off x="9196883" y="4994003"/>
-              <a:ext cx="931956" cy="72786"/>
+            <p:cNvPr id="234" name="tx234"/>
+            <p:cNvSpPr/>
+            <p:nvPr/>
+          </p:nvSpPr>
+          <p:spPr>
+            <a:xfrm>
+              <a:off x="7054152" y="4264130"/>
+              <a:ext cx="1047993" cy="81838"/>
             </a:xfrm>
             <a:prstGeom prst="rect">
               <a:avLst/>
@@ -11130,7 +11216,7 @@
                 </a:spcAft>
               </a:pPr>
               <a:r>
-                <a:rPr sz="800" i="0" b="0">
+                <a:rPr sz="900" i="0" b="0">
                   <a:solidFill>
                     <a:srgbClr val="000000">
                       <a:alpha val="100000"/>
@@ -11146,14 +11232,14 @@
         </p:sp>
         <p:sp>
           <p:nvSpPr>
-            <p:cNvPr id="233" name="tx233"/>
-            <p:cNvSpPr/>
-            <p:nvPr/>
-          </p:nvSpPr>
-          <p:spPr>
-            <a:xfrm>
-              <a:off x="9196883" y="5107876"/>
-              <a:ext cx="892637" cy="72786"/>
+            <p:cNvPr id="235" name="tx235"/>
+            <p:cNvSpPr/>
+            <p:nvPr/>
+          </p:nvSpPr>
+          <p:spPr>
+            <a:xfrm>
+              <a:off x="7054152" y="4378003"/>
+              <a:ext cx="1003828" cy="81838"/>
             </a:xfrm>
             <a:prstGeom prst="rect">
               <a:avLst/>
@@ -11173,7 +11259,7 @@
                 </a:spcAft>
               </a:pPr>
               <a:r>
-                <a:rPr sz="800" i="0" b="0">
+                <a:rPr sz="900" i="0" b="0">
                   <a:solidFill>
                     <a:srgbClr val="000000">
                       <a:alpha val="100000"/>
@@ -11189,14 +11275,14 @@
         </p:sp>
         <p:sp>
           <p:nvSpPr>
-            <p:cNvPr id="234" name="tx234"/>
-            <p:cNvSpPr/>
-            <p:nvPr/>
-          </p:nvSpPr>
-          <p:spPr>
-            <a:xfrm>
-              <a:off x="9196883" y="5221749"/>
-              <a:ext cx="643829" cy="72786"/>
+            <p:cNvPr id="236" name="tx236"/>
+            <p:cNvSpPr/>
+            <p:nvPr/>
+          </p:nvSpPr>
+          <p:spPr>
+            <a:xfrm>
+              <a:off x="7054152" y="4491876"/>
+              <a:ext cx="723930" cy="81838"/>
             </a:xfrm>
             <a:prstGeom prst="rect">
               <a:avLst/>
@@ -11216,7 +11302,7 @@
                 </a:spcAft>
               </a:pPr>
               <a:r>
-                <a:rPr sz="800" i="0" b="0">
+                <a:rPr sz="900" i="0" b="0">
                   <a:solidFill>
                     <a:srgbClr val="000000">
                       <a:alpha val="100000"/>
@@ -11232,14 +11318,14 @@
         </p:sp>
         <p:sp>
           <p:nvSpPr>
-            <p:cNvPr id="235" name="rc235"/>
-            <p:cNvSpPr/>
-            <p:nvPr/>
-          </p:nvSpPr>
-          <p:spPr>
-            <a:xfrm>
-              <a:off x="8969137" y="5485888"/>
-              <a:ext cx="1284213" cy="341618"/>
+            <p:cNvPr id="237" name="rc237"/>
+            <p:cNvSpPr/>
+            <p:nvPr/>
+          </p:nvSpPr>
+          <p:spPr>
+            <a:xfrm>
+              <a:off x="6813754" y="4779520"/>
+              <a:ext cx="1427916" cy="523330"/>
             </a:xfrm>
             <a:prstGeom prst="rect">
               <a:avLst/>
@@ -11258,13 +11344,56 @@
         </p:sp>
         <p:sp>
           <p:nvSpPr>
-            <p:cNvPr id="236" name="rc236"/>
-            <p:cNvSpPr/>
-            <p:nvPr/>
-          </p:nvSpPr>
-          <p:spPr>
-            <a:xfrm>
-              <a:off x="9026073" y="5542824"/>
+            <p:cNvPr id="238" name="tx238"/>
+            <p:cNvSpPr/>
+            <p:nvPr/>
+          </p:nvSpPr>
+          <p:spPr>
+            <a:xfrm>
+              <a:off x="6877017" y="4854762"/>
+              <a:ext cx="590519" cy="81838"/>
+            </a:xfrm>
+            <a:prstGeom prst="rect">
+              <a:avLst/>
+            </a:prstGeom>
+            <a:noFill/>
+          </p:spPr>
+          <p:txBody>
+            <a:bodyPr lIns="0" rIns="0" tIns="0" bIns="0" anchorCtr="1" anchor="ctr" wrap="none"/>
+            <a:lstStyle/>
+            <a:p>
+              <a:pPr algn="l" marL="0" marR="0" indent="0">
+                <a:spcBef>
+                  <a:spcPts val="0"/>
+                </a:spcBef>
+                <a:spcAft>
+                  <a:spcPts val="0"/>
+                </a:spcAft>
+              </a:pPr>
+              <a:r>
+                <a:rPr sz="900" i="0" b="1">
+                  <a:solidFill>
+                    <a:srgbClr val="000000">
+                      <a:alpha val="100000"/>
+                    </a:srgbClr>
+                  </a:solidFill>
+                  <a:latin typeface="Arial"/>
+                  <a:cs typeface="Arial"/>
+                </a:rPr>
+                <a:t>Coefficient</a:t>
+              </a:r>
+            </a:p>
+          </p:txBody>
+        </p:sp>
+        <p:sp>
+          <p:nvSpPr>
+            <p:cNvPr id="239" name="rc239"/>
+            <p:cNvSpPr/>
+            <p:nvPr/>
+          </p:nvSpPr>
+          <p:spPr>
+            <a:xfrm>
+              <a:off x="6877017" y="5011842"/>
               <a:ext cx="113872" cy="113872"/>
             </a:xfrm>
             <a:prstGeom prst="rect">
@@ -11284,14 +11413,14 @@
         </p:sp>
         <p:sp>
           <p:nvSpPr>
-            <p:cNvPr id="237" name="pt237"/>
-            <p:cNvSpPr/>
-            <p:nvPr/>
-          </p:nvSpPr>
-          <p:spPr>
-            <a:xfrm>
-              <a:off x="9054937" y="5571688"/>
-              <a:ext cx="56145" cy="56145"/>
+            <p:cNvPr id="240" name="pt240"/>
+            <p:cNvSpPr/>
+            <p:nvPr/>
+          </p:nvSpPr>
+          <p:spPr>
+            <a:xfrm>
+              <a:off x="6905471" y="5040296"/>
+              <a:ext cx="56964" cy="56964"/>
             </a:xfrm>
             <a:prstGeom prst="ellipse">
               <a:avLst/>
@@ -11310,13 +11439,13 @@
         </p:sp>
         <p:sp>
           <p:nvSpPr>
-            <p:cNvPr id="238" name="rc238"/>
-            <p:cNvSpPr/>
-            <p:nvPr/>
-          </p:nvSpPr>
-          <p:spPr>
-            <a:xfrm>
-              <a:off x="9026073" y="5656697"/>
+            <p:cNvPr id="241" name="rc241"/>
+            <p:cNvSpPr/>
+            <p:nvPr/>
+          </p:nvSpPr>
+          <p:spPr>
+            <a:xfrm>
+              <a:off x="6877017" y="5125715"/>
               <a:ext cx="113872" cy="113872"/>
             </a:xfrm>
             <a:prstGeom prst="rect">
@@ -11336,27 +11465,27 @@
         </p:sp>
         <p:sp>
           <p:nvSpPr>
-            <p:cNvPr id="239" name="pg239"/>
-            <p:cNvSpPr/>
-            <p:nvPr/>
-          </p:nvSpPr>
-          <p:spPr>
-            <a:xfrm>
-              <a:off x="9045202" y="5669977"/>
-              <a:ext cx="75615" cy="65485"/>
+            <p:cNvPr id="242" name="pg242"/>
+            <p:cNvSpPr/>
+            <p:nvPr/>
+          </p:nvSpPr>
+          <p:spPr>
+            <a:xfrm>
+              <a:off x="6895594" y="5138358"/>
+              <a:ext cx="76717" cy="66439"/>
             </a:xfrm>
             <a:custGeom>
               <a:avLst/>
               <a:pathLst>
-                <a:path w="75615" h="65485">
+                <a:path w="76717" h="66439">
                   <a:moveTo>
-                    <a:pt x="37807" y="0"/>
+                    <a:pt x="38358" y="0"/>
                   </a:moveTo>
                   <a:lnTo>
-                    <a:pt x="75615" y="65485"/>
+                    <a:pt x="76717" y="66439"/>
                   </a:lnTo>
                   <a:lnTo>
-                    <a:pt x="0" y="65485"/>
+                    <a:pt x="0" y="66439"/>
                   </a:lnTo>
                   <a:close/>
                 </a:path>
@@ -11376,14 +11505,14 @@
         </p:sp>
         <p:sp>
           <p:nvSpPr>
-            <p:cNvPr id="240" name="tx240"/>
-            <p:cNvSpPr/>
-            <p:nvPr/>
-          </p:nvSpPr>
-          <p:spPr>
-            <a:xfrm>
-              <a:off x="9196883" y="5563368"/>
-              <a:ext cx="999530" cy="72786"/>
+            <p:cNvPr id="243" name="tx243"/>
+            <p:cNvSpPr/>
+            <p:nvPr/>
+          </p:nvSpPr>
+          <p:spPr>
+            <a:xfrm>
+              <a:off x="7054152" y="5027859"/>
+              <a:ext cx="1124254" cy="81838"/>
             </a:xfrm>
             <a:prstGeom prst="rect">
               <a:avLst/>
@@ -11403,7 +11532,7 @@
                 </a:spcAft>
               </a:pPr>
               <a:r>
-                <a:rPr sz="800" i="0" b="0">
+                <a:rPr sz="900" i="0" b="0">
                   <a:solidFill>
                     <a:srgbClr val="000000">
                       <a:alpha val="100000"/>
@@ -11419,14 +11548,14 @@
         </p:sp>
         <p:sp>
           <p:nvSpPr>
-            <p:cNvPr id="241" name="tx241"/>
-            <p:cNvSpPr/>
-            <p:nvPr/>
-          </p:nvSpPr>
-          <p:spPr>
-            <a:xfrm>
-              <a:off x="9196883" y="5677241"/>
-              <a:ext cx="574334" cy="72786"/>
+            <p:cNvPr id="244" name="tx244"/>
+            <p:cNvSpPr/>
+            <p:nvPr/>
+          </p:nvSpPr>
+          <p:spPr>
+            <a:xfrm>
+              <a:off x="7054152" y="5141732"/>
+              <a:ext cx="645657" cy="81838"/>
             </a:xfrm>
             <a:prstGeom prst="rect">
               <a:avLst/>
@@ -11446,7 +11575,7 @@
                 </a:spcAft>
               </a:pPr>
               <a:r>
-                <a:rPr sz="800" i="0" b="0">
+                <a:rPr sz="900" i="0" b="0">
                   <a:solidFill>
                     <a:srgbClr val="000000">
                       <a:alpha val="100000"/>
@@ -11462,14 +11591,14 @@
         </p:sp>
         <p:sp>
           <p:nvSpPr>
-            <p:cNvPr id="242" name="tx242"/>
-            <p:cNvSpPr/>
-            <p:nvPr/>
-          </p:nvSpPr>
-          <p:spPr>
-            <a:xfrm>
-              <a:off x="1302233" y="3722870"/>
-              <a:ext cx="3469325" cy="74432"/>
+            <p:cNvPr id="245" name="tx245"/>
+            <p:cNvSpPr/>
+            <p:nvPr/>
+          </p:nvSpPr>
+          <p:spPr>
+            <a:xfrm>
+              <a:off x="1409973" y="3375225"/>
+              <a:ext cx="6012362" cy="83576"/>
             </a:xfrm>
             <a:prstGeom prst="rect">
               <a:avLst/>
@@ -11489,7 +11618,7 @@
                 </a:spcAft>
               </a:pPr>
               <a:r>
-                <a:rPr sz="819" i="0" b="0">
+                <a:rPr sz="919" i="0" b="0">
                   <a:solidFill>
                     <a:srgbClr val="4D4D4D">
                       <a:alpha val="100000"/>
@@ -11498,20 +11627,20 @@
                   <a:latin typeface="Arial"/>
                   <a:cs typeface="Arial"/>
                 </a:rPr>
-                <a:t>AIC is not comparable across rules (different sample sizes); coefficients are</a:t>
+                <a:t>AIC is not comparable across rules because the sample size changes; the coefficients are what should be compared</a:t>
               </a:r>
             </a:p>
           </p:txBody>
         </p:sp>
         <p:sp>
           <p:nvSpPr>
-            <p:cNvPr id="243" name="tx243"/>
-            <p:cNvSpPr/>
-            <p:nvPr/>
-          </p:nvSpPr>
-          <p:spPr>
-            <a:xfrm>
-              <a:off x="1302233" y="3548250"/>
+            <p:cNvPr id="246" name="tx246"/>
+            <p:cNvSpPr/>
+            <p:nvPr/>
+          </p:nvSpPr>
+          <p:spPr>
+            <a:xfrm>
+              <a:off x="1409973" y="3194279"/>
               <a:ext cx="3500688" cy="90982"/>
             </a:xfrm>
             <a:prstGeom prst="rect">
@@ -11548,14 +11677,14 @@
         </p:sp>
         <p:sp>
           <p:nvSpPr>
-            <p:cNvPr id="244" name="tx244"/>
-            <p:cNvSpPr/>
-            <p:nvPr/>
-          </p:nvSpPr>
-          <p:spPr>
-            <a:xfrm>
-              <a:off x="360805" y="3545239"/>
-              <a:ext cx="84764" cy="109179"/>
+            <p:cNvPr id="247" name="tx247"/>
+            <p:cNvSpPr/>
+            <p:nvPr/>
+          </p:nvSpPr>
+          <p:spPr>
+            <a:xfrm>
+              <a:off x="347226" y="3178335"/>
+              <a:ext cx="91805" cy="118231"/>
             </a:xfrm>
             <a:prstGeom prst="rect">
               <a:avLst/>
@@ -11575,7 +11704,7 @@
                 </a:spcAft>
               </a:pPr>
               <a:r>
-                <a:rPr sz="1200" i="0" b="1">
+                <a:rPr sz="1300" i="0" b="1">
                   <a:solidFill>
                     <a:srgbClr val="000000">
                       <a:alpha val="100000"/>

--- a/figures/Fig3_specification_robustness_v2.pptx
+++ b/figures/Fig3_specification_robustness_v2.pptx
@@ -2514,7 +2514,7 @@
               <a:avLst/>
             </a:prstGeom>
             <a:solidFill>
-              <a:srgbClr val="E8864A">
+              <a:srgbClr val="E9884D">
                 <a:alpha val="100000"/>
               </a:srgbClr>
             </a:solidFill>
@@ -2549,7 +2549,7 @@
               <a:avLst/>
             </a:prstGeom>
             <a:solidFill>
-              <a:srgbClr val="E9874C">
+              <a:srgbClr val="E9894F">
                 <a:alpha val="100000"/>
               </a:srgbClr>
             </a:solidFill>
@@ -2577,14 +2577,14 @@
           </p:nvSpPr>
           <p:spPr>
             <a:xfrm>
-              <a:off x="1859076" y="1774484"/>
+              <a:off x="1859076" y="2235212"/>
               <a:ext cx="408275" cy="460728"/>
             </a:xfrm>
             <a:prstGeom prst="rect">
               <a:avLst/>
             </a:prstGeom>
             <a:solidFill>
-              <a:srgbClr val="F09B69">
+              <a:srgbClr val="F4A679">
                 <a:alpha val="100000"/>
               </a:srgbClr>
             </a:solidFill>
@@ -2612,14 +2612,14 @@
           </p:nvSpPr>
           <p:spPr>
             <a:xfrm>
-              <a:off x="1859076" y="2235212"/>
+              <a:off x="1859076" y="1774484"/>
               <a:ext cx="408275" cy="460728"/>
             </a:xfrm>
             <a:prstGeom prst="rect">
               <a:avLst/>
             </a:prstGeom>
             <a:solidFill>
-              <a:srgbClr val="F5A87C">
+              <a:srgbClr val="F09C6A">
                 <a:alpha val="100000"/>
               </a:srgbClr>
             </a:solidFill>
@@ -2654,7 +2654,7 @@
               <a:avLst/>
             </a:prstGeom>
             <a:solidFill>
-              <a:srgbClr val="FABB98">
+              <a:srgbClr val="F9BA96">
                 <a:alpha val="100000"/>
               </a:srgbClr>
             </a:solidFill>
@@ -2689,7 +2689,7 @@
               <a:avLst/>
             </a:prstGeom>
             <a:solidFill>
-              <a:srgbClr val="FBBF9E">
+              <a:srgbClr val="FBC09F">
                 <a:alpha val="100000"/>
               </a:srgbClr>
             </a:solidFill>
@@ -2724,7 +2724,7 @@
               <a:avLst/>
             </a:prstGeom>
             <a:solidFill>
-              <a:srgbClr val="FFDFCF">
+              <a:srgbClr val="FFDFCD">
                 <a:alpha val="100000"/>
               </a:srgbClr>
             </a:solidFill>
@@ -2759,7 +2759,7 @@
               <a:avLst/>
             </a:prstGeom>
             <a:solidFill>
-              <a:srgbClr val="FAFCFE">
+              <a:srgbClr val="FBFDFE">
                 <a:alpha val="100000"/>
               </a:srgbClr>
             </a:solidFill>
@@ -2794,7 +2794,7 @@
               <a:avLst/>
             </a:prstGeom>
             <a:solidFill>
-              <a:srgbClr val="FFF1E9">
+              <a:srgbClr val="FFF0E9">
                 <a:alpha val="100000"/>
               </a:srgbClr>
             </a:solidFill>
@@ -2829,7 +2829,7 @@
               <a:avLst/>
             </a:prstGeom>
             <a:solidFill>
-              <a:srgbClr val="FFF4EF">
+              <a:srgbClr val="FFF5EF">
                 <a:alpha val="100000"/>
               </a:srgbClr>
             </a:solidFill>
@@ -2864,7 +2864,7 @@
               <a:avLst/>
             </a:prstGeom>
             <a:solidFill>
-              <a:srgbClr val="EFF6FD">
+              <a:srgbClr val="F0F7FD">
                 <a:alpha val="100000"/>
               </a:srgbClr>
             </a:solidFill>
@@ -2899,7 +2899,7 @@
               <a:avLst/>
             </a:prstGeom>
             <a:solidFill>
-              <a:srgbClr val="FFFDFD">
+              <a:srgbClr val="FFFCFA">
                 <a:alpha val="100000"/>
               </a:srgbClr>
             </a:solidFill>
@@ -2934,7 +2934,7 @@
               <a:avLst/>
             </a:prstGeom>
             <a:solidFill>
-              <a:srgbClr val="FFF3ED">
+              <a:srgbClr val="FFF2EB">
                 <a:alpha val="100000"/>
               </a:srgbClr>
             </a:solidFill>
@@ -2969,7 +2969,7 @@
               <a:avLst/>
             </a:prstGeom>
             <a:solidFill>
-              <a:srgbClr val="FAFCFE">
+              <a:srgbClr val="F9FCFE">
                 <a:alpha val="100000"/>
               </a:srgbClr>
             </a:solidFill>
@@ -3156,7 +3156,7 @@
                   <a:latin typeface="Arial"/>
                   <a:cs typeface="Arial"/>
                 </a:rPr>
-                <a:t>1.30***</a:t>
+                <a:t>1.29***</a:t>
               </a:r>
             </a:p>
           </p:txBody>
@@ -3164,6 +3164,49 @@
         <p:sp>
           <p:nvSpPr>
             <p:cNvPr id="29" name="tx29"/>
+            <p:cNvSpPr/>
+            <p:nvPr/>
+          </p:nvSpPr>
+          <p:spPr>
+            <a:xfrm>
+              <a:off x="1903285" y="2428772"/>
+              <a:ext cx="319857" cy="73609"/>
+            </a:xfrm>
+            <a:prstGeom prst="rect">
+              <a:avLst/>
+            </a:prstGeom>
+            <a:noFill/>
+          </p:spPr>
+          <p:txBody>
+            <a:bodyPr lIns="0" rIns="0" tIns="0" bIns="0" anchorCtr="1" anchor="ctr" wrap="none"/>
+            <a:lstStyle/>
+            <a:p>
+              <a:pPr algn="l" marL="0" marR="0" indent="0">
+                <a:spcBef>
+                  <a:spcPts val="0"/>
+                </a:spcBef>
+                <a:spcAft>
+                  <a:spcPts val="0"/>
+                </a:spcAft>
+              </a:pPr>
+              <a:r>
+                <a:rPr sz="810" i="0" b="0">
+                  <a:solidFill>
+                    <a:srgbClr val="1A1A1A">
+                      <a:alpha val="100000"/>
+                    </a:srgbClr>
+                  </a:solidFill>
+                  <a:latin typeface="Arial"/>
+                  <a:cs typeface="Arial"/>
+                </a:rPr>
+                <a:t>1.22***</a:t>
+              </a:r>
+            </a:p>
+          </p:txBody>
+        </p:sp>
+        <p:sp>
+          <p:nvSpPr>
+            <p:cNvPr id="30" name="tx30"/>
             <p:cNvSpPr/>
             <p:nvPr/>
           </p:nvSpPr>
@@ -3206,49 +3249,6 @@
         </p:sp>
         <p:sp>
           <p:nvSpPr>
-            <p:cNvPr id="30" name="tx30"/>
-            <p:cNvSpPr/>
-            <p:nvPr/>
-          </p:nvSpPr>
-          <p:spPr>
-            <a:xfrm>
-              <a:off x="1903285" y="2428772"/>
-              <a:ext cx="319857" cy="73609"/>
-            </a:xfrm>
-            <a:prstGeom prst="rect">
-              <a:avLst/>
-            </a:prstGeom>
-            <a:noFill/>
-          </p:spPr>
-          <p:txBody>
-            <a:bodyPr lIns="0" rIns="0" tIns="0" bIns="0" anchorCtr="1" anchor="ctr" wrap="none"/>
-            <a:lstStyle/>
-            <a:p>
-              <a:pPr algn="l" marL="0" marR="0" indent="0">
-                <a:spcBef>
-                  <a:spcPts val="0"/>
-                </a:spcBef>
-                <a:spcAft>
-                  <a:spcPts val="0"/>
-                </a:spcAft>
-              </a:pPr>
-              <a:r>
-                <a:rPr sz="810" i="0" b="0">
-                  <a:solidFill>
-                    <a:srgbClr val="1A1A1A">
-                      <a:alpha val="100000"/>
-                    </a:srgbClr>
-                  </a:solidFill>
-                  <a:latin typeface="Arial"/>
-                  <a:cs typeface="Arial"/>
-                </a:rPr>
-                <a:t>1.21***</a:t>
-              </a:r>
-            </a:p>
-          </p:txBody>
-        </p:sp>
-        <p:sp>
-          <p:nvSpPr>
             <p:cNvPr id="31" name="tx31"/>
             <p:cNvSpPr/>
             <p:nvPr/>
@@ -3457,7 +3457,7 @@
                   <a:latin typeface="Arial"/>
                   <a:cs typeface="Arial"/>
                 </a:rPr>
-                <a:t>1.03</a:t>
+                <a:t>1.04</a:t>
               </a:r>
             </a:p>
           </p:txBody>
@@ -3586,7 +3586,7 @@
                   <a:latin typeface="Arial"/>
                   <a:cs typeface="Arial"/>
                 </a:rPr>
-                <a:t>1.00</a:t>
+                <a:t>1.01</a:t>
               </a:r>
             </a:p>
           </p:txBody>
@@ -4563,7 +4563,7 @@
           </p:nvSpPr>
           <p:spPr>
             <a:xfrm>
-              <a:off x="3405616" y="2086372"/>
+              <a:off x="3405616" y="2090071"/>
               <a:ext cx="22774" cy="0"/>
             </a:xfrm>
             <a:custGeom>
@@ -4603,7 +4603,7 @@
           </p:nvSpPr>
           <p:spPr>
             <a:xfrm>
-              <a:off x="3405616" y="1957450"/>
+              <a:off x="3405616" y="1961375"/>
               <a:ext cx="22774" cy="0"/>
             </a:xfrm>
             <a:custGeom>
@@ -4643,7 +4643,7 @@
           </p:nvSpPr>
           <p:spPr>
             <a:xfrm>
-              <a:off x="3405616" y="1828527"/>
+              <a:off x="3405616" y="1832680"/>
               <a:ext cx="22774" cy="0"/>
             </a:xfrm>
             <a:custGeom>
@@ -4683,7 +4683,7 @@
           </p:nvSpPr>
           <p:spPr>
             <a:xfrm>
-              <a:off x="3405616" y="1699604"/>
+              <a:off x="3405616" y="1703984"/>
               <a:ext cx="22774" cy="0"/>
             </a:xfrm>
             <a:custGeom>
@@ -4723,7 +4723,47 @@
           </p:nvSpPr>
           <p:spPr>
             <a:xfrm>
-              <a:off x="3314518" y="2086372"/>
+              <a:off x="3405616" y="1575288"/>
+              <a:ext cx="22774" cy="0"/>
+            </a:xfrm>
+            <a:custGeom>
+              <a:avLst/>
+              <a:pathLst>
+                <a:path w="22774" h="0">
+                  <a:moveTo>
+                    <a:pt x="0" y="0"/>
+                  </a:moveTo>
+                  <a:lnTo>
+                    <a:pt x="22774" y="0"/>
+                  </a:lnTo>
+                </a:path>
+              </a:pathLst>
+            </a:custGeom>
+            <a:ln w="4762" cap="flat">
+              <a:solidFill>
+                <a:srgbClr val="FFFFFF">
+                  <a:alpha val="100000"/>
+                </a:srgbClr>
+              </a:solidFill>
+              <a:prstDash val="solid"/>
+              <a:round/>
+            </a:ln>
+          </p:spPr>
+          <p:txBody>
+            <a:bodyPr/>
+            <a:lstStyle/>
+            <a:p/>
+          </p:txBody>
+        </p:sp>
+        <p:sp>
+          <p:nvSpPr>
+            <p:cNvPr id="68" name="pl68"/>
+            <p:cNvSpPr/>
+            <p:nvPr/>
+          </p:nvSpPr>
+          <p:spPr>
+            <a:xfrm>
+              <a:off x="3314518" y="2090071"/>
               <a:ext cx="22774" cy="0"/>
             </a:xfrm>
             <a:custGeom>
@@ -4757,13 +4797,13 @@
         </p:sp>
         <p:sp>
           <p:nvSpPr>
-            <p:cNvPr id="68" name="pl68"/>
-            <p:cNvSpPr/>
-            <p:nvPr/>
-          </p:nvSpPr>
-          <p:spPr>
-            <a:xfrm>
-              <a:off x="3314518" y="1957450"/>
+            <p:cNvPr id="69" name="pl69"/>
+            <p:cNvSpPr/>
+            <p:nvPr/>
+          </p:nvSpPr>
+          <p:spPr>
+            <a:xfrm>
+              <a:off x="3314518" y="1961375"/>
               <a:ext cx="22774" cy="0"/>
             </a:xfrm>
             <a:custGeom>
@@ -4797,13 +4837,13 @@
         </p:sp>
         <p:sp>
           <p:nvSpPr>
-            <p:cNvPr id="69" name="pl69"/>
-            <p:cNvSpPr/>
-            <p:nvPr/>
-          </p:nvSpPr>
-          <p:spPr>
-            <a:xfrm>
-              <a:off x="3314518" y="1828527"/>
+            <p:cNvPr id="70" name="pl70"/>
+            <p:cNvSpPr/>
+            <p:nvPr/>
+          </p:nvSpPr>
+          <p:spPr>
+            <a:xfrm>
+              <a:off x="3314518" y="1832680"/>
               <a:ext cx="22774" cy="0"/>
             </a:xfrm>
             <a:custGeom>
@@ -4837,13 +4877,13 @@
         </p:sp>
         <p:sp>
           <p:nvSpPr>
-            <p:cNvPr id="70" name="pl70"/>
-            <p:cNvSpPr/>
-            <p:nvPr/>
-          </p:nvSpPr>
-          <p:spPr>
-            <a:xfrm>
-              <a:off x="3314518" y="1699604"/>
+            <p:cNvPr id="71" name="pl71"/>
+            <p:cNvSpPr/>
+            <p:nvPr/>
+          </p:nvSpPr>
+          <p:spPr>
+            <a:xfrm>
+              <a:off x="3314518" y="1703984"/>
               <a:ext cx="22774" cy="0"/>
             </a:xfrm>
             <a:custGeom>
@@ -4877,13 +4917,53 @@
         </p:sp>
         <p:sp>
           <p:nvSpPr>
-            <p:cNvPr id="71" name="tx71"/>
-            <p:cNvSpPr/>
-            <p:nvPr/>
-          </p:nvSpPr>
-          <p:spPr>
-            <a:xfrm>
-              <a:off x="3491653" y="2045453"/>
+            <p:cNvPr id="72" name="pl72"/>
+            <p:cNvSpPr/>
+            <p:nvPr/>
+          </p:nvSpPr>
+          <p:spPr>
+            <a:xfrm>
+              <a:off x="3314518" y="1575288"/>
+              <a:ext cx="22774" cy="0"/>
+            </a:xfrm>
+            <a:custGeom>
+              <a:avLst/>
+              <a:pathLst>
+                <a:path w="22774" h="0">
+                  <a:moveTo>
+                    <a:pt x="22774" y="0"/>
+                  </a:moveTo>
+                  <a:lnTo>
+                    <a:pt x="0" y="0"/>
+                  </a:lnTo>
+                </a:path>
+              </a:pathLst>
+            </a:custGeom>
+            <a:ln w="4762" cap="flat">
+              <a:solidFill>
+                <a:srgbClr val="FFFFFF">
+                  <a:alpha val="100000"/>
+                </a:srgbClr>
+              </a:solidFill>
+              <a:prstDash val="solid"/>
+              <a:round/>
+            </a:ln>
+          </p:spPr>
+          <p:txBody>
+            <a:bodyPr/>
+            <a:lstStyle/>
+            <a:p/>
+          </p:txBody>
+        </p:sp>
+        <p:sp>
+          <p:nvSpPr>
+            <p:cNvPr id="73" name="tx73"/>
+            <p:cNvSpPr/>
+            <p:nvPr/>
+          </p:nvSpPr>
+          <p:spPr>
+            <a:xfrm>
+              <a:off x="3491653" y="2049152"/>
               <a:ext cx="158831" cy="81838"/>
             </a:xfrm>
             <a:prstGeom prst="rect">
@@ -4920,13 +5000,13 @@
         </p:sp>
         <p:sp>
           <p:nvSpPr>
-            <p:cNvPr id="72" name="tx72"/>
-            <p:cNvSpPr/>
-            <p:nvPr/>
-          </p:nvSpPr>
-          <p:spPr>
-            <a:xfrm>
-              <a:off x="3491653" y="1916530"/>
+            <p:cNvPr id="74" name="tx74"/>
+            <p:cNvSpPr/>
+            <p:nvPr/>
+          </p:nvSpPr>
+          <p:spPr>
+            <a:xfrm>
+              <a:off x="3491653" y="1920456"/>
               <a:ext cx="158831" cy="81838"/>
             </a:xfrm>
             <a:prstGeom prst="rect">
@@ -4963,13 +5043,13 @@
         </p:sp>
         <p:sp>
           <p:nvSpPr>
-            <p:cNvPr id="73" name="tx73"/>
-            <p:cNvSpPr/>
-            <p:nvPr/>
-          </p:nvSpPr>
-          <p:spPr>
-            <a:xfrm>
-              <a:off x="3491653" y="1787607"/>
+            <p:cNvPr id="75" name="tx75"/>
+            <p:cNvSpPr/>
+            <p:nvPr/>
+          </p:nvSpPr>
+          <p:spPr>
+            <a:xfrm>
+              <a:off x="3491653" y="1791760"/>
               <a:ext cx="158831" cy="81838"/>
             </a:xfrm>
             <a:prstGeom prst="rect">
@@ -5006,13 +5086,13 @@
         </p:sp>
         <p:sp>
           <p:nvSpPr>
-            <p:cNvPr id="74" name="tx74"/>
-            <p:cNvSpPr/>
-            <p:nvPr/>
-          </p:nvSpPr>
-          <p:spPr>
-            <a:xfrm>
-              <a:off x="3491653" y="1658684"/>
+            <p:cNvPr id="76" name="tx76"/>
+            <p:cNvSpPr/>
+            <p:nvPr/>
+          </p:nvSpPr>
+          <p:spPr>
+            <a:xfrm>
+              <a:off x="3491653" y="1663065"/>
               <a:ext cx="158831" cy="81838"/>
             </a:xfrm>
             <a:prstGeom prst="rect">
@@ -5049,7 +5129,50 @@
         </p:sp>
         <p:sp>
           <p:nvSpPr>
-            <p:cNvPr id="75" name="tx75"/>
+            <p:cNvPr id="77" name="tx77"/>
+            <p:cNvSpPr/>
+            <p:nvPr/>
+          </p:nvSpPr>
+          <p:spPr>
+            <a:xfrm>
+              <a:off x="3491653" y="1534369"/>
+              <a:ext cx="158831" cy="81838"/>
+            </a:xfrm>
+            <a:prstGeom prst="rect">
+              <a:avLst/>
+            </a:prstGeom>
+            <a:noFill/>
+          </p:spPr>
+          <p:txBody>
+            <a:bodyPr lIns="0" rIns="0" tIns="0" bIns="0" anchorCtr="1" anchor="ctr" wrap="none"/>
+            <a:lstStyle/>
+            <a:p>
+              <a:pPr algn="l" marL="0" marR="0" indent="0">
+                <a:spcBef>
+                  <a:spcPts val="0"/>
+                </a:spcBef>
+                <a:spcAft>
+                  <a:spcPts val="0"/>
+                </a:spcAft>
+              </a:pPr>
+              <a:r>
+                <a:rPr sz="900" i="0" b="0">
+                  <a:solidFill>
+                    <a:srgbClr val="000000">
+                      <a:alpha val="100000"/>
+                    </a:srgbClr>
+                  </a:solidFill>
+                  <a:latin typeface="Arial"/>
+                  <a:cs typeface="Arial"/>
+                </a:rPr>
+                <a:t>1.4</a:t>
+              </a:r>
+            </a:p>
+          </p:txBody>
+        </p:sp>
+        <p:sp>
+          <p:nvSpPr>
+            <p:cNvPr id="78" name="tx78"/>
             <p:cNvSpPr/>
             <p:nvPr/>
           </p:nvSpPr>
@@ -5092,7 +5215,7 @@
         </p:sp>
         <p:sp>
           <p:nvSpPr>
-            <p:cNvPr id="76" name="tx76"/>
+            <p:cNvPr id="79" name="tx79"/>
             <p:cNvSpPr/>
             <p:nvPr/>
           </p:nvSpPr>
@@ -5135,7 +5258,7 @@
         </p:sp>
         <p:sp>
           <p:nvSpPr>
-            <p:cNvPr id="77" name="tx77"/>
+            <p:cNvPr id="80" name="tx80"/>
             <p:cNvSpPr/>
             <p:nvPr/>
           </p:nvSpPr>
@@ -5178,7 +5301,7 @@
         </p:sp>
         <p:sp>
           <p:nvSpPr>
-            <p:cNvPr id="78" name="tx78"/>
+            <p:cNvPr id="81" name="tx81"/>
             <p:cNvSpPr/>
             <p:nvPr/>
           </p:nvSpPr>
@@ -5221,7 +5344,7 @@
         </p:sp>
         <p:sp>
           <p:nvSpPr>
-            <p:cNvPr id="79" name="rc79"/>
+            <p:cNvPr id="82" name="rc82"/>
             <p:cNvSpPr/>
             <p:nvPr/>
           </p:nvSpPr>
@@ -5247,7 +5370,7 @@
         </p:sp>
         <p:sp>
           <p:nvSpPr>
-            <p:cNvPr id="80" name="rc80"/>
+            <p:cNvPr id="83" name="rc83"/>
             <p:cNvSpPr/>
             <p:nvPr/>
           </p:nvSpPr>
@@ -5282,7 +5405,7 @@
         </p:sp>
         <p:sp>
           <p:nvSpPr>
-            <p:cNvPr id="81" name="rc81"/>
+            <p:cNvPr id="84" name="rc84"/>
             <p:cNvSpPr/>
             <p:nvPr/>
           </p:nvSpPr>
@@ -5295,7 +5418,7 @@
               <a:avLst/>
             </a:prstGeom>
             <a:solidFill>
-              <a:srgbClr val="2BA47C">
+              <a:srgbClr val="29A47B">
                 <a:alpha val="100000"/>
               </a:srgbClr>
             </a:solidFill>
@@ -5317,7 +5440,7 @@
         </p:sp>
         <p:sp>
           <p:nvSpPr>
-            <p:cNvPr id="82" name="rc82"/>
+            <p:cNvPr id="85" name="rc85"/>
             <p:cNvSpPr/>
             <p:nvPr/>
           </p:nvSpPr>
@@ -5330,7 +5453,7 @@
               <a:avLst/>
             </a:prstGeom>
             <a:solidFill>
-              <a:srgbClr val="65B897">
+              <a:srgbClr val="6BBB9A">
                 <a:alpha val="100000"/>
               </a:srgbClr>
             </a:solidFill>
@@ -5352,7 +5475,7 @@
         </p:sp>
         <p:sp>
           <p:nvSpPr>
-            <p:cNvPr id="83" name="rc83"/>
+            <p:cNvPr id="86" name="rc86"/>
             <p:cNvSpPr/>
             <p:nvPr/>
           </p:nvSpPr>
@@ -5365,7 +5488,7 @@
               <a:avLst/>
             </a:prstGeom>
             <a:solidFill>
-              <a:srgbClr val="6CBC9B">
+              <a:srgbClr val="72BE9F">
                 <a:alpha val="100000"/>
               </a:srgbClr>
             </a:solidFill>
@@ -5387,20 +5510,20 @@
         </p:sp>
         <p:sp>
           <p:nvSpPr>
-            <p:cNvPr id="84" name="rc84"/>
-            <p:cNvSpPr/>
-            <p:nvPr/>
-          </p:nvSpPr>
-          <p:spPr>
-            <a:xfrm>
-              <a:off x="5421575" y="1774484"/>
+            <p:cNvPr id="87" name="rc87"/>
+            <p:cNvSpPr/>
+            <p:nvPr/>
+          </p:nvSpPr>
+          <p:spPr>
+            <a:xfrm>
+              <a:off x="5421575" y="2235212"/>
               <a:ext cx="408275" cy="460728"/>
             </a:xfrm>
             <a:prstGeom prst="rect">
               <a:avLst/>
             </a:prstGeom>
             <a:solidFill>
-              <a:srgbClr val="8DCAB0">
+              <a:srgbClr val="8DCAAF">
                 <a:alpha val="100000"/>
               </a:srgbClr>
             </a:solidFill>
@@ -5422,20 +5545,20 @@
         </p:sp>
         <p:sp>
           <p:nvSpPr>
-            <p:cNvPr id="85" name="rc85"/>
-            <p:cNvSpPr/>
-            <p:nvPr/>
-          </p:nvSpPr>
-          <p:spPr>
-            <a:xfrm>
-              <a:off x="5421575" y="2235212"/>
+            <p:cNvPr id="88" name="rc88"/>
+            <p:cNvSpPr/>
+            <p:nvPr/>
+          </p:nvSpPr>
+          <p:spPr>
+            <a:xfrm>
+              <a:off x="5421575" y="1774484"/>
               <a:ext cx="408275" cy="460728"/>
             </a:xfrm>
             <a:prstGeom prst="rect">
               <a:avLst/>
             </a:prstGeom>
             <a:solidFill>
-              <a:srgbClr val="98CFB7">
+              <a:srgbClr val="91CCB2">
                 <a:alpha val="100000"/>
               </a:srgbClr>
             </a:solidFill>
@@ -5457,13 +5580,48 @@
         </p:sp>
         <p:sp>
           <p:nvSpPr>
-            <p:cNvPr id="86" name="rc86"/>
+            <p:cNvPr id="89" name="rc89"/>
             <p:cNvSpPr/>
             <p:nvPr/>
           </p:nvSpPr>
           <p:spPr>
             <a:xfrm>
               <a:off x="5013300" y="2235212"/>
+              <a:ext cx="408275" cy="460728"/>
+            </a:xfrm>
+            <a:prstGeom prst="rect">
+              <a:avLst/>
+            </a:prstGeom>
+            <a:solidFill>
+              <a:srgbClr val="BEE1D1">
+                <a:alpha val="100000"/>
+              </a:srgbClr>
+            </a:solidFill>
+            <a:ln w="18970" cap="flat">
+              <a:solidFill>
+                <a:srgbClr val="FFFFFF">
+                  <a:alpha val="100000"/>
+                </a:srgbClr>
+              </a:solidFill>
+              <a:prstDash val="solid"/>
+              <a:miter/>
+            </a:ln>
+          </p:spPr>
+          <p:txBody>
+            <a:bodyPr/>
+            <a:lstStyle/>
+            <a:p/>
+          </p:txBody>
+        </p:sp>
+        <p:sp>
+          <p:nvSpPr>
+            <p:cNvPr id="90" name="rc90"/>
+            <p:cNvSpPr/>
+            <p:nvPr/>
+          </p:nvSpPr>
+          <p:spPr>
+            <a:xfrm>
+              <a:off x="5013300" y="1774484"/>
               <a:ext cx="408275" cy="460728"/>
             </a:xfrm>
             <a:prstGeom prst="rect">
@@ -5492,42 +5650,7 @@
         </p:sp>
         <p:sp>
           <p:nvSpPr>
-            <p:cNvPr id="87" name="rc87"/>
-            <p:cNvSpPr/>
-            <p:nvPr/>
-          </p:nvSpPr>
-          <p:spPr>
-            <a:xfrm>
-              <a:off x="5013300" y="1774484"/>
-              <a:ext cx="408275" cy="460728"/>
-            </a:xfrm>
-            <a:prstGeom prst="rect">
-              <a:avLst/>
-            </a:prstGeom>
-            <a:solidFill>
-              <a:srgbClr val="C3E3D4">
-                <a:alpha val="100000"/>
-              </a:srgbClr>
-            </a:solidFill>
-            <a:ln w="18970" cap="flat">
-              <a:solidFill>
-                <a:srgbClr val="FFFFFF">
-                  <a:alpha val="100000"/>
-                </a:srgbClr>
-              </a:solidFill>
-              <a:prstDash val="solid"/>
-              <a:miter/>
-            </a:ln>
-          </p:spPr>
-          <p:txBody>
-            <a:bodyPr/>
-            <a:lstStyle/>
-            <a:p/>
-          </p:txBody>
-        </p:sp>
-        <p:sp>
-          <p:nvSpPr>
-            <p:cNvPr id="88" name="rc88"/>
+            <p:cNvPr id="91" name="rc91"/>
             <p:cNvSpPr/>
             <p:nvPr/>
           </p:nvSpPr>
@@ -5562,7 +5685,7 @@
         </p:sp>
         <p:sp>
           <p:nvSpPr>
-            <p:cNvPr id="89" name="rc89"/>
+            <p:cNvPr id="92" name="rc92"/>
             <p:cNvSpPr/>
             <p:nvPr/>
           </p:nvSpPr>
@@ -5575,7 +5698,7 @@
               <a:avLst/>
             </a:prstGeom>
             <a:solidFill>
-              <a:srgbClr val="EEF7F3">
+              <a:srgbClr val="F0F8F4">
                 <a:alpha val="100000"/>
               </a:srgbClr>
             </a:solidFill>
@@ -5597,7 +5720,7 @@
         </p:sp>
         <p:sp>
           <p:nvSpPr>
-            <p:cNvPr id="90" name="rc90"/>
+            <p:cNvPr id="93" name="rc93"/>
             <p:cNvSpPr/>
             <p:nvPr/>
           </p:nvSpPr>
@@ -5632,7 +5755,7 @@
         </p:sp>
         <p:sp>
           <p:nvSpPr>
-            <p:cNvPr id="91" name="rc91"/>
+            <p:cNvPr id="94" name="rc94"/>
             <p:cNvSpPr/>
             <p:nvPr/>
           </p:nvSpPr>
@@ -5645,7 +5768,7 @@
               <a:avLst/>
             </a:prstGeom>
             <a:solidFill>
-              <a:srgbClr val="F5FAF8">
+              <a:srgbClr val="F6FBF8">
                 <a:alpha val="100000"/>
               </a:srgbClr>
             </a:solidFill>
@@ -5667,7 +5790,7 @@
         </p:sp>
         <p:sp>
           <p:nvSpPr>
-            <p:cNvPr id="92" name="rc92"/>
+            <p:cNvPr id="95" name="rc95"/>
             <p:cNvSpPr/>
             <p:nvPr/>
           </p:nvSpPr>
@@ -5680,7 +5803,7 @@
               <a:avLst/>
             </a:prstGeom>
             <a:solidFill>
-              <a:srgbClr val="F6FBF9">
+              <a:srgbClr val="F8FCFA">
                 <a:alpha val="100000"/>
               </a:srgbClr>
             </a:solidFill>
@@ -5702,7 +5825,7 @@
         </p:sp>
         <p:sp>
           <p:nvSpPr>
-            <p:cNvPr id="93" name="rc93"/>
+            <p:cNvPr id="96" name="rc96"/>
             <p:cNvSpPr/>
             <p:nvPr/>
           </p:nvSpPr>
@@ -5737,7 +5860,7 @@
         </p:sp>
         <p:sp>
           <p:nvSpPr>
-            <p:cNvPr id="94" name="rc94"/>
+            <p:cNvPr id="97" name="rc97"/>
             <p:cNvSpPr/>
             <p:nvPr/>
           </p:nvSpPr>
@@ -5772,7 +5895,7 @@
         </p:sp>
         <p:sp>
           <p:nvSpPr>
-            <p:cNvPr id="95" name="rc95"/>
+            <p:cNvPr id="98" name="rc98"/>
             <p:cNvSpPr/>
             <p:nvPr/>
           </p:nvSpPr>
@@ -5807,7 +5930,7 @@
         </p:sp>
         <p:sp>
           <p:nvSpPr>
-            <p:cNvPr id="96" name="tx96"/>
+            <p:cNvPr id="99" name="tx99"/>
             <p:cNvSpPr/>
             <p:nvPr/>
           </p:nvSpPr>
@@ -5850,7 +5973,7 @@
         </p:sp>
         <p:sp>
           <p:nvSpPr>
-            <p:cNvPr id="97" name="tx97"/>
+            <p:cNvPr id="100" name="tx100"/>
             <p:cNvSpPr/>
             <p:nvPr/>
           </p:nvSpPr>
@@ -5893,56 +6016,13 @@
         </p:sp>
         <p:sp>
           <p:nvSpPr>
-            <p:cNvPr id="98" name="tx98"/>
-            <p:cNvSpPr/>
-            <p:nvPr/>
-          </p:nvSpPr>
-          <p:spPr>
-            <a:xfrm>
-              <a:off x="6005413" y="1968043"/>
-              <a:ext cx="57150" cy="73609"/>
-            </a:xfrm>
-            <a:prstGeom prst="rect">
-              <a:avLst/>
-            </a:prstGeom>
-            <a:noFill/>
-          </p:spPr>
-          <p:txBody>
-            <a:bodyPr lIns="0" rIns="0" tIns="0" bIns="0" anchorCtr="1" anchor="ctr" wrap="none"/>
-            <a:lstStyle/>
-            <a:p>
-              <a:pPr algn="l" marL="0" marR="0" indent="0">
-                <a:spcBef>
-                  <a:spcPts val="0"/>
-                </a:spcBef>
-                <a:spcAft>
-                  <a:spcPts val="0"/>
-                </a:spcAft>
-              </a:pPr>
-              <a:r>
-                <a:rPr sz="810" i="0" b="0">
-                  <a:solidFill>
-                    <a:srgbClr val="1A1A1A">
-                      <a:alpha val="100000"/>
-                    </a:srgbClr>
-                  </a:solidFill>
-                  <a:latin typeface="Arial"/>
-                  <a:cs typeface="Arial"/>
-                </a:rPr>
-                <a:t>9</a:t>
-              </a:r>
-            </a:p>
-          </p:txBody>
-        </p:sp>
-        <p:sp>
-          <p:nvSpPr>
-            <p:cNvPr id="99" name="tx99"/>
-            <p:cNvSpPr/>
-            <p:nvPr/>
-          </p:nvSpPr>
-          <p:spPr>
-            <a:xfrm>
-              <a:off x="6385113" y="1968043"/>
+            <p:cNvPr id="101" name="tx101"/>
+            <p:cNvSpPr/>
+            <p:nvPr/>
+          </p:nvSpPr>
+          <p:spPr>
+            <a:xfrm>
+              <a:off x="5976838" y="1968043"/>
               <a:ext cx="114300" cy="73609"/>
             </a:xfrm>
             <a:prstGeom prst="rect">
@@ -5979,14 +6059,14 @@
         </p:sp>
         <p:sp>
           <p:nvSpPr>
-            <p:cNvPr id="100" name="tx100"/>
-            <p:cNvSpPr/>
-            <p:nvPr/>
-          </p:nvSpPr>
-          <p:spPr>
-            <a:xfrm>
-              <a:off x="5568563" y="1968043"/>
-              <a:ext cx="114300" cy="73609"/>
+            <p:cNvPr id="102" name="tx102"/>
+            <p:cNvSpPr/>
+            <p:nvPr/>
+          </p:nvSpPr>
+          <p:spPr>
+            <a:xfrm>
+              <a:off x="6388908" y="1968043"/>
+              <a:ext cx="106710" cy="73609"/>
             </a:xfrm>
             <a:prstGeom prst="rect">
               <a:avLst/>
@@ -6015,14 +6095,14 @@
                   <a:latin typeface="Arial"/>
                   <a:cs typeface="Arial"/>
                 </a:rPr>
-                <a:t>15</a:t>
+                <a:t>11</a:t>
               </a:r>
             </a:p>
           </p:txBody>
         </p:sp>
         <p:sp>
           <p:nvSpPr>
-            <p:cNvPr id="101" name="tx101"/>
+            <p:cNvPr id="103" name="tx103"/>
             <p:cNvSpPr/>
             <p:nvPr/>
           </p:nvSpPr>
@@ -6058,14 +6138,57 @@
                   <a:latin typeface="Arial"/>
                   <a:cs typeface="Arial"/>
                 </a:rPr>
-                <a:t>17</a:t>
+                <a:t>16</a:t>
               </a:r>
             </a:p>
           </p:txBody>
         </p:sp>
         <p:sp>
           <p:nvSpPr>
-            <p:cNvPr id="102" name="tx102"/>
+            <p:cNvPr id="104" name="tx104"/>
+            <p:cNvSpPr/>
+            <p:nvPr/>
+          </p:nvSpPr>
+          <p:spPr>
+            <a:xfrm>
+              <a:off x="5568563" y="1968043"/>
+              <a:ext cx="114300" cy="73609"/>
+            </a:xfrm>
+            <a:prstGeom prst="rect">
+              <a:avLst/>
+            </a:prstGeom>
+            <a:noFill/>
+          </p:spPr>
+          <p:txBody>
+            <a:bodyPr lIns="0" rIns="0" tIns="0" bIns="0" anchorCtr="1" anchor="ctr" wrap="none"/>
+            <a:lstStyle/>
+            <a:p>
+              <a:pPr algn="l" marL="0" marR="0" indent="0">
+                <a:spcBef>
+                  <a:spcPts val="0"/>
+                </a:spcBef>
+                <a:spcAft>
+                  <a:spcPts val="0"/>
+                </a:spcAft>
+              </a:pPr>
+              <a:r>
+                <a:rPr sz="810" i="0" b="0">
+                  <a:solidFill>
+                    <a:srgbClr val="1A1A1A">
+                      <a:alpha val="100000"/>
+                    </a:srgbClr>
+                  </a:solidFill>
+                  <a:latin typeface="Arial"/>
+                  <a:cs typeface="Arial"/>
+                </a:rPr>
+                <a:t>16</a:t>
+              </a:r>
+            </a:p>
+          </p:txBody>
+        </p:sp>
+        <p:sp>
+          <p:nvSpPr>
+            <p:cNvPr id="105" name="tx105"/>
             <p:cNvSpPr/>
             <p:nvPr/>
           </p:nvSpPr>
@@ -6108,7 +6231,7 @@
         </p:sp>
         <p:sp>
           <p:nvSpPr>
-            <p:cNvPr id="103" name="tx103"/>
+            <p:cNvPr id="106" name="tx106"/>
             <p:cNvSpPr/>
             <p:nvPr/>
           </p:nvSpPr>
@@ -6144,106 +6267,20 @@
                   <a:latin typeface="Arial"/>
                   <a:cs typeface="Arial"/>
                 </a:rPr>
-                <a:t>24</a:t>
+                <a:t>25</a:t>
               </a:r>
             </a:p>
           </p:txBody>
         </p:sp>
         <p:sp>
           <p:nvSpPr>
-            <p:cNvPr id="104" name="tx104"/>
+            <p:cNvPr id="107" name="tx107"/>
             <p:cNvSpPr/>
             <p:nvPr/>
           </p:nvSpPr>
           <p:spPr>
             <a:xfrm>
               <a:off x="5976838" y="1507315"/>
-              <a:ext cx="114300" cy="73609"/>
-            </a:xfrm>
-            <a:prstGeom prst="rect">
-              <a:avLst/>
-            </a:prstGeom>
-            <a:noFill/>
-          </p:spPr>
-          <p:txBody>
-            <a:bodyPr lIns="0" rIns="0" tIns="0" bIns="0" anchorCtr="1" anchor="ctr" wrap="none"/>
-            <a:lstStyle/>
-            <a:p>
-              <a:pPr algn="l" marL="0" marR="0" indent="0">
-                <a:spcBef>
-                  <a:spcPts val="0"/>
-                </a:spcBef>
-                <a:spcAft>
-                  <a:spcPts val="0"/>
-                </a:spcAft>
-              </a:pPr>
-              <a:r>
-                <a:rPr sz="810" i="0" b="0">
-                  <a:solidFill>
-                    <a:srgbClr val="1A1A1A">
-                      <a:alpha val="100000"/>
-                    </a:srgbClr>
-                  </a:solidFill>
-                  <a:latin typeface="Arial"/>
-                  <a:cs typeface="Arial"/>
-                </a:rPr>
-                <a:t>31</a:t>
-              </a:r>
-            </a:p>
-          </p:txBody>
-        </p:sp>
-        <p:sp>
-          <p:nvSpPr>
-            <p:cNvPr id="105" name="tx105"/>
-            <p:cNvSpPr/>
-            <p:nvPr/>
-          </p:nvSpPr>
-          <p:spPr>
-            <a:xfrm>
-              <a:off x="5568563" y="1507315"/>
-              <a:ext cx="114300" cy="73609"/>
-            </a:xfrm>
-            <a:prstGeom prst="rect">
-              <a:avLst/>
-            </a:prstGeom>
-            <a:noFill/>
-          </p:spPr>
-          <p:txBody>
-            <a:bodyPr lIns="0" rIns="0" tIns="0" bIns="0" anchorCtr="1" anchor="ctr" wrap="none"/>
-            <a:lstStyle/>
-            <a:p>
-              <a:pPr algn="l" marL="0" marR="0" indent="0">
-                <a:spcBef>
-                  <a:spcPts val="0"/>
-                </a:spcBef>
-                <a:spcAft>
-                  <a:spcPts val="0"/>
-                </a:spcAft>
-              </a:pPr>
-              <a:r>
-                <a:rPr sz="810" i="0" b="0">
-                  <a:solidFill>
-                    <a:srgbClr val="1A1A1A">
-                      <a:alpha val="100000"/>
-                    </a:srgbClr>
-                  </a:solidFill>
-                  <a:latin typeface="Arial"/>
-                  <a:cs typeface="Arial"/>
-                </a:rPr>
-                <a:t>31</a:t>
-              </a:r>
-            </a:p>
-          </p:txBody>
-        </p:sp>
-        <p:sp>
-          <p:nvSpPr>
-            <p:cNvPr id="106" name="tx106"/>
-            <p:cNvSpPr/>
-            <p:nvPr/>
-          </p:nvSpPr>
-          <p:spPr>
-            <a:xfrm>
-              <a:off x="6385113" y="1507315"/>
               <a:ext cx="114300" cy="73609"/>
             </a:xfrm>
             <a:prstGeom prst="rect">
@@ -6280,99 +6317,13 @@
         </p:sp>
         <p:sp>
           <p:nvSpPr>
-            <p:cNvPr id="107" name="tx107"/>
-            <p:cNvSpPr/>
-            <p:nvPr/>
-          </p:nvSpPr>
-          <p:spPr>
-            <a:xfrm>
-              <a:off x="5160288" y="1507315"/>
-              <a:ext cx="114300" cy="73609"/>
-            </a:xfrm>
-            <a:prstGeom prst="rect">
-              <a:avLst/>
-            </a:prstGeom>
-            <a:noFill/>
-          </p:spPr>
-          <p:txBody>
-            <a:bodyPr lIns="0" rIns="0" tIns="0" bIns="0" anchorCtr="1" anchor="ctr" wrap="none"/>
-            <a:lstStyle/>
-            <a:p>
-              <a:pPr algn="l" marL="0" marR="0" indent="0">
-                <a:spcBef>
-                  <a:spcPts val="0"/>
-                </a:spcBef>
-                <a:spcAft>
-                  <a:spcPts val="0"/>
-                </a:spcAft>
-              </a:pPr>
-              <a:r>
-                <a:rPr sz="810" i="0" b="0">
-                  <a:solidFill>
-                    <a:srgbClr val="1A1A1A">
-                      <a:alpha val="100000"/>
-                    </a:srgbClr>
-                  </a:solidFill>
-                  <a:latin typeface="Arial"/>
-                  <a:cs typeface="Arial"/>
-                </a:rPr>
-                <a:t>32</a:t>
-              </a:r>
-            </a:p>
-          </p:txBody>
-        </p:sp>
-        <p:sp>
-          <p:nvSpPr>
             <p:cNvPr id="108" name="tx108"/>
             <p:cNvSpPr/>
             <p:nvPr/>
           </p:nvSpPr>
           <p:spPr>
             <a:xfrm>
-              <a:off x="5568563" y="1046586"/>
-              <a:ext cx="114300" cy="73609"/>
-            </a:xfrm>
-            <a:prstGeom prst="rect">
-              <a:avLst/>
-            </a:prstGeom>
-            <a:noFill/>
-          </p:spPr>
-          <p:txBody>
-            <a:bodyPr lIns="0" rIns="0" tIns="0" bIns="0" anchorCtr="1" anchor="ctr" wrap="none"/>
-            <a:lstStyle/>
-            <a:p>
-              <a:pPr algn="l" marL="0" marR="0" indent="0">
-                <a:spcBef>
-                  <a:spcPts val="0"/>
-                </a:spcBef>
-                <a:spcAft>
-                  <a:spcPts val="0"/>
-                </a:spcAft>
-              </a:pPr>
-              <a:r>
-                <a:rPr sz="810" i="0" b="0">
-                  <a:solidFill>
-                    <a:srgbClr val="1A1A1A">
-                      <a:alpha val="100000"/>
-                    </a:srgbClr>
-                  </a:solidFill>
-                  <a:latin typeface="Arial"/>
-                  <a:cs typeface="Arial"/>
-                </a:rPr>
-                <a:t>32</a:t>
-              </a:r>
-            </a:p>
-          </p:txBody>
-        </p:sp>
-        <p:sp>
-          <p:nvSpPr>
-            <p:cNvPr id="109" name="tx109"/>
-            <p:cNvSpPr/>
-            <p:nvPr/>
-          </p:nvSpPr>
-          <p:spPr>
-            <a:xfrm>
-              <a:off x="6385113" y="1046586"/>
+              <a:off x="5568563" y="1507315"/>
               <a:ext cx="114300" cy="73609"/>
             </a:xfrm>
             <a:prstGeom prst="rect">
@@ -6409,13 +6360,56 @@
         </p:sp>
         <p:sp>
           <p:nvSpPr>
+            <p:cNvPr id="109" name="tx109"/>
+            <p:cNvSpPr/>
+            <p:nvPr/>
+          </p:nvSpPr>
+          <p:spPr>
+            <a:xfrm>
+              <a:off x="6385113" y="1507315"/>
+              <a:ext cx="114300" cy="73609"/>
+            </a:xfrm>
+            <a:prstGeom prst="rect">
+              <a:avLst/>
+            </a:prstGeom>
+            <a:noFill/>
+          </p:spPr>
+          <p:txBody>
+            <a:bodyPr lIns="0" rIns="0" tIns="0" bIns="0" anchorCtr="1" anchor="ctr" wrap="none"/>
+            <a:lstStyle/>
+            <a:p>
+              <a:pPr algn="l" marL="0" marR="0" indent="0">
+                <a:spcBef>
+                  <a:spcPts val="0"/>
+                </a:spcBef>
+                <a:spcAft>
+                  <a:spcPts val="0"/>
+                </a:spcAft>
+              </a:pPr>
+              <a:r>
+                <a:rPr sz="810" i="0" b="0">
+                  <a:solidFill>
+                    <a:srgbClr val="1A1A1A">
+                      <a:alpha val="100000"/>
+                    </a:srgbClr>
+                  </a:solidFill>
+                  <a:latin typeface="Arial"/>
+                  <a:cs typeface="Arial"/>
+                </a:rPr>
+                <a:t>33</a:t>
+              </a:r>
+            </a:p>
+          </p:txBody>
+        </p:sp>
+        <p:sp>
+          <p:nvSpPr>
             <p:cNvPr id="110" name="tx110"/>
             <p:cNvSpPr/>
             <p:nvPr/>
           </p:nvSpPr>
           <p:spPr>
             <a:xfrm>
-              <a:off x="5976838" y="1046586"/>
+              <a:off x="5160288" y="1507315"/>
               <a:ext cx="114300" cy="73609"/>
             </a:xfrm>
             <a:prstGeom prst="rect">
@@ -6458,7 +6452,7 @@
           </p:nvSpPr>
           <p:spPr>
             <a:xfrm>
-              <a:off x="5160288" y="1046586"/>
+              <a:off x="5568563" y="1046586"/>
               <a:ext cx="114300" cy="73609"/>
             </a:xfrm>
             <a:prstGeom prst="rect">
@@ -6495,7 +6489,136 @@
         </p:sp>
         <p:sp>
           <p:nvSpPr>
-            <p:cNvPr id="112" name="pl112"/>
+            <p:cNvPr id="112" name="tx112"/>
+            <p:cNvSpPr/>
+            <p:nvPr/>
+          </p:nvSpPr>
+          <p:spPr>
+            <a:xfrm>
+              <a:off x="6385113" y="1046586"/>
+              <a:ext cx="114300" cy="73609"/>
+            </a:xfrm>
+            <a:prstGeom prst="rect">
+              <a:avLst/>
+            </a:prstGeom>
+            <a:noFill/>
+          </p:spPr>
+          <p:txBody>
+            <a:bodyPr lIns="0" rIns="0" tIns="0" bIns="0" anchorCtr="1" anchor="ctr" wrap="none"/>
+            <a:lstStyle/>
+            <a:p>
+              <a:pPr algn="l" marL="0" marR="0" indent="0">
+                <a:spcBef>
+                  <a:spcPts val="0"/>
+                </a:spcBef>
+                <a:spcAft>
+                  <a:spcPts val="0"/>
+                </a:spcAft>
+              </a:pPr>
+              <a:r>
+                <a:rPr sz="810" i="0" b="0">
+                  <a:solidFill>
+                    <a:srgbClr val="1A1A1A">
+                      <a:alpha val="100000"/>
+                    </a:srgbClr>
+                  </a:solidFill>
+                  <a:latin typeface="Arial"/>
+                  <a:cs typeface="Arial"/>
+                </a:rPr>
+                <a:t>35</a:t>
+              </a:r>
+            </a:p>
+          </p:txBody>
+        </p:sp>
+        <p:sp>
+          <p:nvSpPr>
+            <p:cNvPr id="113" name="tx113"/>
+            <p:cNvSpPr/>
+            <p:nvPr/>
+          </p:nvSpPr>
+          <p:spPr>
+            <a:xfrm>
+              <a:off x="5976838" y="1046586"/>
+              <a:ext cx="114300" cy="73609"/>
+            </a:xfrm>
+            <a:prstGeom prst="rect">
+              <a:avLst/>
+            </a:prstGeom>
+            <a:noFill/>
+          </p:spPr>
+          <p:txBody>
+            <a:bodyPr lIns="0" rIns="0" tIns="0" bIns="0" anchorCtr="1" anchor="ctr" wrap="none"/>
+            <a:lstStyle/>
+            <a:p>
+              <a:pPr algn="l" marL="0" marR="0" indent="0">
+                <a:spcBef>
+                  <a:spcPts val="0"/>
+                </a:spcBef>
+                <a:spcAft>
+                  <a:spcPts val="0"/>
+                </a:spcAft>
+              </a:pPr>
+              <a:r>
+                <a:rPr sz="810" i="0" b="0">
+                  <a:solidFill>
+                    <a:srgbClr val="1A1A1A">
+                      <a:alpha val="100000"/>
+                    </a:srgbClr>
+                  </a:solidFill>
+                  <a:latin typeface="Arial"/>
+                  <a:cs typeface="Arial"/>
+                </a:rPr>
+                <a:t>35</a:t>
+              </a:r>
+            </a:p>
+          </p:txBody>
+        </p:sp>
+        <p:sp>
+          <p:nvSpPr>
+            <p:cNvPr id="114" name="tx114"/>
+            <p:cNvSpPr/>
+            <p:nvPr/>
+          </p:nvSpPr>
+          <p:spPr>
+            <a:xfrm>
+              <a:off x="5160288" y="1046586"/>
+              <a:ext cx="114300" cy="73609"/>
+            </a:xfrm>
+            <a:prstGeom prst="rect">
+              <a:avLst/>
+            </a:prstGeom>
+            <a:noFill/>
+          </p:spPr>
+          <p:txBody>
+            <a:bodyPr lIns="0" rIns="0" tIns="0" bIns="0" anchorCtr="1" anchor="ctr" wrap="none"/>
+            <a:lstStyle/>
+            <a:p>
+              <a:pPr algn="l" marL="0" marR="0" indent="0">
+                <a:spcBef>
+                  <a:spcPts val="0"/>
+                </a:spcBef>
+                <a:spcAft>
+                  <a:spcPts val="0"/>
+                </a:spcAft>
+              </a:pPr>
+              <a:r>
+                <a:rPr sz="810" i="0" b="0">
+                  <a:solidFill>
+                    <a:srgbClr val="1A1A1A">
+                      <a:alpha val="100000"/>
+                    </a:srgbClr>
+                  </a:solidFill>
+                  <a:latin typeface="Arial"/>
+                  <a:cs typeface="Arial"/>
+                </a:rPr>
+                <a:t>35</a:t>
+              </a:r>
+            </a:p>
+          </p:txBody>
+        </p:sp>
+        <p:sp>
+          <p:nvSpPr>
+            <p:cNvPr id="115" name="pl115"/>
             <p:cNvSpPr/>
             <p:nvPr/>
           </p:nvSpPr>
@@ -6535,7 +6658,7 @@
         </p:sp>
         <p:sp>
           <p:nvSpPr>
-            <p:cNvPr id="113" name="tx113"/>
+            <p:cNvPr id="116" name="tx116"/>
             <p:cNvSpPr/>
             <p:nvPr/>
           </p:nvSpPr>
@@ -6578,7 +6701,7 @@
         </p:sp>
         <p:sp>
           <p:nvSpPr>
-            <p:cNvPr id="114" name="tx114"/>
+            <p:cNvPr id="117" name="tx117"/>
             <p:cNvSpPr/>
             <p:nvPr/>
           </p:nvSpPr>
@@ -6621,7 +6744,7 @@
         </p:sp>
         <p:sp>
           <p:nvSpPr>
-            <p:cNvPr id="115" name="tx115"/>
+            <p:cNvPr id="118" name="tx118"/>
             <p:cNvSpPr/>
             <p:nvPr/>
           </p:nvSpPr>
@@ -6664,7 +6787,7 @@
         </p:sp>
         <p:sp>
           <p:nvSpPr>
-            <p:cNvPr id="116" name="tx116"/>
+            <p:cNvPr id="119" name="tx119"/>
             <p:cNvSpPr/>
             <p:nvPr/>
           </p:nvSpPr>
@@ -6707,7 +6830,7 @@
         </p:sp>
         <p:sp>
           <p:nvSpPr>
-            <p:cNvPr id="117" name="pl117"/>
+            <p:cNvPr id="120" name="pl120"/>
             <p:cNvSpPr/>
             <p:nvPr/>
           </p:nvSpPr>
@@ -6747,7 +6870,7 @@
         </p:sp>
         <p:sp>
           <p:nvSpPr>
-            <p:cNvPr id="118" name="pl118"/>
+            <p:cNvPr id="121" name="pl121"/>
             <p:cNvSpPr/>
             <p:nvPr/>
           </p:nvSpPr>
@@ -6787,7 +6910,7 @@
         </p:sp>
         <p:sp>
           <p:nvSpPr>
-            <p:cNvPr id="119" name="pl119"/>
+            <p:cNvPr id="122" name="pl122"/>
             <p:cNvSpPr/>
             <p:nvPr/>
           </p:nvSpPr>
@@ -6827,7 +6950,7 @@
         </p:sp>
         <p:sp>
           <p:nvSpPr>
-            <p:cNvPr id="120" name="pl120"/>
+            <p:cNvPr id="123" name="pl123"/>
             <p:cNvSpPr/>
             <p:nvPr/>
           </p:nvSpPr>
@@ -6867,7 +6990,7 @@
         </p:sp>
         <p:sp>
           <p:nvSpPr>
-            <p:cNvPr id="121" name="pl121"/>
+            <p:cNvPr id="124" name="pl124"/>
             <p:cNvSpPr/>
             <p:nvPr/>
           </p:nvSpPr>
@@ -6907,7 +7030,7 @@
         </p:sp>
         <p:sp>
           <p:nvSpPr>
-            <p:cNvPr id="122" name="pl122"/>
+            <p:cNvPr id="125" name="pl125"/>
             <p:cNvSpPr/>
             <p:nvPr/>
           </p:nvSpPr>
@@ -6947,7 +7070,7 @@
         </p:sp>
         <p:sp>
           <p:nvSpPr>
-            <p:cNvPr id="123" name="pl123"/>
+            <p:cNvPr id="126" name="pl126"/>
             <p:cNvSpPr/>
             <p:nvPr/>
           </p:nvSpPr>
@@ -6987,7 +7110,7 @@
         </p:sp>
         <p:sp>
           <p:nvSpPr>
-            <p:cNvPr id="124" name="pl124"/>
+            <p:cNvPr id="127" name="pl127"/>
             <p:cNvSpPr/>
             <p:nvPr/>
           </p:nvSpPr>
@@ -7027,7 +7150,7 @@
         </p:sp>
         <p:sp>
           <p:nvSpPr>
-            <p:cNvPr id="125" name="pl125"/>
+            <p:cNvPr id="128" name="pl128"/>
             <p:cNvSpPr/>
             <p:nvPr/>
           </p:nvSpPr>
@@ -7067,7 +7190,7 @@
         </p:sp>
         <p:sp>
           <p:nvSpPr>
-            <p:cNvPr id="126" name="tx126"/>
+            <p:cNvPr id="129" name="tx129"/>
             <p:cNvSpPr/>
             <p:nvPr/>
           </p:nvSpPr>
@@ -7110,7 +7233,7 @@
         </p:sp>
         <p:sp>
           <p:nvSpPr>
-            <p:cNvPr id="127" name="tx127"/>
+            <p:cNvPr id="130" name="tx130"/>
             <p:cNvSpPr/>
             <p:nvPr/>
           </p:nvSpPr>
@@ -7153,7 +7276,7 @@
         </p:sp>
         <p:sp>
           <p:nvSpPr>
-            <p:cNvPr id="128" name="tx128"/>
+            <p:cNvPr id="131" name="tx131"/>
             <p:cNvSpPr/>
             <p:nvPr/>
           </p:nvSpPr>
@@ -7196,7 +7319,7 @@
         </p:sp>
         <p:sp>
           <p:nvSpPr>
-            <p:cNvPr id="129" name="tx129"/>
+            <p:cNvPr id="132" name="tx132"/>
             <p:cNvSpPr/>
             <p:nvPr/>
           </p:nvSpPr>
@@ -7239,7 +7362,7 @@
         </p:sp>
         <p:sp>
           <p:nvSpPr>
-            <p:cNvPr id="130" name="tx130"/>
+            <p:cNvPr id="133" name="tx133"/>
             <p:cNvSpPr/>
             <p:nvPr/>
           </p:nvSpPr>
@@ -7282,7 +7405,7 @@
         </p:sp>
         <p:sp>
           <p:nvSpPr>
-            <p:cNvPr id="131" name="rc131"/>
+            <p:cNvPr id="134" name="rc134"/>
             <p:cNvSpPr/>
             <p:nvPr/>
           </p:nvSpPr>
@@ -7308,7 +7431,7 @@
         </p:sp>
         <p:sp>
           <p:nvSpPr>
-            <p:cNvPr id="132" name="tx132"/>
+            <p:cNvPr id="135" name="tx135"/>
             <p:cNvSpPr/>
             <p:nvPr/>
           </p:nvSpPr>
@@ -7351,7 +7474,7 @@
         </p:sp>
         <p:pic>
           <p:nvPicPr>
-            <p:cNvPr id="133" name="pic133"/>
+            <p:cNvPr id="136" name="pic136"/>
             <p:cNvPicPr/>
             <p:nvPr/>
           </p:nvPicPr>
@@ -7373,7 +7496,7 @@
         </p:pic>
         <p:sp>
           <p:nvSpPr>
-            <p:cNvPr id="134" name="pl134"/>
+            <p:cNvPr id="137" name="pl137"/>
             <p:cNvSpPr/>
             <p:nvPr/>
           </p:nvSpPr>
@@ -7413,13 +7536,13 @@
         </p:sp>
         <p:sp>
           <p:nvSpPr>
-            <p:cNvPr id="135" name="pl135"/>
-            <p:cNvSpPr/>
-            <p:nvPr/>
-          </p:nvSpPr>
-          <p:spPr>
-            <a:xfrm>
-              <a:off x="7366893" y="1974244"/>
+            <p:cNvPr id="138" name="pl138"/>
+            <p:cNvSpPr/>
+            <p:nvPr/>
+          </p:nvSpPr>
+          <p:spPr>
+            <a:xfrm>
+              <a:off x="7366893" y="1980949"/>
               <a:ext cx="22774" cy="0"/>
             </a:xfrm>
             <a:custGeom>
@@ -7453,13 +7576,13 @@
         </p:sp>
         <p:sp>
           <p:nvSpPr>
-            <p:cNvPr id="136" name="pl136"/>
-            <p:cNvSpPr/>
-            <p:nvPr/>
-          </p:nvSpPr>
-          <p:spPr>
-            <a:xfrm>
-              <a:off x="7366893" y="1805742"/>
+            <p:cNvPr id="139" name="pl139"/>
+            <p:cNvSpPr/>
+            <p:nvPr/>
+          </p:nvSpPr>
+          <p:spPr>
+            <a:xfrm>
+              <a:off x="7366893" y="1819151"/>
               <a:ext cx="22774" cy="0"/>
             </a:xfrm>
             <a:custGeom>
@@ -7493,13 +7616,13 @@
         </p:sp>
         <p:sp>
           <p:nvSpPr>
-            <p:cNvPr id="137" name="pl137"/>
-            <p:cNvSpPr/>
-            <p:nvPr/>
-          </p:nvSpPr>
-          <p:spPr>
-            <a:xfrm>
-              <a:off x="7366893" y="1637240"/>
+            <p:cNvPr id="140" name="pl140"/>
+            <p:cNvSpPr/>
+            <p:nvPr/>
+          </p:nvSpPr>
+          <p:spPr>
+            <a:xfrm>
+              <a:off x="7366893" y="1657353"/>
               <a:ext cx="22774" cy="0"/>
             </a:xfrm>
             <a:custGeom>
@@ -7533,7 +7656,7 @@
         </p:sp>
         <p:sp>
           <p:nvSpPr>
-            <p:cNvPr id="138" name="pl138"/>
+            <p:cNvPr id="141" name="pl141"/>
             <p:cNvSpPr/>
             <p:nvPr/>
           </p:nvSpPr>
@@ -7573,13 +7696,13 @@
         </p:sp>
         <p:sp>
           <p:nvSpPr>
-            <p:cNvPr id="139" name="pl139"/>
-            <p:cNvSpPr/>
-            <p:nvPr/>
-          </p:nvSpPr>
-          <p:spPr>
-            <a:xfrm>
-              <a:off x="7275795" y="1974244"/>
+            <p:cNvPr id="142" name="pl142"/>
+            <p:cNvSpPr/>
+            <p:nvPr/>
+          </p:nvSpPr>
+          <p:spPr>
+            <a:xfrm>
+              <a:off x="7275795" y="1980949"/>
               <a:ext cx="22774" cy="0"/>
             </a:xfrm>
             <a:custGeom>
@@ -7613,13 +7736,13 @@
         </p:sp>
         <p:sp>
           <p:nvSpPr>
-            <p:cNvPr id="140" name="pl140"/>
-            <p:cNvSpPr/>
-            <p:nvPr/>
-          </p:nvSpPr>
-          <p:spPr>
-            <a:xfrm>
-              <a:off x="7275795" y="1805742"/>
+            <p:cNvPr id="143" name="pl143"/>
+            <p:cNvSpPr/>
+            <p:nvPr/>
+          </p:nvSpPr>
+          <p:spPr>
+            <a:xfrm>
+              <a:off x="7275795" y="1819151"/>
               <a:ext cx="22774" cy="0"/>
             </a:xfrm>
             <a:custGeom>
@@ -7653,13 +7776,13 @@
         </p:sp>
         <p:sp>
           <p:nvSpPr>
-            <p:cNvPr id="141" name="pl141"/>
-            <p:cNvSpPr/>
-            <p:nvPr/>
-          </p:nvSpPr>
-          <p:spPr>
-            <a:xfrm>
-              <a:off x="7275795" y="1637240"/>
+            <p:cNvPr id="144" name="pl144"/>
+            <p:cNvSpPr/>
+            <p:nvPr/>
+          </p:nvSpPr>
+          <p:spPr>
+            <a:xfrm>
+              <a:off x="7275795" y="1657353"/>
               <a:ext cx="22774" cy="0"/>
             </a:xfrm>
             <a:custGeom>
@@ -7693,7 +7816,7 @@
         </p:sp>
         <p:sp>
           <p:nvSpPr>
-            <p:cNvPr id="142" name="tx142"/>
+            <p:cNvPr id="145" name="tx145"/>
             <p:cNvSpPr/>
             <p:nvPr/>
           </p:nvSpPr>
@@ -7736,13 +7859,13 @@
         </p:sp>
         <p:sp>
           <p:nvSpPr>
-            <p:cNvPr id="143" name="tx143"/>
-            <p:cNvSpPr/>
-            <p:nvPr/>
-          </p:nvSpPr>
-          <p:spPr>
-            <a:xfrm>
-              <a:off x="7452931" y="1933325"/>
+            <p:cNvPr id="146" name="tx146"/>
+            <p:cNvSpPr/>
+            <p:nvPr/>
+          </p:nvSpPr>
+          <p:spPr>
+            <a:xfrm>
+              <a:off x="7452931" y="1940029"/>
               <a:ext cx="127101" cy="81838"/>
             </a:xfrm>
             <a:prstGeom prst="rect">
@@ -7779,13 +7902,13 @@
         </p:sp>
         <p:sp>
           <p:nvSpPr>
-            <p:cNvPr id="144" name="tx144"/>
-            <p:cNvSpPr/>
-            <p:nvPr/>
-          </p:nvSpPr>
-          <p:spPr>
-            <a:xfrm>
-              <a:off x="7452931" y="1764823"/>
+            <p:cNvPr id="147" name="tx147"/>
+            <p:cNvSpPr/>
+            <p:nvPr/>
+          </p:nvSpPr>
+          <p:spPr>
+            <a:xfrm>
+              <a:off x="7452931" y="1778232"/>
               <a:ext cx="127101" cy="81838"/>
             </a:xfrm>
             <a:prstGeom prst="rect">
@@ -7822,13 +7945,13 @@
         </p:sp>
         <p:sp>
           <p:nvSpPr>
-            <p:cNvPr id="145" name="tx145"/>
-            <p:cNvSpPr/>
-            <p:nvPr/>
-          </p:nvSpPr>
-          <p:spPr>
-            <a:xfrm>
-              <a:off x="7452931" y="1596320"/>
+            <p:cNvPr id="148" name="tx148"/>
+            <p:cNvSpPr/>
+            <p:nvPr/>
+          </p:nvSpPr>
+          <p:spPr>
+            <a:xfrm>
+              <a:off x="7452931" y="1616434"/>
               <a:ext cx="127101" cy="81838"/>
             </a:xfrm>
             <a:prstGeom prst="rect">
@@ -7865,7 +7988,7 @@
         </p:sp>
         <p:sp>
           <p:nvSpPr>
-            <p:cNvPr id="146" name="tx146"/>
+            <p:cNvPr id="149" name="tx149"/>
             <p:cNvSpPr/>
             <p:nvPr/>
           </p:nvSpPr>
@@ -7908,7 +8031,7 @@
         </p:sp>
         <p:sp>
           <p:nvSpPr>
-            <p:cNvPr id="147" name="tx147"/>
+            <p:cNvPr id="150" name="tx150"/>
             <p:cNvSpPr/>
             <p:nvPr/>
           </p:nvSpPr>
@@ -7951,7 +8074,7 @@
         </p:sp>
         <p:sp>
           <p:nvSpPr>
-            <p:cNvPr id="148" name="tx148"/>
+            <p:cNvPr id="151" name="tx151"/>
             <p:cNvSpPr/>
             <p:nvPr/>
           </p:nvSpPr>
@@ -7994,7 +8117,7 @@
         </p:sp>
         <p:sp>
           <p:nvSpPr>
-            <p:cNvPr id="149" name="tx149"/>
+            <p:cNvPr id="152" name="tx152"/>
             <p:cNvSpPr/>
             <p:nvPr/>
           </p:nvSpPr>
@@ -8037,7 +8160,7 @@
         </p:sp>
         <p:sp>
           <p:nvSpPr>
-            <p:cNvPr id="150" name="rc150"/>
+            <p:cNvPr id="153" name="rc153"/>
             <p:cNvSpPr/>
             <p:nvPr/>
           </p:nvSpPr>
@@ -8063,7 +8186,7 @@
         </p:sp>
         <p:sp>
           <p:nvSpPr>
-            <p:cNvPr id="151" name="pl151"/>
+            <p:cNvPr id="154" name="pl154"/>
             <p:cNvSpPr/>
             <p:nvPr/>
           </p:nvSpPr>
@@ -8106,7 +8229,7 @@
         </p:sp>
         <p:sp>
           <p:nvSpPr>
-            <p:cNvPr id="152" name="pl152"/>
+            <p:cNvPr id="155" name="pl155"/>
             <p:cNvSpPr/>
             <p:nvPr/>
           </p:nvSpPr>
@@ -8149,7 +8272,7 @@
         </p:sp>
         <p:sp>
           <p:nvSpPr>
-            <p:cNvPr id="153" name="pl153"/>
+            <p:cNvPr id="156" name="pl156"/>
             <p:cNvSpPr/>
             <p:nvPr/>
           </p:nvSpPr>
@@ -8192,7 +8315,7 @@
         </p:sp>
         <p:sp>
           <p:nvSpPr>
-            <p:cNvPr id="154" name="pl154"/>
+            <p:cNvPr id="157" name="pl157"/>
             <p:cNvSpPr/>
             <p:nvPr/>
           </p:nvSpPr>
@@ -8235,7 +8358,7 @@
         </p:sp>
         <p:sp>
           <p:nvSpPr>
-            <p:cNvPr id="155" name="pl155"/>
+            <p:cNvPr id="158" name="pl158"/>
             <p:cNvSpPr/>
             <p:nvPr/>
           </p:nvSpPr>
@@ -8278,24 +8401,24 @@
         </p:sp>
         <p:sp>
           <p:nvSpPr>
-            <p:cNvPr id="156" name="pl156"/>
-            <p:cNvSpPr/>
-            <p:nvPr/>
-          </p:nvSpPr>
-          <p:spPr>
-            <a:xfrm>
-              <a:off x="3279928" y="5546800"/>
-              <a:ext cx="2241507" cy="0"/>
+            <p:cNvPr id="159" name="pl159"/>
+            <p:cNvSpPr/>
+            <p:nvPr/>
+          </p:nvSpPr>
+          <p:spPr>
+            <a:xfrm>
+              <a:off x="3349012" y="5546800"/>
+              <a:ext cx="2173598" cy="0"/>
             </a:xfrm>
             <a:custGeom>
               <a:avLst/>
               <a:pathLst>
-                <a:path w="2241507" h="0">
+                <a:path w="2173598" h="0">
                   <a:moveTo>
                     <a:pt x="0" y="0"/>
                   </a:moveTo>
                   <a:lnTo>
-                    <a:pt x="2241507" y="0"/>
+                    <a:pt x="2173598" y="0"/>
                   </a:lnTo>
                 </a:path>
               </a:pathLst>
@@ -8318,24 +8441,24 @@
         </p:sp>
         <p:sp>
           <p:nvSpPr>
-            <p:cNvPr id="157" name="pl157"/>
-            <p:cNvSpPr/>
-            <p:nvPr/>
-          </p:nvSpPr>
-          <p:spPr>
-            <a:xfrm>
-              <a:off x="3544053" y="5299542"/>
-              <a:ext cx="2337551" cy="0"/>
+            <p:cNvPr id="160" name="pl160"/>
+            <p:cNvSpPr/>
+            <p:nvPr/>
+          </p:nvSpPr>
+          <p:spPr>
+            <a:xfrm>
+              <a:off x="3600880" y="5299542"/>
+              <a:ext cx="2265899" cy="0"/>
             </a:xfrm>
             <a:custGeom>
               <a:avLst/>
               <a:pathLst>
-                <a:path w="2337551" h="0">
+                <a:path w="2265899" h="0">
                   <a:moveTo>
                     <a:pt x="0" y="0"/>
                   </a:moveTo>
                   <a:lnTo>
-                    <a:pt x="2337551" y="0"/>
+                    <a:pt x="2265899" y="0"/>
                   </a:lnTo>
                 </a:path>
               </a:pathLst>
@@ -8358,24 +8481,24 @@
         </p:sp>
         <p:sp>
           <p:nvSpPr>
-            <p:cNvPr id="158" name="pl158"/>
-            <p:cNvSpPr/>
-            <p:nvPr/>
-          </p:nvSpPr>
-          <p:spPr>
-            <a:xfrm>
-              <a:off x="3440441" y="5423171"/>
-              <a:ext cx="2284365" cy="0"/>
+            <p:cNvPr id="161" name="pl161"/>
+            <p:cNvSpPr/>
+            <p:nvPr/>
+          </p:nvSpPr>
+          <p:spPr>
+            <a:xfrm>
+              <a:off x="3482604" y="5423171"/>
+              <a:ext cx="2215859" cy="0"/>
             </a:xfrm>
             <a:custGeom>
               <a:avLst/>
               <a:pathLst>
-                <a:path w="2284365" h="0">
+                <a:path w="2215859" h="0">
                   <a:moveTo>
                     <a:pt x="0" y="0"/>
                   </a:moveTo>
                   <a:lnTo>
-                    <a:pt x="2284365" y="0"/>
+                    <a:pt x="2215859" y="0"/>
                   </a:lnTo>
                 </a:path>
               </a:pathLst>
@@ -8398,24 +8521,24 @@
         </p:sp>
         <p:sp>
           <p:nvSpPr>
-            <p:cNvPr id="159" name="pl159"/>
-            <p:cNvSpPr/>
-            <p:nvPr/>
-          </p:nvSpPr>
-          <p:spPr>
-            <a:xfrm>
-              <a:off x="3489346" y="5016962"/>
-              <a:ext cx="2230601" cy="0"/>
+            <p:cNvPr id="162" name="pl162"/>
+            <p:cNvSpPr/>
+            <p:nvPr/>
+          </p:nvSpPr>
+          <p:spPr>
+            <a:xfrm>
+              <a:off x="3509315" y="5016962"/>
+              <a:ext cx="2140312" cy="0"/>
             </a:xfrm>
             <a:custGeom>
               <a:avLst/>
               <a:pathLst>
-                <a:path w="2230601" h="0">
+                <a:path w="2140312" h="0">
                   <a:moveTo>
                     <a:pt x="0" y="0"/>
                   </a:moveTo>
                   <a:lnTo>
-                    <a:pt x="2230601" y="0"/>
+                    <a:pt x="2140312" y="0"/>
                   </a:lnTo>
                 </a:path>
               </a:pathLst>
@@ -8438,24 +8561,24 @@
         </p:sp>
         <p:sp>
           <p:nvSpPr>
-            <p:cNvPr id="160" name="pl160"/>
-            <p:cNvSpPr/>
-            <p:nvPr/>
-          </p:nvSpPr>
-          <p:spPr>
-            <a:xfrm>
-              <a:off x="3727853" y="4769704"/>
-              <a:ext cx="2316915" cy="0"/>
+            <p:cNvPr id="163" name="pl163"/>
+            <p:cNvSpPr/>
+            <p:nvPr/>
+          </p:nvSpPr>
+          <p:spPr>
+            <a:xfrm>
+              <a:off x="3735886" y="4769704"/>
+              <a:ext cx="2222076" cy="0"/>
             </a:xfrm>
             <a:custGeom>
               <a:avLst/>
               <a:pathLst>
-                <a:path w="2316915" h="0">
+                <a:path w="2222076" h="0">
                   <a:moveTo>
                     <a:pt x="0" y="0"/>
                   </a:moveTo>
                   <a:lnTo>
-                    <a:pt x="2316915" y="0"/>
+                    <a:pt x="2222076" y="0"/>
                   </a:lnTo>
                 </a:path>
               </a:pathLst>
@@ -8478,24 +8601,24 @@
         </p:sp>
         <p:sp>
           <p:nvSpPr>
-            <p:cNvPr id="161" name="pl161"/>
-            <p:cNvSpPr/>
-            <p:nvPr/>
-          </p:nvSpPr>
-          <p:spPr>
-            <a:xfrm>
-              <a:off x="3643338" y="4893333"/>
-              <a:ext cx="2270395" cy="0"/>
+            <p:cNvPr id="164" name="pl164"/>
+            <p:cNvSpPr/>
+            <p:nvPr/>
+          </p:nvSpPr>
+          <p:spPr>
+            <a:xfrm>
+              <a:off x="3636468" y="4893333"/>
+              <a:ext cx="2179615" cy="0"/>
             </a:xfrm>
             <a:custGeom>
               <a:avLst/>
               <a:pathLst>
-                <a:path w="2270395" h="0">
+                <a:path w="2179615" h="0">
                   <a:moveTo>
                     <a:pt x="0" y="0"/>
                   </a:moveTo>
                   <a:lnTo>
-                    <a:pt x="2270395" y="0"/>
+                    <a:pt x="2179615" y="0"/>
                   </a:lnTo>
                 </a:path>
               </a:pathLst>
@@ -8518,24 +8641,24 @@
         </p:sp>
         <p:sp>
           <p:nvSpPr>
-            <p:cNvPr id="162" name="pl162"/>
-            <p:cNvSpPr/>
-            <p:nvPr/>
-          </p:nvSpPr>
-          <p:spPr>
-            <a:xfrm>
-              <a:off x="3603197" y="4487124"/>
-              <a:ext cx="2397893" cy="0"/>
+            <p:cNvPr id="165" name="pl165"/>
+            <p:cNvSpPr/>
+            <p:nvPr/>
+          </p:nvSpPr>
+          <p:spPr>
+            <a:xfrm>
+              <a:off x="3669725" y="4487124"/>
+              <a:ext cx="2346347" cy="0"/>
             </a:xfrm>
             <a:custGeom>
               <a:avLst/>
               <a:pathLst>
-                <a:path w="2397893" h="0">
+                <a:path w="2346347" h="0">
                   <a:moveTo>
                     <a:pt x="0" y="0"/>
                   </a:moveTo>
                   <a:lnTo>
-                    <a:pt x="2397893" y="0"/>
+                    <a:pt x="2346347" y="0"/>
                   </a:lnTo>
                 </a:path>
               </a:pathLst>
@@ -8558,24 +8681,24 @@
         </p:sp>
         <p:sp>
           <p:nvSpPr>
-            <p:cNvPr id="163" name="pl163"/>
-            <p:cNvSpPr/>
-            <p:nvPr/>
-          </p:nvSpPr>
-          <p:spPr>
-            <a:xfrm>
-              <a:off x="3911387" y="4239866"/>
-              <a:ext cx="2535965" cy="0"/>
+            <p:cNvPr id="166" name="pl166"/>
+            <p:cNvSpPr/>
+            <p:nvPr/>
+          </p:nvSpPr>
+          <p:spPr>
+            <a:xfrm>
+              <a:off x="3965701" y="4239866"/>
+              <a:ext cx="2481652" cy="0"/>
             </a:xfrm>
             <a:custGeom>
               <a:avLst/>
               <a:pathLst>
-                <a:path w="2535965" h="0">
+                <a:path w="2481652" h="0">
                   <a:moveTo>
                     <a:pt x="0" y="0"/>
                   </a:moveTo>
                   <a:lnTo>
-                    <a:pt x="2535965" y="0"/>
+                    <a:pt x="2481652" y="0"/>
                   </a:lnTo>
                 </a:path>
               </a:pathLst>
@@ -8598,24 +8721,24 @@
         </p:sp>
         <p:sp>
           <p:nvSpPr>
-            <p:cNvPr id="164" name="pl164"/>
-            <p:cNvSpPr/>
-            <p:nvPr/>
-          </p:nvSpPr>
-          <p:spPr>
-            <a:xfrm>
-              <a:off x="3800464" y="4363495"/>
-              <a:ext cx="2461087" cy="0"/>
+            <p:cNvPr id="167" name="pl167"/>
+            <p:cNvSpPr/>
+            <p:nvPr/>
+          </p:nvSpPr>
+          <p:spPr>
+            <a:xfrm>
+              <a:off x="3851667" y="4363495"/>
+              <a:ext cx="2408988" cy="0"/>
             </a:xfrm>
             <a:custGeom>
               <a:avLst/>
               <a:pathLst>
-                <a:path w="2461087" h="0">
+                <a:path w="2408988" h="0">
                   <a:moveTo>
                     <a:pt x="0" y="0"/>
                   </a:moveTo>
                   <a:lnTo>
-                    <a:pt x="2461087" y="0"/>
+                    <a:pt x="2408988" y="0"/>
                   </a:lnTo>
                 </a:path>
               </a:pathLst>
@@ -8638,24 +8761,24 @@
         </p:sp>
         <p:sp>
           <p:nvSpPr>
-            <p:cNvPr id="165" name="pl165"/>
-            <p:cNvSpPr/>
-            <p:nvPr/>
-          </p:nvSpPr>
-          <p:spPr>
-            <a:xfrm>
-              <a:off x="2385688" y="3957286"/>
-              <a:ext cx="1973169" cy="0"/>
+            <p:cNvPr id="168" name="pl168"/>
+            <p:cNvSpPr/>
+            <p:nvPr/>
+          </p:nvSpPr>
+          <p:spPr>
+            <a:xfrm>
+              <a:off x="2370369" y="3957286"/>
+              <a:ext cx="1877705" cy="0"/>
             </a:xfrm>
             <a:custGeom>
               <a:avLst/>
               <a:pathLst>
-                <a:path w="1973169" h="0">
+                <a:path w="1877705" h="0">
                   <a:moveTo>
                     <a:pt x="0" y="0"/>
                   </a:moveTo>
                   <a:lnTo>
-                    <a:pt x="1973169" y="0"/>
+                    <a:pt x="1877705" y="0"/>
                   </a:lnTo>
                 </a:path>
               </a:pathLst>
@@ -8678,24 +8801,24 @@
         </p:sp>
         <p:sp>
           <p:nvSpPr>
-            <p:cNvPr id="166" name="pl166"/>
-            <p:cNvSpPr/>
-            <p:nvPr/>
-          </p:nvSpPr>
-          <p:spPr>
-            <a:xfrm>
-              <a:off x="2726994" y="3710028"/>
-              <a:ext cx="2087081" cy="0"/>
+            <p:cNvPr id="169" name="pl169"/>
+            <p:cNvSpPr/>
+            <p:nvPr/>
+          </p:nvSpPr>
+          <p:spPr>
+            <a:xfrm>
+              <a:off x="2696696" y="3710028"/>
+              <a:ext cx="1987279" cy="0"/>
             </a:xfrm>
             <a:custGeom>
               <a:avLst/>
               <a:pathLst>
-                <a:path w="2087081" h="0">
+                <a:path w="1987279" h="0">
                   <a:moveTo>
                     <a:pt x="0" y="0"/>
                   </a:moveTo>
                   <a:lnTo>
-                    <a:pt x="2087081" y="0"/>
+                    <a:pt x="1987279" y="0"/>
                   </a:lnTo>
                 </a:path>
               </a:pathLst>
@@ -8718,24 +8841,24 @@
         </p:sp>
         <p:sp>
           <p:nvSpPr>
-            <p:cNvPr id="167" name="pl167"/>
-            <p:cNvSpPr/>
-            <p:nvPr/>
-          </p:nvSpPr>
-          <p:spPr>
-            <a:xfrm>
-              <a:off x="2524687" y="3833657"/>
-              <a:ext cx="2004539" cy="0"/>
+            <p:cNvPr id="170" name="pl170"/>
+            <p:cNvSpPr/>
+            <p:nvPr/>
+          </p:nvSpPr>
+          <p:spPr>
+            <a:xfrm>
+              <a:off x="2483971" y="3833657"/>
+              <a:ext cx="1911527" cy="0"/>
             </a:xfrm>
             <a:custGeom>
               <a:avLst/>
               <a:pathLst>
-                <a:path w="2004539" h="0">
+                <a:path w="1911527" h="0">
                   <a:moveTo>
                     <a:pt x="0" y="0"/>
                   </a:moveTo>
                   <a:lnTo>
-                    <a:pt x="2004539" y="0"/>
+                    <a:pt x="1911527" y="0"/>
                   </a:lnTo>
                 </a:path>
               </a:pathLst>
@@ -8758,24 +8881,24 @@
         </p:sp>
         <p:sp>
           <p:nvSpPr>
-            <p:cNvPr id="168" name="pl168"/>
-            <p:cNvSpPr/>
-            <p:nvPr/>
-          </p:nvSpPr>
-          <p:spPr>
-            <a:xfrm>
-              <a:off x="3087317" y="5608614"/>
-              <a:ext cx="2047512" cy="0"/>
+            <p:cNvPr id="171" name="pl171"/>
+            <p:cNvSpPr/>
+            <p:nvPr/>
+          </p:nvSpPr>
+          <p:spPr>
+            <a:xfrm>
+              <a:off x="3036343" y="5608614"/>
+              <a:ext cx="1961406" cy="0"/>
             </a:xfrm>
             <a:custGeom>
               <a:avLst/>
               <a:pathLst>
-                <a:path w="2047512" h="0">
+                <a:path w="1961406" h="0">
                   <a:moveTo>
                     <a:pt x="0" y="0"/>
                   </a:moveTo>
                   <a:lnTo>
-                    <a:pt x="2047512" y="0"/>
+                    <a:pt x="1961406" y="0"/>
                   </a:lnTo>
                 </a:path>
               </a:pathLst>
@@ -8798,24 +8921,24 @@
         </p:sp>
         <p:sp>
           <p:nvSpPr>
-            <p:cNvPr id="169" name="pl169"/>
-            <p:cNvSpPr/>
-            <p:nvPr/>
-          </p:nvSpPr>
-          <p:spPr>
-            <a:xfrm>
-              <a:off x="3128093" y="5361356"/>
-              <a:ext cx="2038562" cy="0"/>
+            <p:cNvPr id="172" name="pl172"/>
+            <p:cNvSpPr/>
+            <p:nvPr/>
+          </p:nvSpPr>
+          <p:spPr>
+            <a:xfrm>
+              <a:off x="3078416" y="5361356"/>
+              <a:ext cx="1953980" cy="0"/>
             </a:xfrm>
             <a:custGeom>
               <a:avLst/>
               <a:pathLst>
-                <a:path w="2038562" h="0">
+                <a:path w="1953980" h="0">
                   <a:moveTo>
                     <a:pt x="0" y="0"/>
                   </a:moveTo>
                   <a:lnTo>
-                    <a:pt x="2038562" y="0"/>
+                    <a:pt x="1953980" y="0"/>
                   </a:lnTo>
                 </a:path>
               </a:pathLst>
@@ -8838,24 +8961,24 @@
         </p:sp>
         <p:sp>
           <p:nvSpPr>
-            <p:cNvPr id="170" name="pl170"/>
-            <p:cNvSpPr/>
-            <p:nvPr/>
-          </p:nvSpPr>
-          <p:spPr>
-            <a:xfrm>
-              <a:off x="3108675" y="5484985"/>
-              <a:ext cx="2027673" cy="0"/>
+            <p:cNvPr id="173" name="pl173"/>
+            <p:cNvSpPr/>
+            <p:nvPr/>
+          </p:nvSpPr>
+          <p:spPr>
+            <a:xfrm>
+              <a:off x="3052657" y="5484985"/>
+              <a:ext cx="1943129" cy="0"/>
             </a:xfrm>
             <a:custGeom>
               <a:avLst/>
               <a:pathLst>
-                <a:path w="2027673" h="0">
+                <a:path w="1943129" h="0">
                   <a:moveTo>
                     <a:pt x="0" y="0"/>
                   </a:moveTo>
                   <a:lnTo>
-                    <a:pt x="2027673" y="0"/>
+                    <a:pt x="1943129" y="0"/>
                   </a:lnTo>
                 </a:path>
               </a:pathLst>
@@ -8878,24 +9001,24 @@
         </p:sp>
         <p:sp>
           <p:nvSpPr>
-            <p:cNvPr id="171" name="pl171"/>
-            <p:cNvSpPr/>
-            <p:nvPr/>
-          </p:nvSpPr>
-          <p:spPr>
-            <a:xfrm>
-              <a:off x="3024579" y="5078776"/>
-              <a:ext cx="2045742" cy="0"/>
+            <p:cNvPr id="174" name="pl174"/>
+            <p:cNvSpPr/>
+            <p:nvPr/>
+          </p:nvSpPr>
+          <p:spPr>
+            <a:xfrm>
+              <a:off x="2975686" y="5078776"/>
+              <a:ext cx="1956028" cy="0"/>
             </a:xfrm>
             <a:custGeom>
               <a:avLst/>
               <a:pathLst>
-                <a:path w="2045742" h="0">
+                <a:path w="1956028" h="0">
                   <a:moveTo>
                     <a:pt x="0" y="0"/>
                   </a:moveTo>
                   <a:lnTo>
-                    <a:pt x="2045742" y="0"/>
+                    <a:pt x="1956028" y="0"/>
                   </a:lnTo>
                 </a:path>
               </a:pathLst>
@@ -8918,24 +9041,24 @@
         </p:sp>
         <p:sp>
           <p:nvSpPr>
-            <p:cNvPr id="172" name="pl172"/>
-            <p:cNvSpPr/>
-            <p:nvPr/>
-          </p:nvSpPr>
-          <p:spPr>
-            <a:xfrm>
-              <a:off x="3055183" y="4831518"/>
-              <a:ext cx="2031954" cy="0"/>
+            <p:cNvPr id="175" name="pl175"/>
+            <p:cNvSpPr/>
+            <p:nvPr/>
+          </p:nvSpPr>
+          <p:spPr>
+            <a:xfrm>
+              <a:off x="3007215" y="4831518"/>
+              <a:ext cx="1943446" cy="0"/>
             </a:xfrm>
             <a:custGeom>
               <a:avLst/>
               <a:pathLst>
-                <a:path w="2031954" h="0">
+                <a:path w="1943446" h="0">
                   <a:moveTo>
                     <a:pt x="0" y="0"/>
                   </a:moveTo>
                   <a:lnTo>
-                    <a:pt x="2031954" y="0"/>
+                    <a:pt x="1943446" y="0"/>
                   </a:lnTo>
                 </a:path>
               </a:pathLst>
@@ -8958,24 +9081,24 @@
         </p:sp>
         <p:sp>
           <p:nvSpPr>
-            <p:cNvPr id="173" name="pl173"/>
-            <p:cNvSpPr/>
-            <p:nvPr/>
-          </p:nvSpPr>
-          <p:spPr>
-            <a:xfrm>
-              <a:off x="3038244" y="4955147"/>
-              <a:ext cx="2022836" cy="0"/>
+            <p:cNvPr id="176" name="pl176"/>
+            <p:cNvSpPr/>
+            <p:nvPr/>
+          </p:nvSpPr>
+          <p:spPr>
+            <a:xfrm>
+              <a:off x="2985152" y="4955147"/>
+              <a:ext cx="1934572" cy="0"/>
             </a:xfrm>
             <a:custGeom>
               <a:avLst/>
               <a:pathLst>
-                <a:path w="2022836" h="0">
+                <a:path w="1934572" h="0">
                   <a:moveTo>
                     <a:pt x="0" y="0"/>
                   </a:moveTo>
                   <a:lnTo>
-                    <a:pt x="2022836" y="0"/>
+                    <a:pt x="1934572" y="0"/>
                   </a:lnTo>
                 </a:path>
               </a:pathLst>
@@ -8998,24 +9121,24 @@
         </p:sp>
         <p:sp>
           <p:nvSpPr>
-            <p:cNvPr id="174" name="pl174"/>
-            <p:cNvSpPr/>
-            <p:nvPr/>
-          </p:nvSpPr>
-          <p:spPr>
-            <a:xfrm>
-              <a:off x="3139407" y="4548938"/>
-              <a:ext cx="2098173" cy="0"/>
+            <p:cNvPr id="177" name="pl177"/>
+            <p:cNvSpPr/>
+            <p:nvPr/>
+          </p:nvSpPr>
+          <p:spPr>
+            <a:xfrm>
+              <a:off x="3089615" y="4548938"/>
+              <a:ext cx="2013967" cy="0"/>
             </a:xfrm>
             <a:custGeom>
               <a:avLst/>
               <a:pathLst>
-                <a:path w="2098173" h="0">
+                <a:path w="2013967" h="0">
                   <a:moveTo>
                     <a:pt x="0" y="0"/>
                   </a:moveTo>
                   <a:lnTo>
-                    <a:pt x="2098173" y="0"/>
+                    <a:pt x="2013967" y="0"/>
                   </a:lnTo>
                 </a:path>
               </a:pathLst>
@@ -9038,24 +9161,24 @@
         </p:sp>
         <p:sp>
           <p:nvSpPr>
-            <p:cNvPr id="175" name="pl175"/>
-            <p:cNvSpPr/>
-            <p:nvPr/>
-          </p:nvSpPr>
-          <p:spPr>
-            <a:xfrm>
-              <a:off x="3189517" y="4301680"/>
-              <a:ext cx="2097829" cy="0"/>
+            <p:cNvPr id="178" name="pl178"/>
+            <p:cNvSpPr/>
+            <p:nvPr/>
+          </p:nvSpPr>
+          <p:spPr>
+            <a:xfrm>
+              <a:off x="3140960" y="4301680"/>
+              <a:ext cx="2015154" cy="0"/>
             </a:xfrm>
             <a:custGeom>
               <a:avLst/>
               <a:pathLst>
-                <a:path w="2097829" h="0">
+                <a:path w="2015154" h="0">
                   <a:moveTo>
                     <a:pt x="0" y="0"/>
                   </a:moveTo>
                   <a:lnTo>
-                    <a:pt x="2097829" y="0"/>
+                    <a:pt x="2015154" y="0"/>
                   </a:lnTo>
                 </a:path>
               </a:pathLst>
@@ -9078,24 +9201,24 @@
         </p:sp>
         <p:sp>
           <p:nvSpPr>
-            <p:cNvPr id="176" name="pl176"/>
-            <p:cNvSpPr/>
-            <p:nvPr/>
-          </p:nvSpPr>
-          <p:spPr>
-            <a:xfrm>
-              <a:off x="3161710" y="4425309"/>
-              <a:ext cx="2084240" cy="0"/>
+            <p:cNvPr id="179" name="pl179"/>
+            <p:cNvSpPr/>
+            <p:nvPr/>
+          </p:nvSpPr>
+          <p:spPr>
+            <a:xfrm>
+              <a:off x="3109612" y="4425309"/>
+              <a:ext cx="2001963" cy="0"/>
             </a:xfrm>
             <a:custGeom>
               <a:avLst/>
               <a:pathLst>
-                <a:path w="2084240" h="0">
+                <a:path w="2001963" h="0">
                   <a:moveTo>
                     <a:pt x="0" y="0"/>
                   </a:moveTo>
                   <a:lnTo>
-                    <a:pt x="2084240" y="0"/>
+                    <a:pt x="2001963" y="0"/>
                   </a:lnTo>
                 </a:path>
               </a:pathLst>
@@ -9118,24 +9241,24 @@
         </p:sp>
         <p:sp>
           <p:nvSpPr>
-            <p:cNvPr id="177" name="pl177"/>
-            <p:cNvSpPr/>
-            <p:nvPr/>
-          </p:nvSpPr>
-          <p:spPr>
-            <a:xfrm>
-              <a:off x="2916540" y="4019100"/>
-              <a:ext cx="1954537" cy="0"/>
+            <p:cNvPr id="180" name="pl180"/>
+            <p:cNvSpPr/>
+            <p:nvPr/>
+          </p:nvSpPr>
+          <p:spPr>
+            <a:xfrm>
+              <a:off x="2861996" y="4019100"/>
+              <a:ext cx="1861678" cy="0"/>
             </a:xfrm>
             <a:custGeom>
               <a:avLst/>
               <a:pathLst>
-                <a:path w="1954537" h="0">
+                <a:path w="1861678" h="0">
                   <a:moveTo>
                     <a:pt x="0" y="0"/>
                   </a:moveTo>
                   <a:lnTo>
-                    <a:pt x="1954537" y="0"/>
+                    <a:pt x="1861678" y="0"/>
                   </a:lnTo>
                 </a:path>
               </a:pathLst>
@@ -9158,24 +9281,24 @@
         </p:sp>
         <p:sp>
           <p:nvSpPr>
-            <p:cNvPr id="178" name="pl178"/>
-            <p:cNvSpPr/>
-            <p:nvPr/>
-          </p:nvSpPr>
-          <p:spPr>
-            <a:xfrm>
-              <a:off x="2959430" y="3771842"/>
-              <a:ext cx="1941258" cy="0"/>
+            <p:cNvPr id="181" name="pl181"/>
+            <p:cNvSpPr/>
+            <p:nvPr/>
+          </p:nvSpPr>
+          <p:spPr>
+            <a:xfrm>
+              <a:off x="2903246" y="3771842"/>
+              <a:ext cx="1849109" cy="0"/>
             </a:xfrm>
             <a:custGeom>
               <a:avLst/>
               <a:pathLst>
-                <a:path w="1941258" h="0">
+                <a:path w="1849109" h="0">
                   <a:moveTo>
                     <a:pt x="0" y="0"/>
                   </a:moveTo>
                   <a:lnTo>
-                    <a:pt x="1941258" y="0"/>
+                    <a:pt x="1849109" y="0"/>
                   </a:lnTo>
                 </a:path>
               </a:pathLst>
@@ -9198,24 +9321,24 @@
         </p:sp>
         <p:sp>
           <p:nvSpPr>
-            <p:cNvPr id="179" name="pl179"/>
-            <p:cNvSpPr/>
-            <p:nvPr/>
-          </p:nvSpPr>
-          <p:spPr>
-            <a:xfrm>
-              <a:off x="2928303" y="3895471"/>
-              <a:ext cx="1923877" cy="0"/>
+            <p:cNvPr id="182" name="pl182"/>
+            <p:cNvSpPr/>
+            <p:nvPr/>
+          </p:nvSpPr>
+          <p:spPr>
+            <a:xfrm>
+              <a:off x="2868984" y="3895471"/>
+              <a:ext cx="1834619" cy="0"/>
             </a:xfrm>
             <a:custGeom>
               <a:avLst/>
               <a:pathLst>
-                <a:path w="1923877" h="0">
+                <a:path w="1834619" h="0">
                   <a:moveTo>
                     <a:pt x="0" y="0"/>
                   </a:moveTo>
                   <a:lnTo>
-                    <a:pt x="1923877" y="0"/>
+                    <a:pt x="1834619" y="0"/>
                   </a:lnTo>
                 </a:path>
               </a:pathLst>
@@ -9238,13 +9361,13 @@
         </p:sp>
         <p:sp>
           <p:nvSpPr>
-            <p:cNvPr id="180" name="pg180"/>
-            <p:cNvSpPr/>
-            <p:nvPr/>
-          </p:nvSpPr>
-          <p:spPr>
-            <a:xfrm>
-              <a:off x="4295248" y="5502507"/>
+            <p:cNvPr id="183" name="pg183"/>
+            <p:cNvSpPr/>
+            <p:nvPr/>
+          </p:nvSpPr>
+          <p:spPr>
+            <a:xfrm>
+              <a:off x="4332491" y="5502507"/>
               <a:ext cx="76717" cy="66439"/>
             </a:xfrm>
             <a:custGeom>
@@ -9278,13 +9401,13 @@
         </p:sp>
         <p:sp>
           <p:nvSpPr>
-            <p:cNvPr id="181" name="pg181"/>
-            <p:cNvSpPr/>
-            <p:nvPr/>
-          </p:nvSpPr>
-          <p:spPr>
-            <a:xfrm>
-              <a:off x="4603864" y="5255249"/>
+            <p:cNvPr id="184" name="pg184"/>
+            <p:cNvSpPr/>
+            <p:nvPr/>
+          </p:nvSpPr>
+          <p:spPr>
+            <a:xfrm>
+              <a:off x="4627105" y="5255249"/>
               <a:ext cx="76717" cy="66439"/>
             </a:xfrm>
             <a:custGeom>
@@ -9318,13 +9441,13 @@
         </p:sp>
         <p:sp>
           <p:nvSpPr>
-            <p:cNvPr id="182" name="pg182"/>
-            <p:cNvSpPr/>
-            <p:nvPr/>
-          </p:nvSpPr>
-          <p:spPr>
-            <a:xfrm>
-              <a:off x="4475924" y="5378878"/>
+            <p:cNvPr id="185" name="pg185"/>
+            <p:cNvSpPr/>
+            <p:nvPr/>
+          </p:nvSpPr>
+          <p:spPr>
+            <a:xfrm>
+              <a:off x="4485788" y="5378878"/>
               <a:ext cx="76717" cy="66439"/>
             </a:xfrm>
             <a:custGeom>
@@ -9358,13 +9481,13 @@
         </p:sp>
         <p:sp>
           <p:nvSpPr>
-            <p:cNvPr id="183" name="pg183"/>
-            <p:cNvSpPr/>
-            <p:nvPr/>
-          </p:nvSpPr>
-          <p:spPr>
-            <a:xfrm>
-              <a:off x="4501287" y="4972669"/>
+            <p:cNvPr id="186" name="pg186"/>
+            <p:cNvSpPr/>
+            <p:nvPr/>
+          </p:nvSpPr>
+          <p:spPr>
+            <a:xfrm>
+              <a:off x="4479115" y="4972669"/>
               <a:ext cx="76717" cy="66439"/>
             </a:xfrm>
             <a:custGeom>
@@ -9398,13 +9521,13 @@
         </p:sp>
         <p:sp>
           <p:nvSpPr>
-            <p:cNvPr id="184" name="pg184"/>
-            <p:cNvSpPr/>
-            <p:nvPr/>
-          </p:nvSpPr>
-          <p:spPr>
-            <a:xfrm>
-              <a:off x="4779818" y="4725411"/>
+            <p:cNvPr id="187" name="pg187"/>
+            <p:cNvSpPr/>
+            <p:nvPr/>
+          </p:nvSpPr>
+          <p:spPr>
+            <a:xfrm>
+              <a:off x="4743612" y="4725411"/>
               <a:ext cx="76717" cy="66439"/>
             </a:xfrm>
             <a:custGeom>
@@ -9438,13 +9561,13 @@
         </p:sp>
         <p:sp>
           <p:nvSpPr>
-            <p:cNvPr id="185" name="pg185"/>
-            <p:cNvSpPr/>
-            <p:nvPr/>
-          </p:nvSpPr>
-          <p:spPr>
-            <a:xfrm>
-              <a:off x="4674033" y="4849040"/>
+            <p:cNvPr id="188" name="pg188"/>
+            <p:cNvSpPr/>
+            <p:nvPr/>
+          </p:nvSpPr>
+          <p:spPr>
+            <a:xfrm>
+              <a:off x="4624623" y="4849040"/>
               <a:ext cx="76717" cy="66439"/>
             </a:xfrm>
             <a:custGeom>
@@ -9478,13 +9601,13 @@
         </p:sp>
         <p:sp>
           <p:nvSpPr>
-            <p:cNvPr id="186" name="pg186"/>
-            <p:cNvSpPr/>
-            <p:nvPr/>
-          </p:nvSpPr>
-          <p:spPr>
-            <a:xfrm>
-              <a:off x="4690155" y="4442831"/>
+            <p:cNvPr id="189" name="pg189"/>
+            <p:cNvSpPr/>
+            <p:nvPr/>
+          </p:nvSpPr>
+          <p:spPr>
+            <a:xfrm>
+              <a:off x="4732058" y="4442831"/>
               <a:ext cx="76717" cy="66439"/>
             </a:xfrm>
             <a:custGeom>
@@ -9518,13 +9641,13 @@
         </p:sp>
         <p:sp>
           <p:nvSpPr>
-            <p:cNvPr id="187" name="pg187"/>
-            <p:cNvSpPr/>
-            <p:nvPr/>
-          </p:nvSpPr>
-          <p:spPr>
-            <a:xfrm>
-              <a:off x="5061700" y="4195573"/>
+            <p:cNvPr id="190" name="pg190"/>
+            <p:cNvSpPr/>
+            <p:nvPr/>
+          </p:nvSpPr>
+          <p:spPr>
+            <a:xfrm>
+              <a:off x="5090055" y="4195573"/>
               <a:ext cx="76717" cy="66439"/>
             </a:xfrm>
             <a:custGeom>
@@ -9558,13 +9681,13 @@
         </p:sp>
         <p:sp>
           <p:nvSpPr>
-            <p:cNvPr id="188" name="pg188"/>
-            <p:cNvSpPr/>
-            <p:nvPr/>
-          </p:nvSpPr>
-          <p:spPr>
-            <a:xfrm>
-              <a:off x="4916855" y="4319202"/>
+            <p:cNvPr id="191" name="pg191"/>
+            <p:cNvSpPr/>
+            <p:nvPr/>
+          </p:nvSpPr>
+          <p:spPr>
+            <a:xfrm>
+              <a:off x="4943069" y="4319202"/>
               <a:ext cx="76717" cy="66439"/>
             </a:xfrm>
             <a:custGeom>
@@ -9598,13 +9721,13 @@
         </p:sp>
         <p:sp>
           <p:nvSpPr>
-            <p:cNvPr id="189" name="pg189"/>
-            <p:cNvSpPr/>
-            <p:nvPr/>
-          </p:nvSpPr>
-          <p:spPr>
-            <a:xfrm>
-              <a:off x="3275554" y="3912993"/>
+            <p:cNvPr id="192" name="pg192"/>
+            <p:cNvSpPr/>
+            <p:nvPr/>
+          </p:nvSpPr>
+          <p:spPr>
+            <a:xfrm>
+              <a:off x="3215561" y="3912993"/>
               <a:ext cx="76717" cy="66439"/>
             </a:xfrm>
             <a:custGeom>
@@ -9638,13 +9761,13 @@
         </p:sp>
         <p:sp>
           <p:nvSpPr>
-            <p:cNvPr id="190" name="pg190"/>
-            <p:cNvSpPr/>
-            <p:nvPr/>
-          </p:nvSpPr>
-          <p:spPr>
-            <a:xfrm>
-              <a:off x="3669845" y="3665735"/>
+            <p:cNvPr id="193" name="pg193"/>
+            <p:cNvSpPr/>
+            <p:nvPr/>
+          </p:nvSpPr>
+          <p:spPr>
+            <a:xfrm>
+              <a:off x="3592845" y="3665735"/>
               <a:ext cx="76717" cy="66439"/>
             </a:xfrm>
             <a:custGeom>
@@ -9678,13 +9801,13 @@
         </p:sp>
         <p:sp>
           <p:nvSpPr>
-            <p:cNvPr id="191" name="pg191"/>
-            <p:cNvSpPr/>
-            <p:nvPr/>
-          </p:nvSpPr>
-          <p:spPr>
-            <a:xfrm>
-              <a:off x="3429462" y="3789364"/>
+            <p:cNvPr id="194" name="pg194"/>
+            <p:cNvSpPr/>
+            <p:nvPr/>
+          </p:nvSpPr>
+          <p:spPr>
+            <a:xfrm>
+              <a:off x="3344983" y="3789364"/>
               <a:ext cx="76717" cy="66439"/>
             </a:xfrm>
             <a:custGeom>
@@ -9718,13 +9841,13 @@
         </p:sp>
         <p:sp>
           <p:nvSpPr>
-            <p:cNvPr id="192" name="pt192"/>
-            <p:cNvSpPr/>
-            <p:nvPr/>
-          </p:nvSpPr>
-          <p:spPr>
-            <a:xfrm>
-              <a:off x="4024867" y="5580132"/>
+            <p:cNvPr id="195" name="pt195"/>
+            <p:cNvSpPr/>
+            <p:nvPr/>
+          </p:nvSpPr>
+          <p:spPr>
+            <a:xfrm>
+              <a:off x="3933144" y="5580132"/>
               <a:ext cx="56964" cy="56964"/>
             </a:xfrm>
             <a:prstGeom prst="ellipse">
@@ -9744,13 +9867,13 @@
         </p:sp>
         <p:sp>
           <p:nvSpPr>
-            <p:cNvPr id="193" name="pt193"/>
-            <p:cNvSpPr/>
-            <p:nvPr/>
-          </p:nvSpPr>
-          <p:spPr>
-            <a:xfrm>
-              <a:off x="4061901" y="5332874"/>
+            <p:cNvPr id="196" name="pt196"/>
+            <p:cNvSpPr/>
+            <p:nvPr/>
+          </p:nvSpPr>
+          <p:spPr>
+            <a:xfrm>
+              <a:off x="3972166" y="5332874"/>
               <a:ext cx="56964" cy="56964"/>
             </a:xfrm>
             <a:prstGeom prst="ellipse">
@@ -9770,13 +9893,13 @@
         </p:sp>
         <p:sp>
           <p:nvSpPr>
-            <p:cNvPr id="194" name="pt194"/>
-            <p:cNvSpPr/>
-            <p:nvPr/>
-          </p:nvSpPr>
-          <p:spPr>
-            <a:xfrm>
-              <a:off x="4037494" y="5456503"/>
+            <p:cNvPr id="197" name="pt197"/>
+            <p:cNvSpPr/>
+            <p:nvPr/>
+          </p:nvSpPr>
+          <p:spPr>
+            <a:xfrm>
+              <a:off x="3941395" y="5456503"/>
               <a:ext cx="56964" cy="56964"/>
             </a:xfrm>
             <a:prstGeom prst="ellipse">
@@ -9796,13 +9919,13 @@
         </p:sp>
         <p:sp>
           <p:nvSpPr>
-            <p:cNvPr id="195" name="pt195"/>
-            <p:cNvSpPr/>
-            <p:nvPr/>
-          </p:nvSpPr>
-          <p:spPr>
-            <a:xfrm>
-              <a:off x="3960937" y="5050294"/>
+            <p:cNvPr id="198" name="pt198"/>
+            <p:cNvSpPr/>
+            <p:nvPr/>
+          </p:nvSpPr>
+          <p:spPr>
+            <a:xfrm>
+              <a:off x="3869696" y="5050294"/>
               <a:ext cx="56964" cy="56964"/>
             </a:xfrm>
             <a:prstGeom prst="ellipse">
@@ -9822,13 +9945,13 @@
         </p:sp>
         <p:sp>
           <p:nvSpPr>
-            <p:cNvPr id="196" name="pt196"/>
-            <p:cNvSpPr/>
-            <p:nvPr/>
-          </p:nvSpPr>
-          <p:spPr>
-            <a:xfrm>
-              <a:off x="3985579" y="4803036"/>
+            <p:cNvPr id="199" name="pt199"/>
+            <p:cNvSpPr/>
+            <p:nvPr/>
+          </p:nvSpPr>
+          <p:spPr>
+            <a:xfrm>
+              <a:off x="3895808" y="4803036"/>
               <a:ext cx="56964" cy="56964"/>
             </a:xfrm>
             <a:prstGeom prst="ellipse">
@@ -9848,13 +9971,13 @@
         </p:sp>
         <p:sp>
           <p:nvSpPr>
-            <p:cNvPr id="197" name="pt197"/>
-            <p:cNvSpPr/>
-            <p:nvPr/>
-          </p:nvSpPr>
-          <p:spPr>
-            <a:xfrm>
-              <a:off x="3964459" y="4926665"/>
+            <p:cNvPr id="200" name="pt200"/>
+            <p:cNvSpPr/>
+            <p:nvPr/>
+          </p:nvSpPr>
+          <p:spPr>
+            <a:xfrm>
+              <a:off x="3869641" y="4926665"/>
               <a:ext cx="56964" cy="56964"/>
             </a:xfrm>
             <a:prstGeom prst="ellipse">
@@ -9874,13 +9997,13 @@
         </p:sp>
         <p:sp>
           <p:nvSpPr>
-            <p:cNvPr id="198" name="pt198"/>
-            <p:cNvSpPr/>
-            <p:nvPr/>
-          </p:nvSpPr>
-          <p:spPr>
-            <a:xfrm>
-              <a:off x="4099901" y="4520456"/>
+            <p:cNvPr id="201" name="pt201"/>
+            <p:cNvSpPr/>
+            <p:nvPr/>
+          </p:nvSpPr>
+          <p:spPr>
+            <a:xfrm>
+              <a:off x="4010209" y="4520456"/>
               <a:ext cx="56964" cy="56964"/>
             </a:xfrm>
             <a:prstGeom prst="ellipse">
@@ -9900,13 +10023,13 @@
         </p:sp>
         <p:sp>
           <p:nvSpPr>
-            <p:cNvPr id="199" name="pt199"/>
-            <p:cNvSpPr/>
-            <p:nvPr/>
-          </p:nvSpPr>
-          <p:spPr>
-            <a:xfrm>
-              <a:off x="4150185" y="4273198"/>
+            <p:cNvPr id="202" name="pt202"/>
+            <p:cNvSpPr/>
+            <p:nvPr/>
+          </p:nvSpPr>
+          <p:spPr>
+            <a:xfrm>
+              <a:off x="4062422" y="4273198"/>
               <a:ext cx="56964" cy="56964"/>
             </a:xfrm>
             <a:prstGeom prst="ellipse">
@@ -9926,13 +10049,13 @@
         </p:sp>
         <p:sp>
           <p:nvSpPr>
-            <p:cNvPr id="200" name="pt200"/>
-            <p:cNvSpPr/>
-            <p:nvPr/>
-          </p:nvSpPr>
-          <p:spPr>
-            <a:xfrm>
-              <a:off x="4116135" y="4396827"/>
+            <p:cNvPr id="203" name="pt203"/>
+            <p:cNvSpPr/>
+            <p:nvPr/>
+          </p:nvSpPr>
+          <p:spPr>
+            <a:xfrm>
+              <a:off x="4024986" y="4396827"/>
               <a:ext cx="56964" cy="56964"/>
             </a:xfrm>
             <a:prstGeom prst="ellipse">
@@ -9952,13 +10075,13 @@
         </p:sp>
         <p:sp>
           <p:nvSpPr>
-            <p:cNvPr id="201" name="pt201"/>
-            <p:cNvSpPr/>
-            <p:nvPr/>
-          </p:nvSpPr>
-          <p:spPr>
-            <a:xfrm>
-              <a:off x="3811448" y="3990618"/>
+            <p:cNvPr id="204" name="pt204"/>
+            <p:cNvSpPr/>
+            <p:nvPr/>
+          </p:nvSpPr>
+          <p:spPr>
+            <a:xfrm>
+              <a:off x="3713114" y="3990618"/>
               <a:ext cx="56964" cy="56964"/>
             </a:xfrm>
             <a:prstGeom prst="ellipse">
@@ -9978,13 +10101,13 @@
         </p:sp>
         <p:sp>
           <p:nvSpPr>
-            <p:cNvPr id="202" name="pt202"/>
-            <p:cNvSpPr/>
-            <p:nvPr/>
-          </p:nvSpPr>
-          <p:spPr>
-            <a:xfrm>
-              <a:off x="3848648" y="3743360"/>
+            <p:cNvPr id="205" name="pt205"/>
+            <p:cNvSpPr/>
+            <p:nvPr/>
+          </p:nvSpPr>
+          <p:spPr>
+            <a:xfrm>
+              <a:off x="3748979" y="3743360"/>
               <a:ext cx="56964" cy="56964"/>
             </a:xfrm>
             <a:prstGeom prst="ellipse">
@@ -10004,13 +10127,13 @@
         </p:sp>
         <p:sp>
           <p:nvSpPr>
-            <p:cNvPr id="203" name="pt203"/>
-            <p:cNvSpPr/>
-            <p:nvPr/>
-          </p:nvSpPr>
-          <p:spPr>
-            <a:xfrm>
-              <a:off x="3809542" y="3866989"/>
+            <p:cNvPr id="206" name="pt206"/>
+            <p:cNvSpPr/>
+            <p:nvPr/>
+          </p:nvSpPr>
+          <p:spPr>
+            <a:xfrm>
+              <a:off x="3708017" y="3866989"/>
               <a:ext cx="56964" cy="56964"/>
             </a:xfrm>
             <a:prstGeom prst="ellipse">
@@ -10030,7 +10153,7 @@
         </p:sp>
         <p:sp>
           <p:nvSpPr>
-            <p:cNvPr id="204" name="pl204"/>
+            <p:cNvPr id="207" name="pl207"/>
             <p:cNvSpPr/>
             <p:nvPr/>
           </p:nvSpPr>
@@ -10070,7 +10193,7 @@
         </p:sp>
         <p:sp>
           <p:nvSpPr>
-            <p:cNvPr id="205" name="tx205"/>
+            <p:cNvPr id="208" name="tx208"/>
             <p:cNvSpPr/>
             <p:nvPr/>
           </p:nvSpPr>
@@ -10113,7 +10236,7 @@
         </p:sp>
         <p:sp>
           <p:nvSpPr>
-            <p:cNvPr id="206" name="tx206"/>
+            <p:cNvPr id="209" name="tx209"/>
             <p:cNvSpPr/>
             <p:nvPr/>
           </p:nvSpPr>
@@ -10156,7 +10279,7 @@
         </p:sp>
         <p:sp>
           <p:nvSpPr>
-            <p:cNvPr id="207" name="tx207"/>
+            <p:cNvPr id="210" name="tx210"/>
             <p:cNvSpPr/>
             <p:nvPr/>
           </p:nvSpPr>
@@ -10199,7 +10322,7 @@
         </p:sp>
         <p:sp>
           <p:nvSpPr>
-            <p:cNvPr id="208" name="tx208"/>
+            <p:cNvPr id="211" name="tx211"/>
             <p:cNvSpPr/>
             <p:nvPr/>
           </p:nvSpPr>
@@ -10242,7 +10365,7 @@
         </p:sp>
         <p:sp>
           <p:nvSpPr>
-            <p:cNvPr id="209" name="pl209"/>
+            <p:cNvPr id="212" name="pl212"/>
             <p:cNvSpPr/>
             <p:nvPr/>
           </p:nvSpPr>
@@ -10282,7 +10405,7 @@
         </p:sp>
         <p:sp>
           <p:nvSpPr>
-            <p:cNvPr id="210" name="pl210"/>
+            <p:cNvPr id="213" name="pl213"/>
             <p:cNvSpPr/>
             <p:nvPr/>
           </p:nvSpPr>
@@ -10322,7 +10445,7 @@
         </p:sp>
         <p:sp>
           <p:nvSpPr>
-            <p:cNvPr id="211" name="pl211"/>
+            <p:cNvPr id="214" name="pl214"/>
             <p:cNvSpPr/>
             <p:nvPr/>
           </p:nvSpPr>
@@ -10362,7 +10485,7 @@
         </p:sp>
         <p:sp>
           <p:nvSpPr>
-            <p:cNvPr id="212" name="pl212"/>
+            <p:cNvPr id="215" name="pl215"/>
             <p:cNvSpPr/>
             <p:nvPr/>
           </p:nvSpPr>
@@ -10402,7 +10525,7 @@
         </p:sp>
         <p:sp>
           <p:nvSpPr>
-            <p:cNvPr id="213" name="pl213"/>
+            <p:cNvPr id="216" name="pl216"/>
             <p:cNvSpPr/>
             <p:nvPr/>
           </p:nvSpPr>
@@ -10442,7 +10565,7 @@
         </p:sp>
         <p:sp>
           <p:nvSpPr>
-            <p:cNvPr id="214" name="pl214"/>
+            <p:cNvPr id="217" name="pl217"/>
             <p:cNvSpPr/>
             <p:nvPr/>
           </p:nvSpPr>
@@ -10482,13 +10605,13 @@
         </p:sp>
         <p:sp>
           <p:nvSpPr>
-            <p:cNvPr id="215" name="pl215"/>
-            <p:cNvSpPr/>
-            <p:nvPr/>
-          </p:nvSpPr>
-          <p:spPr>
-            <a:xfrm>
-              <a:off x="2979044" y="5771981"/>
+            <p:cNvPr id="218" name="pl218"/>
+            <p:cNvSpPr/>
+            <p:nvPr/>
+          </p:nvSpPr>
+          <p:spPr>
+            <a:xfrm>
+              <a:off x="2917375" y="5771981"/>
               <a:ext cx="0" cy="31631"/>
             </a:xfrm>
             <a:custGeom>
@@ -10522,13 +10645,13 @@
         </p:sp>
         <p:sp>
           <p:nvSpPr>
-            <p:cNvPr id="216" name="pl216"/>
-            <p:cNvSpPr/>
-            <p:nvPr/>
-          </p:nvSpPr>
-          <p:spPr>
-            <a:xfrm>
-              <a:off x="4308239" y="5771981"/>
+            <p:cNvPr id="219" name="pl219"/>
+            <p:cNvSpPr/>
+            <p:nvPr/>
+          </p:nvSpPr>
+          <p:spPr>
+            <a:xfrm>
+              <a:off x="4184901" y="5771981"/>
               <a:ext cx="0" cy="31631"/>
             </a:xfrm>
             <a:custGeom>
@@ -10562,13 +10685,13 @@
         </p:sp>
         <p:sp>
           <p:nvSpPr>
-            <p:cNvPr id="217" name="pl217"/>
-            <p:cNvSpPr/>
-            <p:nvPr/>
-          </p:nvSpPr>
-          <p:spPr>
-            <a:xfrm>
-              <a:off x="5637434" y="5771981"/>
+            <p:cNvPr id="220" name="pl220"/>
+            <p:cNvSpPr/>
+            <p:nvPr/>
+          </p:nvSpPr>
+          <p:spPr>
+            <a:xfrm>
+              <a:off x="5452427" y="5771981"/>
               <a:ext cx="0" cy="31631"/>
             </a:xfrm>
             <a:custGeom>
@@ -10602,7 +10725,7 @@
         </p:sp>
         <p:sp>
           <p:nvSpPr>
-            <p:cNvPr id="218" name="tx218"/>
+            <p:cNvPr id="221" name="tx221"/>
             <p:cNvSpPr/>
             <p:nvPr/>
           </p:nvSpPr>
@@ -10645,13 +10768,13 @@
         </p:sp>
         <p:sp>
           <p:nvSpPr>
-            <p:cNvPr id="219" name="tx219"/>
-            <p:cNvSpPr/>
-            <p:nvPr/>
-          </p:nvSpPr>
-          <p:spPr>
-            <a:xfrm>
-              <a:off x="2908406" y="5828917"/>
+            <p:cNvPr id="222" name="tx222"/>
+            <p:cNvSpPr/>
+            <p:nvPr/>
+          </p:nvSpPr>
+          <p:spPr>
+            <a:xfrm>
+              <a:off x="2846737" y="5828917"/>
               <a:ext cx="141274" cy="72786"/>
             </a:xfrm>
             <a:prstGeom prst="rect">
@@ -10688,13 +10811,13 @@
         </p:sp>
         <p:sp>
           <p:nvSpPr>
-            <p:cNvPr id="220" name="tx220"/>
-            <p:cNvSpPr/>
-            <p:nvPr/>
-          </p:nvSpPr>
-          <p:spPr>
-            <a:xfrm>
-              <a:off x="4237601" y="5828917"/>
+            <p:cNvPr id="223" name="tx223"/>
+            <p:cNvSpPr/>
+            <p:nvPr/>
+          </p:nvSpPr>
+          <p:spPr>
+            <a:xfrm>
+              <a:off x="4114264" y="5828917"/>
               <a:ext cx="141274" cy="72786"/>
             </a:xfrm>
             <a:prstGeom prst="rect">
@@ -10731,13 +10854,13 @@
         </p:sp>
         <p:sp>
           <p:nvSpPr>
-            <p:cNvPr id="221" name="tx221"/>
-            <p:cNvSpPr/>
-            <p:nvPr/>
-          </p:nvSpPr>
-          <p:spPr>
-            <a:xfrm>
-              <a:off x="5566797" y="5828917"/>
+            <p:cNvPr id="224" name="tx224"/>
+            <p:cNvSpPr/>
+            <p:nvPr/>
+          </p:nvSpPr>
+          <p:spPr>
+            <a:xfrm>
+              <a:off x="5381790" y="5828917"/>
               <a:ext cx="141274" cy="72786"/>
             </a:xfrm>
             <a:prstGeom prst="rect">
@@ -10774,7 +10897,7 @@
         </p:sp>
         <p:sp>
           <p:nvSpPr>
-            <p:cNvPr id="222" name="tx222"/>
+            <p:cNvPr id="225" name="tx225"/>
             <p:cNvSpPr/>
             <p:nvPr/>
           </p:nvSpPr>
@@ -10817,7 +10940,7 @@
         </p:sp>
         <p:sp>
           <p:nvSpPr>
-            <p:cNvPr id="223" name="rc223"/>
+            <p:cNvPr id="226" name="rc226"/>
             <p:cNvSpPr/>
             <p:nvPr/>
           </p:nvSpPr>
@@ -10843,7 +10966,7 @@
         </p:sp>
         <p:sp>
           <p:nvSpPr>
-            <p:cNvPr id="224" name="tx224"/>
+            <p:cNvPr id="227" name="tx227"/>
             <p:cNvSpPr/>
             <p:nvPr/>
           </p:nvSpPr>
@@ -10886,7 +11009,7 @@
         </p:sp>
         <p:sp>
           <p:nvSpPr>
-            <p:cNvPr id="225" name="rc225"/>
+            <p:cNvPr id="228" name="rc228"/>
             <p:cNvSpPr/>
             <p:nvPr/>
           </p:nvSpPr>
@@ -10912,7 +11035,7 @@
         </p:sp>
         <p:sp>
           <p:nvSpPr>
-            <p:cNvPr id="226" name="pl226"/>
+            <p:cNvPr id="229" name="pl229"/>
             <p:cNvSpPr/>
             <p:nvPr/>
           </p:nvSpPr>
@@ -10952,7 +11075,7 @@
         </p:sp>
         <p:sp>
           <p:nvSpPr>
-            <p:cNvPr id="227" name="pt227"/>
+            <p:cNvPr id="230" name="pt230"/>
             <p:cNvSpPr/>
             <p:nvPr/>
           </p:nvSpPr>
@@ -10987,7 +11110,7 @@
         </p:sp>
         <p:sp>
           <p:nvSpPr>
-            <p:cNvPr id="228" name="rc228"/>
+            <p:cNvPr id="231" name="rc231"/>
             <p:cNvSpPr/>
             <p:nvPr/>
           </p:nvSpPr>
@@ -11013,7 +11136,7 @@
         </p:sp>
         <p:sp>
           <p:nvSpPr>
-            <p:cNvPr id="229" name="pl229"/>
+            <p:cNvPr id="232" name="pl232"/>
             <p:cNvSpPr/>
             <p:nvPr/>
           </p:nvSpPr>
@@ -11053,7 +11176,7 @@
         </p:sp>
         <p:sp>
           <p:nvSpPr>
-            <p:cNvPr id="230" name="pt230"/>
+            <p:cNvPr id="233" name="pt233"/>
             <p:cNvSpPr/>
             <p:nvPr/>
           </p:nvSpPr>
@@ -11088,7 +11211,7 @@
         </p:sp>
         <p:sp>
           <p:nvSpPr>
-            <p:cNvPr id="231" name="rc231"/>
+            <p:cNvPr id="234" name="rc234"/>
             <p:cNvSpPr/>
             <p:nvPr/>
           </p:nvSpPr>
@@ -11114,7 +11237,7 @@
         </p:sp>
         <p:sp>
           <p:nvSpPr>
-            <p:cNvPr id="232" name="pl232"/>
+            <p:cNvPr id="235" name="pl235"/>
             <p:cNvSpPr/>
             <p:nvPr/>
           </p:nvSpPr>
@@ -11154,7 +11277,7 @@
         </p:sp>
         <p:sp>
           <p:nvSpPr>
-            <p:cNvPr id="233" name="pt233"/>
+            <p:cNvPr id="236" name="pt236"/>
             <p:cNvSpPr/>
             <p:nvPr/>
           </p:nvSpPr>
@@ -11189,7 +11312,7 @@
         </p:sp>
         <p:sp>
           <p:nvSpPr>
-            <p:cNvPr id="234" name="tx234"/>
+            <p:cNvPr id="237" name="tx237"/>
             <p:cNvSpPr/>
             <p:nvPr/>
           </p:nvSpPr>
@@ -11232,7 +11355,7 @@
         </p:sp>
         <p:sp>
           <p:nvSpPr>
-            <p:cNvPr id="235" name="tx235"/>
+            <p:cNvPr id="238" name="tx238"/>
             <p:cNvSpPr/>
             <p:nvPr/>
           </p:nvSpPr>
@@ -11275,7 +11398,7 @@
         </p:sp>
         <p:sp>
           <p:nvSpPr>
-            <p:cNvPr id="236" name="tx236"/>
+            <p:cNvPr id="239" name="tx239"/>
             <p:cNvSpPr/>
             <p:nvPr/>
           </p:nvSpPr>
@@ -11318,7 +11441,7 @@
         </p:sp>
         <p:sp>
           <p:nvSpPr>
-            <p:cNvPr id="237" name="rc237"/>
+            <p:cNvPr id="240" name="rc240"/>
             <p:cNvSpPr/>
             <p:nvPr/>
           </p:nvSpPr>
@@ -11344,7 +11467,7 @@
         </p:sp>
         <p:sp>
           <p:nvSpPr>
-            <p:cNvPr id="238" name="tx238"/>
+            <p:cNvPr id="241" name="tx241"/>
             <p:cNvSpPr/>
             <p:nvPr/>
           </p:nvSpPr>
@@ -11387,7 +11510,7 @@
         </p:sp>
         <p:sp>
           <p:nvSpPr>
-            <p:cNvPr id="239" name="rc239"/>
+            <p:cNvPr id="242" name="rc242"/>
             <p:cNvSpPr/>
             <p:nvPr/>
           </p:nvSpPr>
@@ -11413,7 +11536,7 @@
         </p:sp>
         <p:sp>
           <p:nvSpPr>
-            <p:cNvPr id="240" name="pt240"/>
+            <p:cNvPr id="243" name="pt243"/>
             <p:cNvSpPr/>
             <p:nvPr/>
           </p:nvSpPr>
@@ -11439,7 +11562,7 @@
         </p:sp>
         <p:sp>
           <p:nvSpPr>
-            <p:cNvPr id="241" name="rc241"/>
+            <p:cNvPr id="244" name="rc244"/>
             <p:cNvSpPr/>
             <p:nvPr/>
           </p:nvSpPr>
@@ -11465,7 +11588,7 @@
         </p:sp>
         <p:sp>
           <p:nvSpPr>
-            <p:cNvPr id="242" name="pg242"/>
+            <p:cNvPr id="245" name="pg245"/>
             <p:cNvSpPr/>
             <p:nvPr/>
           </p:nvSpPr>
@@ -11505,7 +11628,7 @@
         </p:sp>
         <p:sp>
           <p:nvSpPr>
-            <p:cNvPr id="243" name="tx243"/>
+            <p:cNvPr id="246" name="tx246"/>
             <p:cNvSpPr/>
             <p:nvPr/>
           </p:nvSpPr>
@@ -11548,7 +11671,7 @@
         </p:sp>
         <p:sp>
           <p:nvSpPr>
-            <p:cNvPr id="244" name="tx244"/>
+            <p:cNvPr id="247" name="tx247"/>
             <p:cNvSpPr/>
             <p:nvPr/>
           </p:nvSpPr>
@@ -11591,7 +11714,7 @@
         </p:sp>
         <p:sp>
           <p:nvSpPr>
-            <p:cNvPr id="245" name="tx245"/>
+            <p:cNvPr id="248" name="tx248"/>
             <p:cNvSpPr/>
             <p:nvPr/>
           </p:nvSpPr>
@@ -11634,7 +11757,7 @@
         </p:sp>
         <p:sp>
           <p:nvSpPr>
-            <p:cNvPr id="246" name="tx246"/>
+            <p:cNvPr id="249" name="tx249"/>
             <p:cNvSpPr/>
             <p:nvPr/>
           </p:nvSpPr>
@@ -11677,7 +11800,7 @@
         </p:sp>
         <p:sp>
           <p:nvSpPr>
-            <p:cNvPr id="247" name="tx247"/>
+            <p:cNvPr id="250" name="tx250"/>
             <p:cNvSpPr/>
             <p:nvPr/>
           </p:nvSpPr>
